--- a/resources/artifacts/presentation.pptx
+++ b/resources/artifacts/presentation.pptx
@@ -4,19 +4,23 @@
   <p:sldMasterIdLst>
     <p:sldMasterId id="2147483648" r:id="rId1"/>
   </p:sldMasterIdLst>
+  <p:notesMasterIdLst>
+    <p:notesMasterId r:id="rId13"/>
+  </p:notesMasterIdLst>
   <p:sldIdLst>
-    <p:sldId id="256" r:id="rId7"/>
-    <p:sldId id="257" r:id="rId9"/>
-    <p:sldId id="258" r:id="rId10"/>
-    <p:sldId id="259" r:id="rId11"/>
-    <p:sldId id="260" r:id="rId12"/>
-    <p:sldId id="261" r:id="rId13"/>
-    <p:sldId id="262" r:id="rId14"/>
-    <p:sldId id="263" r:id="rId15"/>
-    <p:sldId id="264" r:id="rId16"/>
-    <p:sldId id="265" r:id="rId17"/>
+    <p:sldId id="256" r:id="rId2"/>
+    <p:sldId id="257" r:id="rId3"/>
+    <p:sldId id="258" r:id="rId4"/>
+    <p:sldId id="259" r:id="rId5"/>
+    <p:sldId id="260" r:id="rId6"/>
+    <p:sldId id="261" r:id="rId7"/>
+    <p:sldId id="262" r:id="rId8"/>
+    <p:sldId id="263" r:id="rId9"/>
+    <p:sldId id="264" r:id="rId10"/>
+    <p:sldId id="265" r:id="rId11"/>
+    <p:sldId id="266" r:id="rId12"/>
   </p:sldIdLst>
-  <p:sldSz cx="12191695" cy="6858000" type="screen4x3"/>
+  <p:sldSz cx="12192000" cy="6858000"/>
   <p:notesSz cx="6858000" cy="9144000"/>
   <p:defaultTextStyle>
     <a:defPPr>
@@ -113,11 +117,27 @@
       </a:defRPr>
     </a:lvl9pPr>
   </p:defaultTextStyle>
+  <p:extLst>
+    <p:ext uri="{EFAFB233-063F-42B5-8137-9DF3F51BA10A}">
+      <p15:sldGuideLst xmlns:p15="http://schemas.microsoft.com/office/powerpoint/2012/main">
+        <p15:guide id="1" orient="horz" pos="2160">
+          <p15:clr>
+            <a:srgbClr val="A4A3A4"/>
+          </p15:clr>
+        </p15:guide>
+        <p15:guide id="2" pos="2880">
+          <p15:clr>
+            <a:srgbClr val="A4A3A4"/>
+          </p15:clr>
+        </p15:guide>
+      </p15:sldGuideLst>
+    </p:ext>
+  </p:extLst>
 </p:presentation>
 </file>
 
 <file path=ppt/notesMasters/notesMaster1.xml><?xml version="1.0" encoding="utf-8"?>
-<p:notesMaster xmlns:a="http://schemas.openxmlformats.org/drawingml/2006/main" xmlns:p="http://schemas.openxmlformats.org/presentationml/2006/main" xmlns:r="http://schemas.openxmlformats.org/officeDocument/2006/relationships">
+<p:notesMaster xmlns:a="http://schemas.openxmlformats.org/drawingml/2006/main" xmlns:r="http://schemas.openxmlformats.org/officeDocument/2006/relationships" xmlns:p="http://schemas.openxmlformats.org/presentationml/2006/main">
   <p:cSld>
     <p:bg>
       <p:bgRef idx="1001">
@@ -138,241 +158,16 @@
           <a:chExt cx="0" cy="0"/>
         </a:xfrm>
       </p:grpSpPr>
-      <p:sp>
-        <p:nvSpPr>
-          <p:cNvPr id="2" name="Header Placeholder 1"/>
-          <p:cNvSpPr>
-            <a:spLocks noGrp="1"/>
-          </p:cNvSpPr>
-          <p:nvPr>
-            <p:ph type="hdr" sz="quarter"/>
-          </p:nvPr>
-        </p:nvSpPr>
-        <p:spPr>
-          <a:xfrm>
-            <a:off x="0" y="0"/>
-            <a:ext cx="2971800" cy="457200"/>
-          </a:xfrm>
-          <a:prstGeom prst="rect">
-            <a:avLst/>
-          </a:prstGeom>
-        </p:spPr>
-        <p:txBody>
-          <a:bodyPr vert="horz" lIns="91440" tIns="45720" rIns="91440" bIns="45720" rtlCol="0"/>
-          <a:lstStyle>
-            <a:lvl1pPr algn="l">
-              <a:defRPr sz="1200"/>
-            </a:lvl1pPr>
-          </a:lstStyle>
-          <a:p>
-            <a:endParaRPr lang="en-US"/>
-          </a:p>
-        </p:txBody>
-      </p:sp>
-      <p:sp>
-        <p:nvSpPr>
-          <p:cNvPr id="3" name="Date Placeholder 2"/>
-          <p:cNvSpPr>
-            <a:spLocks noGrp="1"/>
-          </p:cNvSpPr>
-          <p:nvPr>
-            <p:ph type="dt" idx="1"/>
-          </p:nvPr>
-        </p:nvSpPr>
-        <p:spPr>
-          <a:xfrm>
-            <a:off x="3884613" y="0"/>
-            <a:ext cx="2971800" cy="457200"/>
-          </a:xfrm>
-          <a:prstGeom prst="rect">
-            <a:avLst/>
-          </a:prstGeom>
-        </p:spPr>
-        <p:txBody>
-          <a:bodyPr vert="horz" lIns="91440" tIns="45720" rIns="91440" bIns="45720" rtlCol="0"/>
-          <a:lstStyle>
-            <a:lvl1pPr algn="r">
-              <a:defRPr sz="1200"/>
-            </a:lvl1pPr>
-          </a:lstStyle>
-          <a:p>
-            <a:fld id="{0F89C1C7-3DCD-1040-A9CF-14679D8B5DDD}" type="datetimeFigureOut">
-              <a:rPr lang="en-US" smtClean="0"/>
-              <a:t>10/17/16</a:t>
-            </a:fld>
-            <a:endParaRPr lang="en-US"/>
-          </a:p>
-        </p:txBody>
-      </p:sp>
-      <p:sp>
-        <p:nvSpPr>
-          <p:cNvPr id="4" name="Slide Image Placeholder 3"/>
-          <p:cNvSpPr>
-            <a:spLocks noGrp="1" noRot="1" noChangeAspect="1"/>
-          </p:cNvSpPr>
-          <p:nvPr>
-            <p:ph type="sldImg" idx="2"/>
-          </p:nvPr>
-        </p:nvSpPr>
-        <p:spPr>
-          <a:xfrm>
-            <a:off x="1143000" y="685800"/>
-            <a:ext cx="4572000" cy="3429000"/>
-          </a:xfrm>
-          <a:prstGeom prst="rect">
-            <a:avLst/>
-          </a:prstGeom>
-          <a:noFill/>
-          <a:ln w="12700">
-            <a:solidFill>
-              <a:prstClr val="black"/>
-            </a:solidFill>
-          </a:ln>
-        </p:spPr>
-        <p:txBody>
-          <a:bodyPr vert="horz" lIns="91440" tIns="45720" rIns="91440" bIns="45720" rtlCol="0" anchor="ctr"/>
-          <a:lstStyle/>
-          <a:p>
-            <a:endParaRPr lang="en-US"/>
-          </a:p>
-        </p:txBody>
-      </p:sp>
-      <p:sp>
-        <p:nvSpPr>
-          <p:cNvPr id="5" name="Notes Placeholder 4"/>
-          <p:cNvSpPr>
-            <a:spLocks noGrp="1"/>
-          </p:cNvSpPr>
-          <p:nvPr>
-            <p:ph type="body" sz="quarter" idx="3"/>
-          </p:nvPr>
-        </p:nvSpPr>
-        <p:spPr>
-          <a:xfrm>
-            <a:off x="685800" y="4343400"/>
-            <a:ext cx="5486400" cy="4114800"/>
-          </a:xfrm>
-          <a:prstGeom prst="rect">
-            <a:avLst/>
-          </a:prstGeom>
-        </p:spPr>
-        <p:txBody>
-          <a:bodyPr vert="horz" lIns="91440" tIns="45720" rIns="91440" bIns="45720" rtlCol="0"/>
-          <a:lstStyle/>
-          <a:p>
-            <a:pPr lvl="0"/>
-            <a:r>
-              <a:rPr lang="en-US" smtClean="0"/>
-              <a:t>Click to edit Master text styles</a:t>
-            </a:r>
-          </a:p>
-          <a:p>
-            <a:pPr lvl="1"/>
-            <a:r>
-              <a:rPr lang="en-US" smtClean="0"/>
-              <a:t>Second level</a:t>
-            </a:r>
-          </a:p>
-          <a:p>
-            <a:pPr lvl="2"/>
-            <a:r>
-              <a:rPr lang="en-US" smtClean="0"/>
-              <a:t>Third level</a:t>
-            </a:r>
-          </a:p>
-          <a:p>
-            <a:pPr lvl="3"/>
-            <a:r>
-              <a:rPr lang="en-US" smtClean="0"/>
-              <a:t>Fourth level</a:t>
-            </a:r>
-          </a:p>
-          <a:p>
-            <a:pPr lvl="4"/>
-            <a:r>
-              <a:rPr lang="en-US" smtClean="0"/>
-              <a:t>Fifth level</a:t>
-            </a:r>
-            <a:endParaRPr lang="en-US"/>
-          </a:p>
-        </p:txBody>
-      </p:sp>
-      <p:sp>
-        <p:nvSpPr>
-          <p:cNvPr id="6" name="Footer Placeholder 5"/>
-          <p:cNvSpPr>
-            <a:spLocks noGrp="1"/>
-          </p:cNvSpPr>
-          <p:nvPr>
-            <p:ph type="ftr" sz="quarter" idx="4"/>
-          </p:nvPr>
-        </p:nvSpPr>
-        <p:spPr>
-          <a:xfrm>
-            <a:off x="0" y="8685213"/>
-            <a:ext cx="2971800" cy="457200"/>
-          </a:xfrm>
-          <a:prstGeom prst="rect">
-            <a:avLst/>
-          </a:prstGeom>
-        </p:spPr>
-        <p:txBody>
-          <a:bodyPr vert="horz" lIns="91440" tIns="45720" rIns="91440" bIns="45720" rtlCol="0" anchor="b"/>
-          <a:lstStyle>
-            <a:lvl1pPr algn="l">
-              <a:defRPr sz="1200"/>
-            </a:lvl1pPr>
-          </a:lstStyle>
-          <a:p>
-            <a:endParaRPr lang="en-US"/>
-          </a:p>
-        </p:txBody>
-      </p:sp>
-      <p:sp>
-        <p:nvSpPr>
-          <p:cNvPr id="7" name="Slide Number Placeholder 6"/>
-          <p:cNvSpPr>
-            <a:spLocks noGrp="1"/>
-          </p:cNvSpPr>
-          <p:nvPr>
-            <p:ph type="sldNum" sz="quarter" idx="5"/>
-          </p:nvPr>
-        </p:nvSpPr>
-        <p:spPr>
-          <a:xfrm>
-            <a:off x="3884613" y="8685213"/>
-            <a:ext cx="2971800" cy="457200"/>
-          </a:xfrm>
-          <a:prstGeom prst="rect">
-            <a:avLst/>
-          </a:prstGeom>
-        </p:spPr>
-        <p:txBody>
-          <a:bodyPr vert="horz" lIns="91440" tIns="45720" rIns="91440" bIns="45720" rtlCol="0" anchor="b"/>
-          <a:lstStyle>
-            <a:lvl1pPr algn="r">
-              <a:defRPr sz="1200"/>
-            </a:lvl1pPr>
-          </a:lstStyle>
-          <a:p>
-            <a:fld id="{BB5E49A5-4136-284D-997B-48E1D791AD67}" type="slidenum">
-              <a:rPr lang="en-US" smtClean="0"/>
-              <a:t>‹#›</a:t>
-            </a:fld>
-            <a:endParaRPr lang="en-US"/>
-          </a:p>
-        </p:txBody>
-      </p:sp>
     </p:spTree>
     <p:extLst>
       <p:ext uri="{BB962C8B-B14F-4D97-AF65-F5344CB8AC3E}">
-        <p14:creationId xmlns:p14="http://schemas.microsoft.com/office/powerpoint/2010/main" val="2623252185"/>
+        <p14:creationId xmlns:p14="http://schemas.microsoft.com/office/powerpoint/2010/main" val="3923412161"/>
       </p:ext>
     </p:extLst>
   </p:cSld>
   <p:clrMap bg1="lt1" tx1="dk1" bg2="lt2" tx2="dk2" accent1="accent1" accent2="accent2" accent3="accent3" accent4="accent4" accent5="accent5" accent6="accent6" hlink="hlink" folHlink="folHlink"/>
   <p:notesStyle>
-    <a:lvl1pPr marL="0" algn="l" defTabSz="457200" rtl="0" eaLnBrk="1" latinLnBrk="0" hangingPunct="1">
+    <a:lvl1pPr marL="0" algn="l" defTabSz="914400" rtl="0" eaLnBrk="1" latinLnBrk="0" hangingPunct="1">
       <a:defRPr sz="1200" kern="1200">
         <a:solidFill>
           <a:schemeClr val="tx1"/>
@@ -382,7 +177,7 @@
         <a:cs typeface="+mn-cs"/>
       </a:defRPr>
     </a:lvl1pPr>
-    <a:lvl2pPr marL="457200" algn="l" defTabSz="457200" rtl="0" eaLnBrk="1" latinLnBrk="0" hangingPunct="1">
+    <a:lvl2pPr marL="457200" algn="l" defTabSz="914400" rtl="0" eaLnBrk="1" latinLnBrk="0" hangingPunct="1">
       <a:defRPr sz="1200" kern="1200">
         <a:solidFill>
           <a:schemeClr val="tx1"/>
@@ -392,7 +187,7 @@
         <a:cs typeface="+mn-cs"/>
       </a:defRPr>
     </a:lvl2pPr>
-    <a:lvl3pPr marL="914400" algn="l" defTabSz="457200" rtl="0" eaLnBrk="1" latinLnBrk="0" hangingPunct="1">
+    <a:lvl3pPr marL="914400" algn="l" defTabSz="914400" rtl="0" eaLnBrk="1" latinLnBrk="0" hangingPunct="1">
       <a:defRPr sz="1200" kern="1200">
         <a:solidFill>
           <a:schemeClr val="tx1"/>
@@ -402,7 +197,7 @@
         <a:cs typeface="+mn-cs"/>
       </a:defRPr>
     </a:lvl3pPr>
-    <a:lvl4pPr marL="1371600" algn="l" defTabSz="457200" rtl="0" eaLnBrk="1" latinLnBrk="0" hangingPunct="1">
+    <a:lvl4pPr marL="1371600" algn="l" defTabSz="914400" rtl="0" eaLnBrk="1" latinLnBrk="0" hangingPunct="1">
       <a:defRPr sz="1200" kern="1200">
         <a:solidFill>
           <a:schemeClr val="tx1"/>
@@ -412,7 +207,7 @@
         <a:cs typeface="+mn-cs"/>
       </a:defRPr>
     </a:lvl4pPr>
-    <a:lvl5pPr marL="1828800" algn="l" defTabSz="457200" rtl="0" eaLnBrk="1" latinLnBrk="0" hangingPunct="1">
+    <a:lvl5pPr marL="1828800" algn="l" defTabSz="914400" rtl="0" eaLnBrk="1" latinLnBrk="0" hangingPunct="1">
       <a:defRPr sz="1200" kern="1200">
         <a:solidFill>
           <a:schemeClr val="tx1"/>
@@ -422,7 +217,7 @@
         <a:cs typeface="+mn-cs"/>
       </a:defRPr>
     </a:lvl5pPr>
-    <a:lvl6pPr marL="2286000" algn="l" defTabSz="457200" rtl="0" eaLnBrk="1" latinLnBrk="0" hangingPunct="1">
+    <a:lvl6pPr marL="2286000" algn="l" defTabSz="914400" rtl="0" eaLnBrk="1" latinLnBrk="0" hangingPunct="1">
       <a:defRPr sz="1200" kern="1200">
         <a:solidFill>
           <a:schemeClr val="tx1"/>
@@ -432,7 +227,7 @@
         <a:cs typeface="+mn-cs"/>
       </a:defRPr>
     </a:lvl6pPr>
-    <a:lvl7pPr marL="2743200" algn="l" defTabSz="457200" rtl="0" eaLnBrk="1" latinLnBrk="0" hangingPunct="1">
+    <a:lvl7pPr marL="2743200" algn="l" defTabSz="914400" rtl="0" eaLnBrk="1" latinLnBrk="0" hangingPunct="1">
       <a:defRPr sz="1200" kern="1200">
         <a:solidFill>
           <a:schemeClr val="tx1"/>
@@ -442,7 +237,7 @@
         <a:cs typeface="+mn-cs"/>
       </a:defRPr>
     </a:lvl7pPr>
-    <a:lvl8pPr marL="3200400" algn="l" defTabSz="457200" rtl="0" eaLnBrk="1" latinLnBrk="0" hangingPunct="1">
+    <a:lvl8pPr marL="3200400" algn="l" defTabSz="914400" rtl="0" eaLnBrk="1" latinLnBrk="0" hangingPunct="1">
       <a:defRPr sz="1200" kern="1200">
         <a:solidFill>
           <a:schemeClr val="tx1"/>
@@ -452,7 +247,7 @@
         <a:cs typeface="+mn-cs"/>
       </a:defRPr>
     </a:lvl8pPr>
-    <a:lvl9pPr marL="3657600" algn="l" defTabSz="457200" rtl="0" eaLnBrk="1" latinLnBrk="0" hangingPunct="1">
+    <a:lvl9pPr marL="3657600" algn="l" defTabSz="914400" rtl="0" eaLnBrk="1" latinLnBrk="0" hangingPunct="1">
       <a:defRPr sz="1200" kern="1200">
         <a:solidFill>
           <a:schemeClr val="tx1"/>
@@ -467,7 +262,7 @@
 </file>
 
 <file path=ppt/notesSlides/notesSlide1.xml><?xml version="1.0" encoding="utf-8"?>
-<p:notes xmlns:a="http://schemas.openxmlformats.org/drawingml/2006/main" xmlns:p="http://schemas.openxmlformats.org/presentationml/2006/main" xmlns:r="http://schemas.openxmlformats.org/officeDocument/2006/relationships">
+<p:notes xmlns:a="http://schemas.openxmlformats.org/drawingml/2006/main" xmlns:r="http://schemas.openxmlformats.org/officeDocument/2006/relationships" xmlns:p="http://schemas.openxmlformats.org/presentationml/2006/main">
   <p:cSld>
     <p:spTree>
       <p:nvGrpSpPr>
@@ -487,7 +282,7 @@
         <p:nvSpPr>
           <p:cNvPr id="2" name="Slide Image Placeholder 1"/>
           <p:cNvSpPr>
-            <a:spLocks noGrp="1"/>
+            <a:spLocks noGrp="1" noRot="1" noChangeAspect="1"/>
           </p:cNvSpPr>
           <p:nvPr>
             <p:ph type="sldImg" idx="2"/>
@@ -502,7 +297,7 @@
             <a:spLocks noGrp="1"/>
           </p:cNvSpPr>
           <p:nvPr>
-            <p:ph type="body" idx="3" sz="quarter"/>
+            <p:ph type="body" sz="quarter" idx="3"/>
           </p:nvPr>
         </p:nvSpPr>
         <p:spPr/>
@@ -523,7 +318,7 @@
             <a:spLocks noGrp="1"/>
           </p:cNvSpPr>
           <p:nvPr>
-            <p:ph type="sldNum" idx="5" sz="quarter"/>
+            <p:ph type="sldNum" sz="quarter" idx="5"/>
           </p:nvPr>
         </p:nvSpPr>
         <p:spPr/>
@@ -537,7 +332,7 @@
 </file>
 
 <file path=ppt/notesSlides/notesSlide10.xml><?xml version="1.0" encoding="utf-8"?>
-<p:notes xmlns:a="http://schemas.openxmlformats.org/drawingml/2006/main" xmlns:p="http://schemas.openxmlformats.org/presentationml/2006/main" xmlns:r="http://schemas.openxmlformats.org/officeDocument/2006/relationships">
+<p:notes xmlns:a="http://schemas.openxmlformats.org/drawingml/2006/main" xmlns:r="http://schemas.openxmlformats.org/officeDocument/2006/relationships" xmlns:p="http://schemas.openxmlformats.org/presentationml/2006/main">
   <p:cSld>
     <p:spTree>
       <p:nvGrpSpPr>
@@ -557,7 +352,7 @@
         <p:nvSpPr>
           <p:cNvPr id="2" name="Slide Image Placeholder 1"/>
           <p:cNvSpPr>
-            <a:spLocks noGrp="1"/>
+            <a:spLocks noGrp="1" noRot="1" noChangeAspect="1"/>
           </p:cNvSpPr>
           <p:nvPr>
             <p:ph type="sldImg" idx="2"/>
@@ -572,7 +367,7 @@
             <a:spLocks noGrp="1"/>
           </p:cNvSpPr>
           <p:nvPr>
-            <p:ph type="body" idx="3" sz="quarter"/>
+            <p:ph type="body" sz="quarter" idx="3"/>
           </p:nvPr>
         </p:nvSpPr>
         <p:spPr/>
@@ -581,7 +376,7 @@
           <a:lstStyle/>
           <a:p>
             <a:r>
-              <a:t>Close on the falsification point. It shows the question is genuinely open.</a:t>
+              <a:t>Three claims, none of them about which pipeline wins.</a:t>
             </a:r>
           </a:p>
         </p:txBody>
@@ -593,7 +388,7 @@
             <a:spLocks noGrp="1"/>
           </p:cNvSpPr>
           <p:nvPr>
-            <p:ph type="sldNum" idx="5" sz="quarter"/>
+            <p:ph type="sldNum" sz="quarter" idx="5"/>
           </p:nvPr>
         </p:nvSpPr>
         <p:spPr/>
@@ -606,8 +401,8 @@
 </p:notes>
 </file>
 
-<file path=ppt/notesSlides/notesSlide2.xml><?xml version="1.0" encoding="utf-8"?>
-<p:notes xmlns:a="http://schemas.openxmlformats.org/drawingml/2006/main" xmlns:p="http://schemas.openxmlformats.org/presentationml/2006/main" xmlns:r="http://schemas.openxmlformats.org/officeDocument/2006/relationships">
+<file path=ppt/notesSlides/notesSlide11.xml><?xml version="1.0" encoding="utf-8"?>
+<p:notes xmlns:a="http://schemas.openxmlformats.org/drawingml/2006/main" xmlns:r="http://schemas.openxmlformats.org/officeDocument/2006/relationships" xmlns:p="http://schemas.openxmlformats.org/presentationml/2006/main">
   <p:cSld>
     <p:spTree>
       <p:nvGrpSpPr>
@@ -627,7 +422,7 @@
         <p:nvSpPr>
           <p:cNvPr id="2" name="Slide Image Placeholder 1"/>
           <p:cNvSpPr>
-            <a:spLocks noGrp="1"/>
+            <a:spLocks noGrp="1" noRot="1" noChangeAspect="1"/>
           </p:cNvSpPr>
           <p:nvPr>
             <p:ph type="sldImg" idx="2"/>
@@ -642,7 +437,7 @@
             <a:spLocks noGrp="1"/>
           </p:cNvSpPr>
           <p:nvPr>
-            <p:ph type="body" idx="3" sz="quarter"/>
+            <p:ph type="body" sz="quarter" idx="3"/>
           </p:nvPr>
         </p:nvSpPr>
         <p:spPr/>
@@ -651,7 +446,7 @@
           <a:lstStyle/>
           <a:p>
             <a:r>
-              <a:t>Say the numbers out loud: 13 filings, 5 companies, 18,297 nodes.</a:t>
+              <a:t>Close on the falsification point. It shows the question is genuinely open.</a:t>
             </a:r>
           </a:p>
         </p:txBody>
@@ -663,7 +458,7 @@
             <a:spLocks noGrp="1"/>
           </p:cNvSpPr>
           <p:nvPr>
-            <p:ph type="sldNum" idx="5" sz="quarter"/>
+            <p:ph type="sldNum" sz="quarter" idx="5"/>
           </p:nvPr>
         </p:nvSpPr>
         <p:spPr/>
@@ -676,8 +471,8 @@
 </p:notes>
 </file>
 
-<file path=ppt/notesSlides/notesSlide3.xml><?xml version="1.0" encoding="utf-8"?>
-<p:notes xmlns:a="http://schemas.openxmlformats.org/drawingml/2006/main" xmlns:p="http://schemas.openxmlformats.org/presentationml/2006/main" xmlns:r="http://schemas.openxmlformats.org/officeDocument/2006/relationships">
+<file path=ppt/notesSlides/notesSlide2.xml><?xml version="1.0" encoding="utf-8"?>
+<p:notes xmlns:a="http://schemas.openxmlformats.org/drawingml/2006/main" xmlns:r="http://schemas.openxmlformats.org/officeDocument/2006/relationships" xmlns:p="http://schemas.openxmlformats.org/presentationml/2006/main">
   <p:cSld>
     <p:spTree>
       <p:nvGrpSpPr>
@@ -697,7 +492,7 @@
         <p:nvSpPr>
           <p:cNvPr id="2" name="Slide Image Placeholder 1"/>
           <p:cNvSpPr>
-            <a:spLocks noGrp="1"/>
+            <a:spLocks noGrp="1" noRot="1" noChangeAspect="1"/>
           </p:cNvSpPr>
           <p:nvPr>
             <p:ph type="sldImg" idx="2"/>
@@ -712,7 +507,7 @@
             <a:spLocks noGrp="1"/>
           </p:cNvSpPr>
           <p:nvPr>
-            <p:ph type="body" idx="3" sz="quarter"/>
+            <p:ph type="body" sz="quarter" idx="3"/>
           </p:nvPr>
         </p:nvSpPr>
         <p:spPr/>
@@ -721,7 +516,7 @@
           <a:lstStyle/>
           <a:p>
             <a:r>
-              <a:t>Three aims. Emphasise that retrieval is the only variable that changes.</a:t>
+              <a:t>Say the numbers out loud: 13 filings, 5 companies, 18,297 nodes.</a:t>
             </a:r>
           </a:p>
         </p:txBody>
@@ -733,7 +528,7 @@
             <a:spLocks noGrp="1"/>
           </p:cNvSpPr>
           <p:nvPr>
-            <p:ph type="sldNum" idx="5" sz="quarter"/>
+            <p:ph type="sldNum" sz="quarter" idx="5"/>
           </p:nvPr>
         </p:nvSpPr>
         <p:spPr/>
@@ -746,8 +541,8 @@
 </p:notes>
 </file>
 
-<file path=ppt/notesSlides/notesSlide4.xml><?xml version="1.0" encoding="utf-8"?>
-<p:notes xmlns:a="http://schemas.openxmlformats.org/drawingml/2006/main" xmlns:p="http://schemas.openxmlformats.org/presentationml/2006/main" xmlns:r="http://schemas.openxmlformats.org/officeDocument/2006/relationships">
+<file path=ppt/notesSlides/notesSlide3.xml><?xml version="1.0" encoding="utf-8"?>
+<p:notes xmlns:a="http://schemas.openxmlformats.org/drawingml/2006/main" xmlns:r="http://schemas.openxmlformats.org/officeDocument/2006/relationships" xmlns:p="http://schemas.openxmlformats.org/presentationml/2006/main">
   <p:cSld>
     <p:spTree>
       <p:nvGrpSpPr>
@@ -767,7 +562,7 @@
         <p:nvSpPr>
           <p:cNvPr id="2" name="Slide Image Placeholder 1"/>
           <p:cNvSpPr>
-            <a:spLocks noGrp="1"/>
+            <a:spLocks noGrp="1" noRot="1" noChangeAspect="1"/>
           </p:cNvSpPr>
           <p:nvPr>
             <p:ph type="sldImg" idx="2"/>
@@ -782,7 +577,7 @@
             <a:spLocks noGrp="1"/>
           </p:cNvSpPr>
           <p:nvPr>
-            <p:ph type="body" idx="3" sz="quarter"/>
+            <p:ph type="body" sz="quarter" idx="3"/>
           </p:nvPr>
         </p:nvSpPr>
         <p:spPr/>
@@ -791,7 +586,7 @@
           <a:lstStyle/>
           <a:p>
             <a:r>
-              <a:t>One corpus, three indexes, one shared answerer and one judge. Walk the flow left to right once. Stress that the answerer and judge never change, so any difference traces back to retrieval.</a:t>
+              <a:t>Three aims. Emphasise that retrieval is the only variable that changes.</a:t>
             </a:r>
           </a:p>
         </p:txBody>
@@ -803,7 +598,7 @@
             <a:spLocks noGrp="1"/>
           </p:cNvSpPr>
           <p:nvPr>
-            <p:ph type="sldNum" idx="5" sz="quarter"/>
+            <p:ph type="sldNum" sz="quarter" idx="5"/>
           </p:nvPr>
         </p:nvSpPr>
         <p:spPr/>
@@ -816,8 +611,8 @@
 </p:notes>
 </file>
 
-<file path=ppt/notesSlides/notesSlide5.xml><?xml version="1.0" encoding="utf-8"?>
-<p:notes xmlns:a="http://schemas.openxmlformats.org/drawingml/2006/main" xmlns:p="http://schemas.openxmlformats.org/presentationml/2006/main" xmlns:r="http://schemas.openxmlformats.org/officeDocument/2006/relationships">
+<file path=ppt/notesSlides/notesSlide4.xml><?xml version="1.0" encoding="utf-8"?>
+<p:notes xmlns:a="http://schemas.openxmlformats.org/drawingml/2006/main" xmlns:r="http://schemas.openxmlformats.org/officeDocument/2006/relationships" xmlns:p="http://schemas.openxmlformats.org/presentationml/2006/main">
   <p:cSld>
     <p:spTree>
       <p:nvGrpSpPr>
@@ -837,7 +632,7 @@
         <p:nvSpPr>
           <p:cNvPr id="2" name="Slide Image Placeholder 1"/>
           <p:cNvSpPr>
-            <a:spLocks noGrp="1"/>
+            <a:spLocks noGrp="1" noRot="1" noChangeAspect="1"/>
           </p:cNvSpPr>
           <p:nvPr>
             <p:ph type="sldImg" idx="2"/>
@@ -852,7 +647,7 @@
             <a:spLocks noGrp="1"/>
           </p:cNvSpPr>
           <p:nvPr>
-            <p:ph type="body" idx="3" sz="quarter"/>
+            <p:ph type="body" sz="quarter" idx="3"/>
           </p:nvPr>
         </p:nvSpPr>
         <p:spPr/>
@@ -861,7 +656,7 @@
           <a:lstStyle/>
           <a:p>
             <a:r>
-              <a:t>The first two rows state how each pipeline works. The third row is a prediction. Point at it and say plainly that it is a hypothesis, not a result.</a:t>
+              <a:t>One corpus, three indexes, one shared answerer and one judge. Walk the flow left to right once. Stress that the answerer and judge never change, so any difference traces back to retrieval.</a:t>
             </a:r>
           </a:p>
         </p:txBody>
@@ -873,7 +668,7 @@
             <a:spLocks noGrp="1"/>
           </p:cNvSpPr>
           <p:nvPr>
-            <p:ph type="sldNum" idx="5" sz="quarter"/>
+            <p:ph type="sldNum" sz="quarter" idx="5"/>
           </p:nvPr>
         </p:nvSpPr>
         <p:spPr/>
@@ -886,8 +681,8 @@
 </p:notes>
 </file>
 
-<file path=ppt/notesSlides/notesSlide6.xml><?xml version="1.0" encoding="utf-8"?>
-<p:notes xmlns:a="http://schemas.openxmlformats.org/drawingml/2006/main" xmlns:p="http://schemas.openxmlformats.org/presentationml/2006/main" xmlns:r="http://schemas.openxmlformats.org/officeDocument/2006/relationships">
+<file path=ppt/notesSlides/notesSlide5.xml><?xml version="1.0" encoding="utf-8"?>
+<p:notes xmlns:a="http://schemas.openxmlformats.org/drawingml/2006/main" xmlns:r="http://schemas.openxmlformats.org/officeDocument/2006/relationships" xmlns:p="http://schemas.openxmlformats.org/presentationml/2006/main">
   <p:cSld>
     <p:spTree>
       <p:nvGrpSpPr>
@@ -907,7 +702,7 @@
         <p:nvSpPr>
           <p:cNvPr id="2" name="Slide Image Placeholder 1"/>
           <p:cNvSpPr>
-            <a:spLocks noGrp="1"/>
+            <a:spLocks noGrp="1" noRot="1" noChangeAspect="1"/>
           </p:cNvSpPr>
           <p:nvPr>
             <p:ph type="sldImg" idx="2"/>
@@ -922,7 +717,7 @@
             <a:spLocks noGrp="1"/>
           </p:cNvSpPr>
           <p:nvPr>
-            <p:ph type="body" idx="3" sz="quarter"/>
+            <p:ph type="body" sz="quarter" idx="3"/>
           </p:nvPr>
         </p:nvSpPr>
         <p:spPr/>
@@ -931,7 +726,7 @@
           <a:lstStyle/>
           <a:p>
             <a:r>
-              <a:t>Land the three numbers: 13 filings, 339 tests, one financial-domain citation. Keep it to about twenty seconds.</a:t>
+              <a:t>The first two rows state how each pipeline works. The third row is a prediction. Point at it and say plainly that it is a hypothesis, not a result.</a:t>
             </a:r>
           </a:p>
         </p:txBody>
@@ -943,7 +738,7 @@
             <a:spLocks noGrp="1"/>
           </p:cNvSpPr>
           <p:nvPr>
-            <p:ph type="sldNum" idx="5" sz="quarter"/>
+            <p:ph type="sldNum" sz="quarter" idx="5"/>
           </p:nvPr>
         </p:nvSpPr>
         <p:spPr/>
@@ -956,8 +751,8 @@
 </p:notes>
 </file>
 
-<file path=ppt/notesSlides/notesSlide7.xml><?xml version="1.0" encoding="utf-8"?>
-<p:notes xmlns:a="http://schemas.openxmlformats.org/drawingml/2006/main" xmlns:p="http://schemas.openxmlformats.org/presentationml/2006/main" xmlns:r="http://schemas.openxmlformats.org/officeDocument/2006/relationships">
+<file path=ppt/notesSlides/notesSlide6.xml><?xml version="1.0" encoding="utf-8"?>
+<p:notes xmlns:a="http://schemas.openxmlformats.org/drawingml/2006/main" xmlns:r="http://schemas.openxmlformats.org/officeDocument/2006/relationships" xmlns:p="http://schemas.openxmlformats.org/presentationml/2006/main">
   <p:cSld>
     <p:spTree>
       <p:nvGrpSpPr>
@@ -977,7 +772,7 @@
         <p:nvSpPr>
           <p:cNvPr id="2" name="Slide Image Placeholder 1"/>
           <p:cNvSpPr>
-            <a:spLocks noGrp="1"/>
+            <a:spLocks noGrp="1" noRot="1" noChangeAspect="1"/>
           </p:cNvSpPr>
           <p:nvPr>
             <p:ph type="sldImg" idx="2"/>
@@ -992,7 +787,7 @@
             <a:spLocks noGrp="1"/>
           </p:cNvSpPr>
           <p:nvPr>
-            <p:ph type="body" idx="3" sz="quarter"/>
+            <p:ph type="body" sz="quarter" idx="3"/>
           </p:nvPr>
         </p:nvSpPr>
         <p:spPr/>
@@ -1001,7 +796,7 @@
           <a:lstStyle/>
           <a:p>
             <a:r>
-              <a:t>Be honest here. Zero results is the true state, and saying it plainly beats a vague claim.</a:t>
+              <a:t>Land the three numbers: 13 filings, 339 tests, one financial-domain citation. Keep it to about twenty seconds.</a:t>
             </a:r>
           </a:p>
         </p:txBody>
@@ -1013,7 +808,7 @@
             <a:spLocks noGrp="1"/>
           </p:cNvSpPr>
           <p:nvPr>
-            <p:ph type="sldNum" idx="5" sz="quarter"/>
+            <p:ph type="sldNum" sz="quarter" idx="5"/>
           </p:nvPr>
         </p:nvSpPr>
         <p:spPr/>
@@ -1026,8 +821,8 @@
 </p:notes>
 </file>
 
-<file path=ppt/notesSlides/notesSlide8.xml><?xml version="1.0" encoding="utf-8"?>
-<p:notes xmlns:a="http://schemas.openxmlformats.org/drawingml/2006/main" xmlns:p="http://schemas.openxmlformats.org/presentationml/2006/main" xmlns:r="http://schemas.openxmlformats.org/officeDocument/2006/relationships">
+<file path=ppt/notesSlides/notesSlide7.xml><?xml version="1.0" encoding="utf-8"?>
+<p:notes xmlns:a="http://schemas.openxmlformats.org/drawingml/2006/main" xmlns:r="http://schemas.openxmlformats.org/officeDocument/2006/relationships" xmlns:p="http://schemas.openxmlformats.org/presentationml/2006/main">
   <p:cSld>
     <p:spTree>
       <p:nvGrpSpPr>
@@ -1047,7 +842,7 @@
         <p:nvSpPr>
           <p:cNvPr id="2" name="Slide Image Placeholder 1"/>
           <p:cNvSpPr>
-            <a:spLocks noGrp="1"/>
+            <a:spLocks noGrp="1" noRot="1" noChangeAspect="1"/>
           </p:cNvSpPr>
           <p:nvPr>
             <p:ph type="sldImg" idx="2"/>
@@ -1062,7 +857,7 @@
             <a:spLocks noGrp="1"/>
           </p:cNvSpPr>
           <p:nvPr>
-            <p:ph type="body" idx="3" sz="quarter"/>
+            <p:ph type="body" sz="quarter" idx="3"/>
           </p:nvPr>
         </p:nvSpPr>
         <p:spPr/>
@@ -1071,7 +866,7 @@
           <a:lstStyle/>
           <a:p>
             <a:r>
-              <a:t>Swipe to the second desktop here. Do not narrate the switch.</a:t>
+              <a:t>Be honest here. Zero results is the true state, and saying it plainly beats a vague claim.</a:t>
             </a:r>
           </a:p>
         </p:txBody>
@@ -1083,7 +878,7 @@
             <a:spLocks noGrp="1"/>
           </p:cNvSpPr>
           <p:nvPr>
-            <p:ph type="sldNum" idx="5" sz="quarter"/>
+            <p:ph type="sldNum" sz="quarter" idx="5"/>
           </p:nvPr>
         </p:nvSpPr>
         <p:spPr/>
@@ -1096,8 +891,8 @@
 </p:notes>
 </file>
 
-<file path=ppt/notesSlides/notesSlide9.xml><?xml version="1.0" encoding="utf-8"?>
-<p:notes xmlns:a="http://schemas.openxmlformats.org/drawingml/2006/main" xmlns:p="http://schemas.openxmlformats.org/presentationml/2006/main" xmlns:r="http://schemas.openxmlformats.org/officeDocument/2006/relationships">
+<file path=ppt/notesSlides/notesSlide8.xml><?xml version="1.0" encoding="utf-8"?>
+<p:notes xmlns:a="http://schemas.openxmlformats.org/drawingml/2006/main" xmlns:r="http://schemas.openxmlformats.org/officeDocument/2006/relationships" xmlns:p="http://schemas.openxmlformats.org/presentationml/2006/main">
   <p:cSld>
     <p:spTree>
       <p:nvGrpSpPr>
@@ -1117,7 +912,7 @@
         <p:nvSpPr>
           <p:cNvPr id="2" name="Slide Image Placeholder 1"/>
           <p:cNvSpPr>
-            <a:spLocks noGrp="1"/>
+            <a:spLocks noGrp="1" noRot="1" noChangeAspect="1"/>
           </p:cNvSpPr>
           <p:nvPr>
             <p:ph type="sldImg" idx="2"/>
@@ -1132,7 +927,7 @@
             <a:spLocks noGrp="1"/>
           </p:cNvSpPr>
           <p:nvPr>
-            <p:ph type="body" idx="3" sz="quarter"/>
+            <p:ph type="body" sz="quarter" idx="3"/>
           </p:nvPr>
         </p:nvSpPr>
         <p:spPr/>
@@ -1141,7 +936,7 @@
           <a:lstStyle/>
           <a:p>
             <a:r>
-              <a:t>Three claims, none of them about which pipeline wins.</a:t>
+              <a:t>Swipe to the second desktop here. Do not narrate the switch.</a:t>
             </a:r>
           </a:p>
         </p:txBody>
@@ -1153,7 +948,77 @@
             <a:spLocks noGrp="1"/>
           </p:cNvSpPr>
           <p:nvPr>
-            <p:ph type="sldNum" idx="5" sz="quarter"/>
+            <p:ph type="sldNum" sz="quarter" idx="5"/>
+          </p:nvPr>
+        </p:nvSpPr>
+        <p:spPr/>
+      </p:sp>
+    </p:spTree>
+  </p:cSld>
+  <p:clrMapOvr>
+    <a:masterClrMapping/>
+  </p:clrMapOvr>
+</p:notes>
+</file>
+
+<file path=ppt/notesSlides/notesSlide9.xml><?xml version="1.0" encoding="utf-8"?>
+<p:notes xmlns:a="http://schemas.openxmlformats.org/drawingml/2006/main" xmlns:r="http://schemas.openxmlformats.org/officeDocument/2006/relationships" xmlns:p="http://schemas.openxmlformats.org/presentationml/2006/main">
+  <p:cSld>
+    <p:spTree>
+      <p:nvGrpSpPr>
+        <p:cNvPr id="1" name=""/>
+        <p:cNvGrpSpPr/>
+        <p:nvPr/>
+      </p:nvGrpSpPr>
+      <p:grpSpPr>
+        <a:xfrm>
+          <a:off x="0" y="0"/>
+          <a:ext cx="0" cy="0"/>
+          <a:chOff x="0" y="0"/>
+          <a:chExt cx="0" cy="0"/>
+        </a:xfrm>
+      </p:grpSpPr>
+      <p:sp>
+        <p:nvSpPr>
+          <p:cNvPr id="2" name="Slide Image Placeholder 1"/>
+          <p:cNvSpPr>
+            <a:spLocks noGrp="1" noRot="1" noChangeAspect="1"/>
+          </p:cNvSpPr>
+          <p:nvPr>
+            <p:ph type="sldImg" idx="2"/>
+          </p:nvPr>
+        </p:nvSpPr>
+        <p:spPr/>
+      </p:sp>
+      <p:sp>
+        <p:nvSpPr>
+          <p:cNvPr id="3" name="Notes Placeholder 2"/>
+          <p:cNvSpPr>
+            <a:spLocks noGrp="1"/>
+          </p:cNvSpPr>
+          <p:nvPr>
+            <p:ph type="body" sz="quarter" idx="3"/>
+          </p:nvPr>
+        </p:nvSpPr>
+        <p:spPr/>
+        <p:txBody>
+          <a:bodyPr/>
+          <a:lstStyle/>
+          <a:p>
+            <a:r>
+              <a:t>This is the run they just watched. Read one row, not three. The P3 line is the one worth pausing on: it retrieved real nodes from a neighbouring section, which is the failure mode its architecture predicts.</a:t>
+            </a:r>
+          </a:p>
+        </p:txBody>
+      </p:sp>
+      <p:sp>
+        <p:nvSpPr>
+          <p:cNvPr id="4" name="Slide Number Placeholder 3"/>
+          <p:cNvSpPr>
+            <a:spLocks noGrp="1"/>
+          </p:cNvSpPr>
+          <p:nvPr>
+            <p:ph type="sldNum" sz="quarter" idx="5"/>
           </p:nvPr>
         </p:nvSpPr>
         <p:spPr/>
@@ -1204,10 +1069,9 @@
           <a:lstStyle/>
           <a:p>
             <a:r>
-              <a:rPr lang="en-US" smtClean="0"/>
+              <a:rPr lang="en-US"/>
               <a:t>Click to edit Master title style</a:t>
             </a:r>
-            <a:endParaRPr lang="en-US"/>
           </a:p>
         </p:txBody>
       </p:sp>
@@ -1323,10 +1187,9 @@
           </a:lstStyle>
           <a:p>
             <a:r>
-              <a:rPr lang="en-US" smtClean="0"/>
+              <a:rPr lang="en-US"/>
               <a:t>Click to edit Master subtitle style</a:t>
             </a:r>
-            <a:endParaRPr lang="en-US"/>
           </a:p>
         </p:txBody>
       </p:sp>
@@ -1347,7 +1210,7 @@
           <a:p>
             <a:fld id="{5BCAD085-E8A6-8845-BD4E-CB4CCA059FC4}" type="datetimeFigureOut">
               <a:rPr lang="en-US" smtClean="0"/>
-              <a:t>1/27/13</a:t>
+              <a:t>8/20/26</a:t>
             </a:fld>
             <a:endParaRPr lang="en-US"/>
           </a:p>
@@ -1441,10 +1304,9 @@
           <a:lstStyle/>
           <a:p>
             <a:r>
-              <a:rPr lang="en-US" smtClean="0"/>
+              <a:rPr lang="en-US"/>
               <a:t>Click to edit Master title style</a:t>
             </a:r>
-            <a:endParaRPr lang="en-US"/>
           </a:p>
         </p:txBody>
       </p:sp>
@@ -1465,38 +1327,37 @@
           <a:p>
             <a:pPr lvl="0"/>
             <a:r>
-              <a:rPr lang="en-US" smtClean="0"/>
+              <a:rPr lang="en-US"/>
               <a:t>Click to edit Master text styles</a:t>
             </a:r>
           </a:p>
           <a:p>
             <a:pPr lvl="1"/>
             <a:r>
-              <a:rPr lang="en-US" smtClean="0"/>
+              <a:rPr lang="en-US"/>
               <a:t>Second level</a:t>
             </a:r>
           </a:p>
           <a:p>
             <a:pPr lvl="2"/>
             <a:r>
-              <a:rPr lang="en-US" smtClean="0"/>
+              <a:rPr lang="en-US"/>
               <a:t>Third level</a:t>
             </a:r>
           </a:p>
           <a:p>
             <a:pPr lvl="3"/>
             <a:r>
-              <a:rPr lang="en-US" smtClean="0"/>
+              <a:rPr lang="en-US"/>
               <a:t>Fourth level</a:t>
             </a:r>
           </a:p>
           <a:p>
             <a:pPr lvl="4"/>
             <a:r>
-              <a:rPr lang="en-US" smtClean="0"/>
+              <a:rPr lang="en-US"/>
               <a:t>Fifth level</a:t>
             </a:r>
-            <a:endParaRPr lang="en-US"/>
           </a:p>
         </p:txBody>
       </p:sp>
@@ -1517,7 +1378,7 @@
           <a:p>
             <a:fld id="{5BCAD085-E8A6-8845-BD4E-CB4CCA059FC4}" type="datetimeFigureOut">
               <a:rPr lang="en-US" smtClean="0"/>
-              <a:t>1/27/13</a:t>
+              <a:t>8/20/26</a:t>
             </a:fld>
             <a:endParaRPr lang="en-US"/>
           </a:p>
@@ -1616,10 +1477,9 @@
           <a:lstStyle/>
           <a:p>
             <a:r>
-              <a:rPr lang="en-US" smtClean="0"/>
+              <a:rPr lang="en-US"/>
               <a:t>Click to edit Master title style</a:t>
             </a:r>
-            <a:endParaRPr lang="en-US"/>
           </a:p>
         </p:txBody>
       </p:sp>
@@ -1645,38 +1505,37 @@
           <a:p>
             <a:pPr lvl="0"/>
             <a:r>
-              <a:rPr lang="en-US" smtClean="0"/>
+              <a:rPr lang="en-US"/>
               <a:t>Click to edit Master text styles</a:t>
             </a:r>
           </a:p>
           <a:p>
             <a:pPr lvl="1"/>
             <a:r>
-              <a:rPr lang="en-US" smtClean="0"/>
+              <a:rPr lang="en-US"/>
               <a:t>Second level</a:t>
             </a:r>
           </a:p>
           <a:p>
             <a:pPr lvl="2"/>
             <a:r>
-              <a:rPr lang="en-US" smtClean="0"/>
+              <a:rPr lang="en-US"/>
               <a:t>Third level</a:t>
             </a:r>
           </a:p>
           <a:p>
             <a:pPr lvl="3"/>
             <a:r>
-              <a:rPr lang="en-US" smtClean="0"/>
+              <a:rPr lang="en-US"/>
               <a:t>Fourth level</a:t>
             </a:r>
           </a:p>
           <a:p>
             <a:pPr lvl="4"/>
             <a:r>
-              <a:rPr lang="en-US" smtClean="0"/>
+              <a:rPr lang="en-US"/>
               <a:t>Fifth level</a:t>
             </a:r>
-            <a:endParaRPr lang="en-US"/>
           </a:p>
         </p:txBody>
       </p:sp>
@@ -1697,7 +1556,7 @@
           <a:p>
             <a:fld id="{5BCAD085-E8A6-8845-BD4E-CB4CCA059FC4}" type="datetimeFigureOut">
               <a:rPr lang="en-US" smtClean="0"/>
-              <a:t>1/27/13</a:t>
+              <a:t>8/20/26</a:t>
             </a:fld>
             <a:endParaRPr lang="en-US"/>
           </a:p>
@@ -1791,10 +1650,9 @@
           <a:lstStyle/>
           <a:p>
             <a:r>
-              <a:rPr lang="en-US" smtClean="0"/>
+              <a:rPr lang="en-US"/>
               <a:t>Click to edit Master title style</a:t>
             </a:r>
-            <a:endParaRPr lang="en-US"/>
           </a:p>
         </p:txBody>
       </p:sp>
@@ -1815,38 +1673,37 @@
           <a:p>
             <a:pPr lvl="0"/>
             <a:r>
-              <a:rPr lang="en-US" smtClean="0"/>
+              <a:rPr lang="en-US"/>
               <a:t>Click to edit Master text styles</a:t>
             </a:r>
           </a:p>
           <a:p>
             <a:pPr lvl="1"/>
             <a:r>
-              <a:rPr lang="en-US" smtClean="0"/>
+              <a:rPr lang="en-US"/>
               <a:t>Second level</a:t>
             </a:r>
           </a:p>
           <a:p>
             <a:pPr lvl="2"/>
             <a:r>
-              <a:rPr lang="en-US" smtClean="0"/>
+              <a:rPr lang="en-US"/>
               <a:t>Third level</a:t>
             </a:r>
           </a:p>
           <a:p>
             <a:pPr lvl="3"/>
             <a:r>
-              <a:rPr lang="en-US" smtClean="0"/>
+              <a:rPr lang="en-US"/>
               <a:t>Fourth level</a:t>
             </a:r>
           </a:p>
           <a:p>
             <a:pPr lvl="4"/>
             <a:r>
-              <a:rPr lang="en-US" smtClean="0"/>
+              <a:rPr lang="en-US"/>
               <a:t>Fifth level</a:t>
             </a:r>
-            <a:endParaRPr lang="en-US"/>
           </a:p>
         </p:txBody>
       </p:sp>
@@ -1867,7 +1724,7 @@
           <a:p>
             <a:fld id="{5BCAD085-E8A6-8845-BD4E-CB4CCA059FC4}" type="datetimeFigureOut">
               <a:rPr lang="en-US" smtClean="0"/>
-              <a:t>1/27/13</a:t>
+              <a:t>8/20/26</a:t>
             </a:fld>
             <a:endParaRPr lang="en-US"/>
           </a:p>
@@ -1970,10 +1827,9 @@
           </a:lstStyle>
           <a:p>
             <a:r>
-              <a:rPr lang="en-US" smtClean="0"/>
+              <a:rPr lang="en-US"/>
               <a:t>Click to edit Master title style</a:t>
             </a:r>
-            <a:endParaRPr lang="en-US"/>
           </a:p>
         </p:txBody>
       </p:sp>
@@ -2090,7 +1946,7 @@
           <a:p>
             <a:pPr lvl="0"/>
             <a:r>
-              <a:rPr lang="en-US" smtClean="0"/>
+              <a:rPr lang="en-US"/>
               <a:t>Click to edit Master text styles</a:t>
             </a:r>
           </a:p>
@@ -2113,7 +1969,7 @@
           <a:p>
             <a:fld id="{5BCAD085-E8A6-8845-BD4E-CB4CCA059FC4}" type="datetimeFigureOut">
               <a:rPr lang="en-US" smtClean="0"/>
-              <a:t>1/27/13</a:t>
+              <a:t>8/20/26</a:t>
             </a:fld>
             <a:endParaRPr lang="en-US"/>
           </a:p>
@@ -2207,10 +2063,9 @@
           <a:lstStyle/>
           <a:p>
             <a:r>
-              <a:rPr lang="en-US" smtClean="0"/>
+              <a:rPr lang="en-US"/>
               <a:t>Click to edit Master title style</a:t>
             </a:r>
-            <a:endParaRPr lang="en-US"/>
           </a:p>
         </p:txBody>
       </p:sp>
@@ -2264,38 +2119,37 @@
           <a:p>
             <a:pPr lvl="0"/>
             <a:r>
-              <a:rPr lang="en-US" smtClean="0"/>
+              <a:rPr lang="en-US"/>
               <a:t>Click to edit Master text styles</a:t>
             </a:r>
           </a:p>
           <a:p>
             <a:pPr lvl="1"/>
             <a:r>
-              <a:rPr lang="en-US" smtClean="0"/>
+              <a:rPr lang="en-US"/>
               <a:t>Second level</a:t>
             </a:r>
           </a:p>
           <a:p>
             <a:pPr lvl="2"/>
             <a:r>
-              <a:rPr lang="en-US" smtClean="0"/>
+              <a:rPr lang="en-US"/>
               <a:t>Third level</a:t>
             </a:r>
           </a:p>
           <a:p>
             <a:pPr lvl="3"/>
             <a:r>
-              <a:rPr lang="en-US" smtClean="0"/>
+              <a:rPr lang="en-US"/>
               <a:t>Fourth level</a:t>
             </a:r>
           </a:p>
           <a:p>
             <a:pPr lvl="4"/>
             <a:r>
-              <a:rPr lang="en-US" smtClean="0"/>
+              <a:rPr lang="en-US"/>
               <a:t>Fifth level</a:t>
             </a:r>
-            <a:endParaRPr lang="en-US"/>
           </a:p>
         </p:txBody>
       </p:sp>
@@ -2349,38 +2203,37 @@
           <a:p>
             <a:pPr lvl="0"/>
             <a:r>
-              <a:rPr lang="en-US" smtClean="0"/>
+              <a:rPr lang="en-US"/>
               <a:t>Click to edit Master text styles</a:t>
             </a:r>
           </a:p>
           <a:p>
             <a:pPr lvl="1"/>
             <a:r>
-              <a:rPr lang="en-US" smtClean="0"/>
+              <a:rPr lang="en-US"/>
               <a:t>Second level</a:t>
             </a:r>
           </a:p>
           <a:p>
             <a:pPr lvl="2"/>
             <a:r>
-              <a:rPr lang="en-US" smtClean="0"/>
+              <a:rPr lang="en-US"/>
               <a:t>Third level</a:t>
             </a:r>
           </a:p>
           <a:p>
             <a:pPr lvl="3"/>
             <a:r>
-              <a:rPr lang="en-US" smtClean="0"/>
+              <a:rPr lang="en-US"/>
               <a:t>Fourth level</a:t>
             </a:r>
           </a:p>
           <a:p>
             <a:pPr lvl="4"/>
             <a:r>
-              <a:rPr lang="en-US" smtClean="0"/>
+              <a:rPr lang="en-US"/>
               <a:t>Fifth level</a:t>
             </a:r>
-            <a:endParaRPr lang="en-US"/>
           </a:p>
         </p:txBody>
       </p:sp>
@@ -2401,7 +2254,7 @@
           <a:p>
             <a:fld id="{5BCAD085-E8A6-8845-BD4E-CB4CCA059FC4}" type="datetimeFigureOut">
               <a:rPr lang="en-US" smtClean="0"/>
-              <a:t>1/27/13</a:t>
+              <a:t>8/20/26</a:t>
             </a:fld>
             <a:endParaRPr lang="en-US"/>
           </a:p>
@@ -2499,10 +2352,9 @@
           </a:lstStyle>
           <a:p>
             <a:r>
-              <a:rPr lang="en-US" smtClean="0"/>
+              <a:rPr lang="en-US"/>
               <a:t>Click to edit Master title style</a:t>
             </a:r>
-            <a:endParaRPr lang="en-US"/>
           </a:p>
         </p:txBody>
       </p:sp>
@@ -2565,7 +2417,7 @@
           <a:p>
             <a:pPr lvl="0"/>
             <a:r>
-              <a:rPr lang="en-US" smtClean="0"/>
+              <a:rPr lang="en-US"/>
               <a:t>Click to edit Master text styles</a:t>
             </a:r>
           </a:p>
@@ -2621,38 +2473,37 @@
           <a:p>
             <a:pPr lvl="0"/>
             <a:r>
-              <a:rPr lang="en-US" smtClean="0"/>
+              <a:rPr lang="en-US"/>
               <a:t>Click to edit Master text styles</a:t>
             </a:r>
           </a:p>
           <a:p>
             <a:pPr lvl="1"/>
             <a:r>
-              <a:rPr lang="en-US" smtClean="0"/>
+              <a:rPr lang="en-US"/>
               <a:t>Second level</a:t>
             </a:r>
           </a:p>
           <a:p>
             <a:pPr lvl="2"/>
             <a:r>
-              <a:rPr lang="en-US" smtClean="0"/>
+              <a:rPr lang="en-US"/>
               <a:t>Third level</a:t>
             </a:r>
           </a:p>
           <a:p>
             <a:pPr lvl="3"/>
             <a:r>
-              <a:rPr lang="en-US" smtClean="0"/>
+              <a:rPr lang="en-US"/>
               <a:t>Fourth level</a:t>
             </a:r>
           </a:p>
           <a:p>
             <a:pPr lvl="4"/>
             <a:r>
-              <a:rPr lang="en-US" smtClean="0"/>
+              <a:rPr lang="en-US"/>
               <a:t>Fifth level</a:t>
             </a:r>
-            <a:endParaRPr lang="en-US"/>
           </a:p>
         </p:txBody>
       </p:sp>
@@ -2715,7 +2566,7 @@
           <a:p>
             <a:pPr lvl="0"/>
             <a:r>
-              <a:rPr lang="en-US" smtClean="0"/>
+              <a:rPr lang="en-US"/>
               <a:t>Click to edit Master text styles</a:t>
             </a:r>
           </a:p>
@@ -2771,38 +2622,37 @@
           <a:p>
             <a:pPr lvl="0"/>
             <a:r>
-              <a:rPr lang="en-US" smtClean="0"/>
+              <a:rPr lang="en-US"/>
               <a:t>Click to edit Master text styles</a:t>
             </a:r>
           </a:p>
           <a:p>
             <a:pPr lvl="1"/>
             <a:r>
-              <a:rPr lang="en-US" smtClean="0"/>
+              <a:rPr lang="en-US"/>
               <a:t>Second level</a:t>
             </a:r>
           </a:p>
           <a:p>
             <a:pPr lvl="2"/>
             <a:r>
-              <a:rPr lang="en-US" smtClean="0"/>
+              <a:rPr lang="en-US"/>
               <a:t>Third level</a:t>
             </a:r>
           </a:p>
           <a:p>
             <a:pPr lvl="3"/>
             <a:r>
-              <a:rPr lang="en-US" smtClean="0"/>
+              <a:rPr lang="en-US"/>
               <a:t>Fourth level</a:t>
             </a:r>
           </a:p>
           <a:p>
             <a:pPr lvl="4"/>
             <a:r>
-              <a:rPr lang="en-US" smtClean="0"/>
+              <a:rPr lang="en-US"/>
               <a:t>Fifth level</a:t>
             </a:r>
-            <a:endParaRPr lang="en-US"/>
           </a:p>
         </p:txBody>
       </p:sp>
@@ -2823,7 +2673,7 @@
           <a:p>
             <a:fld id="{5BCAD085-E8A6-8845-BD4E-CB4CCA059FC4}" type="datetimeFigureOut">
               <a:rPr lang="en-US" smtClean="0"/>
-              <a:t>1/27/13</a:t>
+              <a:t>8/20/26</a:t>
             </a:fld>
             <a:endParaRPr lang="en-US"/>
           </a:p>
@@ -2917,10 +2767,9 @@
           <a:lstStyle/>
           <a:p>
             <a:r>
-              <a:rPr lang="en-US" smtClean="0"/>
+              <a:rPr lang="en-US"/>
               <a:t>Click to edit Master title style</a:t>
             </a:r>
-            <a:endParaRPr lang="en-US"/>
           </a:p>
         </p:txBody>
       </p:sp>
@@ -2941,7 +2790,7 @@
           <a:p>
             <a:fld id="{5BCAD085-E8A6-8845-BD4E-CB4CCA059FC4}" type="datetimeFigureOut">
               <a:rPr lang="en-US" smtClean="0"/>
-              <a:t>1/27/13</a:t>
+              <a:t>8/20/26</a:t>
             </a:fld>
             <a:endParaRPr lang="en-US"/>
           </a:p>
@@ -3036,7 +2885,7 @@
           <a:p>
             <a:fld id="{5BCAD085-E8A6-8845-BD4E-CB4CCA059FC4}" type="datetimeFigureOut">
               <a:rPr lang="en-US" smtClean="0"/>
-              <a:t>1/27/13</a:t>
+              <a:t>8/20/26</a:t>
             </a:fld>
             <a:endParaRPr lang="en-US"/>
           </a:p>
@@ -3139,10 +2988,9 @@
           </a:lstStyle>
           <a:p>
             <a:r>
-              <a:rPr lang="en-US" smtClean="0"/>
+              <a:rPr lang="en-US"/>
               <a:t>Click to edit Master title style</a:t>
             </a:r>
-            <a:endParaRPr lang="en-US"/>
           </a:p>
         </p:txBody>
       </p:sp>
@@ -3196,38 +3044,37 @@
           <a:p>
             <a:pPr lvl="0"/>
             <a:r>
-              <a:rPr lang="en-US" smtClean="0"/>
+              <a:rPr lang="en-US"/>
               <a:t>Click to edit Master text styles</a:t>
             </a:r>
           </a:p>
           <a:p>
             <a:pPr lvl="1"/>
             <a:r>
-              <a:rPr lang="en-US" smtClean="0"/>
+              <a:rPr lang="en-US"/>
               <a:t>Second level</a:t>
             </a:r>
           </a:p>
           <a:p>
             <a:pPr lvl="2"/>
             <a:r>
-              <a:rPr lang="en-US" smtClean="0"/>
+              <a:rPr lang="en-US"/>
               <a:t>Third level</a:t>
             </a:r>
           </a:p>
           <a:p>
             <a:pPr lvl="3"/>
             <a:r>
-              <a:rPr lang="en-US" smtClean="0"/>
+              <a:rPr lang="en-US"/>
               <a:t>Fourth level</a:t>
             </a:r>
           </a:p>
           <a:p>
             <a:pPr lvl="4"/>
             <a:r>
-              <a:rPr lang="en-US" smtClean="0"/>
+              <a:rPr lang="en-US"/>
               <a:t>Fifth level</a:t>
             </a:r>
-            <a:endParaRPr lang="en-US"/>
           </a:p>
         </p:txBody>
       </p:sp>
@@ -3290,7 +3137,7 @@
           <a:p>
             <a:pPr lvl="0"/>
             <a:r>
-              <a:rPr lang="en-US" smtClean="0"/>
+              <a:rPr lang="en-US"/>
               <a:t>Click to edit Master text styles</a:t>
             </a:r>
           </a:p>
@@ -3313,7 +3160,7 @@
           <a:p>
             <a:fld id="{5BCAD085-E8A6-8845-BD4E-CB4CCA059FC4}" type="datetimeFigureOut">
               <a:rPr lang="en-US" smtClean="0"/>
-              <a:t>1/27/13</a:t>
+              <a:t>8/20/26</a:t>
             </a:fld>
             <a:endParaRPr lang="en-US"/>
           </a:p>
@@ -3416,10 +3263,9 @@
           </a:lstStyle>
           <a:p>
             <a:r>
-              <a:rPr lang="en-US" smtClean="0"/>
+              <a:rPr lang="en-US"/>
               <a:t>Click to edit Master title style</a:t>
             </a:r>
-            <a:endParaRPr lang="en-US"/>
           </a:p>
         </p:txBody>
       </p:sp>
@@ -3543,7 +3389,7 @@
           <a:p>
             <a:pPr lvl="0"/>
             <a:r>
-              <a:rPr lang="en-US" smtClean="0"/>
+              <a:rPr lang="en-US"/>
               <a:t>Click to edit Master text styles</a:t>
             </a:r>
           </a:p>
@@ -3566,7 +3412,7 @@
           <a:p>
             <a:fld id="{5BCAD085-E8A6-8845-BD4E-CB4CCA059FC4}" type="datetimeFigureOut">
               <a:rPr lang="en-US" smtClean="0"/>
-              <a:t>1/27/13</a:t>
+              <a:t>8/20/26</a:t>
             </a:fld>
             <a:endParaRPr lang="en-US"/>
           </a:p>
@@ -3675,10 +3521,9 @@
           <a:lstStyle/>
           <a:p>
             <a:r>
-              <a:rPr lang="en-US" smtClean="0"/>
+              <a:rPr lang="en-US"/>
               <a:t>Click to edit Master title style</a:t>
             </a:r>
-            <a:endParaRPr lang="en-US"/>
           </a:p>
         </p:txBody>
       </p:sp>
@@ -3709,38 +3554,37 @@
           <a:p>
             <a:pPr lvl="0"/>
             <a:r>
-              <a:rPr lang="en-US" smtClean="0"/>
+              <a:rPr lang="en-US"/>
               <a:t>Click to edit Master text styles</a:t>
             </a:r>
           </a:p>
           <a:p>
             <a:pPr lvl="1"/>
             <a:r>
-              <a:rPr lang="en-US" smtClean="0"/>
+              <a:rPr lang="en-US"/>
               <a:t>Second level</a:t>
             </a:r>
           </a:p>
           <a:p>
             <a:pPr lvl="2"/>
             <a:r>
-              <a:rPr lang="en-US" smtClean="0"/>
+              <a:rPr lang="en-US"/>
               <a:t>Third level</a:t>
             </a:r>
           </a:p>
           <a:p>
             <a:pPr lvl="3"/>
             <a:r>
-              <a:rPr lang="en-US" smtClean="0"/>
+              <a:rPr lang="en-US"/>
               <a:t>Fourth level</a:t>
             </a:r>
           </a:p>
           <a:p>
             <a:pPr lvl="4"/>
             <a:r>
-              <a:rPr lang="en-US" smtClean="0"/>
+              <a:rPr lang="en-US"/>
               <a:t>Fifth level</a:t>
             </a:r>
-            <a:endParaRPr lang="en-US"/>
           </a:p>
         </p:txBody>
       </p:sp>
@@ -3779,7 +3623,7 @@
           <a:p>
             <a:fld id="{5BCAD085-E8A6-8845-BD4E-CB4CCA059FC4}" type="datetimeFigureOut">
               <a:rPr lang="en-US" smtClean="0"/>
-              <a:t>1/27/13</a:t>
+              <a:t>8/20/26</a:t>
             </a:fld>
             <a:endParaRPr lang="en-US"/>
           </a:p>
@@ -4138,7 +3982,7 @@
 </file>
 
 <file path=ppt/slides/slide1.xml><?xml version="1.0" encoding="utf-8"?>
-<p:sld xmlns:a="http://schemas.openxmlformats.org/drawingml/2006/main" xmlns:p="http://schemas.openxmlformats.org/presentationml/2006/main" xmlns:r="http://schemas.openxmlformats.org/officeDocument/2006/relationships">
+<p:sld xmlns:a="http://schemas.openxmlformats.org/drawingml/2006/main" xmlns:r="http://schemas.openxmlformats.org/officeDocument/2006/relationships" xmlns:p="http://schemas.openxmlformats.org/presentationml/2006/main">
   <p:cSld>
     <p:spTree>
       <p:nvGrpSpPr>
@@ -4146,7 +3990,14 @@
         <p:cNvGrpSpPr/>
         <p:nvPr/>
       </p:nvGrpSpPr>
-      <p:grpSpPr/>
+      <p:grpSpPr>
+        <a:xfrm>
+          <a:off x="0" y="0"/>
+          <a:ext cx="0" cy="0"/>
+          <a:chOff x="0" y="0"/>
+          <a:chExt cx="0" cy="0"/>
+        </a:xfrm>
+      </p:grpSpPr>
       <p:sp>
         <p:nvSpPr>
           <p:cNvPr id="2" name="Rectangle 1"/>
@@ -4188,6 +4039,7 @@
           <a:lstStyle/>
           <a:p>
             <a:pPr algn="ctr"/>
+            <a:endParaRPr/>
           </a:p>
         </p:txBody>
       </p:sp>
@@ -4232,6 +4084,7 @@
           <a:lstStyle/>
           <a:p>
             <a:pPr algn="ctr"/>
+            <a:endParaRPr/>
           </a:p>
         </p:txBody>
       </p:sp>
@@ -4252,7 +4105,7 @@
           <a:noFill/>
         </p:spPr>
         <p:txBody>
-          <a:bodyPr wrap="square" anchor="t" lIns="0" rIns="0" tIns="0" bIns="0">
+          <a:bodyPr wrap="square" lIns="0" tIns="0" rIns="0" bIns="0" anchor="t">
             <a:spAutoFit/>
           </a:bodyPr>
           <a:lstStyle/>
@@ -4291,7 +4144,7 @@
           <a:noFill/>
         </p:spPr>
         <p:txBody>
-          <a:bodyPr wrap="square" anchor="t" lIns="0" rIns="0" tIns="0" bIns="0">
+          <a:bodyPr wrap="square" lIns="0" tIns="0" rIns="0" bIns="0" anchor="t">
             <a:spAutoFit/>
           </a:bodyPr>
           <a:lstStyle/>
@@ -4330,7 +4183,7 @@
           <a:noFill/>
         </p:spPr>
         <p:txBody>
-          <a:bodyPr wrap="square" anchor="t" lIns="0" rIns="0" tIns="0" bIns="0">
+          <a:bodyPr wrap="square" lIns="0" tIns="0" rIns="0" bIns="0" anchor="t">
             <a:spAutoFit/>
           </a:bodyPr>
           <a:lstStyle/>
@@ -4412,6 +4265,7 @@
           <a:lstStyle/>
           <a:p>
             <a:pPr algn="ctr"/>
+            <a:endParaRPr/>
           </a:p>
         </p:txBody>
       </p:sp>
@@ -4432,7 +4286,7 @@
           <a:noFill/>
         </p:spPr>
         <p:txBody>
-          <a:bodyPr wrap="square" anchor="t" lIns="0" rIns="0" tIns="0" bIns="0">
+          <a:bodyPr wrap="square" lIns="0" tIns="0" rIns="0" bIns="0" anchor="t">
             <a:spAutoFit/>
           </a:bodyPr>
           <a:lstStyle/>
@@ -4463,15 +4317,15 @@
         <p:spPr>
           <a:xfrm>
             <a:off x="566928" y="4553712"/>
-            <a:ext cx="10881360" cy="1463040"/>
-          </a:xfrm>
-          <a:prstGeom prst="rect">
-            <a:avLst/>
-          </a:prstGeom>
-          <a:noFill/>
-        </p:spPr>
-        <p:txBody>
-          <a:bodyPr wrap="square" anchor="t" lIns="0" rIns="0" tIns="0" bIns="0">
+            <a:ext cx="10881360" cy="1085810"/>
+          </a:xfrm>
+          <a:prstGeom prst="rect">
+            <a:avLst/>
+          </a:prstGeom>
+          <a:noFill/>
+        </p:spPr>
+        <p:txBody>
+          <a:bodyPr wrap="square" lIns="0" tIns="0" rIns="0" bIns="0" anchor="t">
             <a:spAutoFit/>
           </a:bodyPr>
           <a:lstStyle/>
@@ -4507,8 +4361,23 @@
                 </a:solidFill>
                 <a:latin typeface="Calibri"/>
               </a:rPr>
-              <a:t>Participant Category 0.  The project uses no human participants. Two language models generate and verify the benchmark; I carry out the two manual steps myself on the project's own outputs.</a:t>
-            </a:r>
+              <a:t>Participant Category 0.  The project uses no human participants. Two language models generate and verify the benchmark</a:t>
+            </a:r>
+            <a:r>
+              <a:rPr lang="en-US" sz="1200" b="0">
+                <a:solidFill>
+                  <a:srgbClr val="64748B"/>
+                </a:solidFill>
+                <a:latin typeface="Calibri"/>
+              </a:rPr>
+              <a:t>.</a:t>
+            </a:r>
+            <a:endParaRPr lang="en-GB" sz="1200" b="0">
+              <a:solidFill>
+                <a:srgbClr val="64748B"/>
+              </a:solidFill>
+              <a:latin typeface="Calibri"/>
+            </a:endParaRPr>
           </a:p>
           <a:p>
             <a:pPr algn="l">
@@ -4520,7 +4389,7 @@
               </a:spcBef>
             </a:pPr>
             <a:r>
-              <a:rPr sz="1200" b="1">
+              <a:rPr lang="en-GB" sz="1200" b="1">
                 <a:solidFill>
                   <a:srgbClr val="0F172A"/>
                 </a:solidFill>
@@ -4548,7 +4417,7 @@
           <a:noFill/>
         </p:spPr>
         <p:txBody>
-          <a:bodyPr wrap="square" anchor="t" lIns="0" rIns="0" tIns="0" bIns="0">
+          <a:bodyPr wrap="square" lIns="0" tIns="0" rIns="0" bIns="0" anchor="t">
             <a:spAutoFit/>
           </a:bodyPr>
           <a:lstStyle/>
@@ -4579,7 +4448,7 @@
 </file>
 
 <file path=ppt/slides/slide10.xml><?xml version="1.0" encoding="utf-8"?>
-<p:sld xmlns:a="http://schemas.openxmlformats.org/drawingml/2006/main" xmlns:p="http://schemas.openxmlformats.org/presentationml/2006/main" xmlns:r="http://schemas.openxmlformats.org/officeDocument/2006/relationships">
+<p:sld xmlns:a="http://schemas.openxmlformats.org/drawingml/2006/main" xmlns:r="http://schemas.openxmlformats.org/officeDocument/2006/relationships" xmlns:p="http://schemas.openxmlformats.org/presentationml/2006/main">
   <p:cSld>
     <p:spTree>
       <p:nvGrpSpPr>
@@ -4587,7 +4456,14 @@
         <p:cNvGrpSpPr/>
         <p:nvPr/>
       </p:nvGrpSpPr>
-      <p:grpSpPr/>
+      <p:grpSpPr>
+        <a:xfrm>
+          <a:off x="0" y="0"/>
+          <a:ext cx="0" cy="0"/>
+          <a:chOff x="0" y="0"/>
+          <a:chExt cx="0" cy="0"/>
+        </a:xfrm>
+      </p:grpSpPr>
       <p:sp>
         <p:nvSpPr>
           <p:cNvPr id="2" name="Rectangle 1"/>
@@ -4629,6 +4505,647 @@
           <a:lstStyle/>
           <a:p>
             <a:pPr algn="ctr"/>
+            <a:endParaRPr/>
+          </a:p>
+        </p:txBody>
+      </p:sp>
+      <p:sp>
+        <p:nvSpPr>
+          <p:cNvPr id="3" name="Rectangle 2"/>
+          <p:cNvSpPr/>
+          <p:nvPr/>
+        </p:nvSpPr>
+        <p:spPr>
+          <a:xfrm>
+            <a:off x="566928" y="548640"/>
+            <a:ext cx="274320" cy="44450"/>
+          </a:xfrm>
+          <a:prstGeom prst="rect">
+            <a:avLst/>
+          </a:prstGeom>
+          <a:solidFill>
+            <a:srgbClr val="06B6D4"/>
+          </a:solidFill>
+          <a:ln>
+            <a:noFill/>
+          </a:ln>
+          <a:effectLst/>
+        </p:spPr>
+        <p:style>
+          <a:lnRef idx="1">
+            <a:schemeClr val="accent1"/>
+          </a:lnRef>
+          <a:fillRef idx="3">
+            <a:schemeClr val="accent1"/>
+          </a:fillRef>
+          <a:effectRef idx="2">
+            <a:schemeClr val="accent1"/>
+          </a:effectRef>
+          <a:fontRef idx="minor">
+            <a:schemeClr val="lt1"/>
+          </a:fontRef>
+        </p:style>
+        <p:txBody>
+          <a:bodyPr rtlCol="0" anchor="ctr"/>
+          <a:lstStyle/>
+          <a:p>
+            <a:pPr algn="ctr"/>
+            <a:endParaRPr/>
+          </a:p>
+        </p:txBody>
+      </p:sp>
+      <p:sp>
+        <p:nvSpPr>
+          <p:cNvPr id="4" name="TextBox 3"/>
+          <p:cNvSpPr txBox="1"/>
+          <p:nvPr/>
+        </p:nvSpPr>
+        <p:spPr>
+          <a:xfrm>
+            <a:off x="969264" y="457200"/>
+            <a:ext cx="7315200" cy="228600"/>
+          </a:xfrm>
+          <a:prstGeom prst="rect">
+            <a:avLst/>
+          </a:prstGeom>
+          <a:noFill/>
+        </p:spPr>
+        <p:txBody>
+          <a:bodyPr wrap="square" lIns="0" tIns="0" rIns="0" bIns="0" anchor="t">
+            <a:spAutoFit/>
+          </a:bodyPr>
+          <a:lstStyle/>
+          <a:p>
+            <a:pPr algn="l">
+              <a:lnSpc>
+                <a:spcPct val="115000"/>
+              </a:lnSpc>
+            </a:pPr>
+            <a:r>
+              <a:rPr sz="1100" b="1">
+                <a:solidFill>
+                  <a:srgbClr val="64748B"/>
+                </a:solidFill>
+                <a:latin typeface="Calibri"/>
+              </a:rPr>
+              <a:t>CONCLUSIONS</a:t>
+            </a:r>
+          </a:p>
+        </p:txBody>
+      </p:sp>
+      <p:sp>
+        <p:nvSpPr>
+          <p:cNvPr id="5" name="TextBox 4"/>
+          <p:cNvSpPr txBox="1"/>
+          <p:nvPr/>
+        </p:nvSpPr>
+        <p:spPr>
+          <a:xfrm>
+            <a:off x="566928" y="786384"/>
+            <a:ext cx="11057839" cy="822960"/>
+          </a:xfrm>
+          <a:prstGeom prst="rect">
+            <a:avLst/>
+          </a:prstGeom>
+          <a:noFill/>
+        </p:spPr>
+        <p:txBody>
+          <a:bodyPr wrap="square" lIns="0" tIns="0" rIns="0" bIns="0" anchor="t">
+            <a:spAutoFit/>
+          </a:bodyPr>
+          <a:lstStyle/>
+          <a:p>
+            <a:pPr algn="l">
+              <a:lnSpc>
+                <a:spcPct val="102000"/>
+              </a:lnSpc>
+            </a:pPr>
+            <a:r>
+              <a:rPr sz="3200" b="1">
+                <a:solidFill>
+                  <a:srgbClr val="0F172A"/>
+                </a:solidFill>
+                <a:latin typeface="Calibri"/>
+              </a:rPr>
+              <a:t>What the work supports so far</a:t>
+            </a:r>
+          </a:p>
+        </p:txBody>
+      </p:sp>
+      <p:sp>
+        <p:nvSpPr>
+          <p:cNvPr id="6" name="TextBox 5"/>
+          <p:cNvSpPr txBox="1"/>
+          <p:nvPr/>
+        </p:nvSpPr>
+        <p:spPr>
+          <a:xfrm>
+            <a:off x="566928" y="1572768"/>
+            <a:ext cx="9509760" cy="548640"/>
+          </a:xfrm>
+          <a:prstGeom prst="rect">
+            <a:avLst/>
+          </a:prstGeom>
+          <a:noFill/>
+        </p:spPr>
+        <p:txBody>
+          <a:bodyPr wrap="square" lIns="0" tIns="0" rIns="0" bIns="0" anchor="t">
+            <a:spAutoFit/>
+          </a:bodyPr>
+          <a:lstStyle/>
+          <a:p>
+            <a:pPr algn="l">
+              <a:lnSpc>
+                <a:spcPct val="115000"/>
+              </a:lnSpc>
+            </a:pPr>
+            <a:r>
+              <a:rPr sz="1500" b="0">
+                <a:solidFill>
+                  <a:srgbClr val="64748B"/>
+                </a:solidFill>
+                <a:latin typeface="Calibri"/>
+              </a:rPr>
+              <a:t>None of these come from the benchmark. They come from building the system.</a:t>
+            </a:r>
+          </a:p>
+        </p:txBody>
+      </p:sp>
+      <p:sp>
+        <p:nvSpPr>
+          <p:cNvPr id="7" name="Rectangle 6"/>
+          <p:cNvSpPr/>
+          <p:nvPr/>
+        </p:nvSpPr>
+        <p:spPr>
+          <a:xfrm>
+            <a:off x="566928" y="2029968"/>
+            <a:ext cx="50800" cy="804672"/>
+          </a:xfrm>
+          <a:prstGeom prst="rect">
+            <a:avLst/>
+          </a:prstGeom>
+          <a:solidFill>
+            <a:srgbClr val="0EA5E9"/>
+          </a:solidFill>
+          <a:ln>
+            <a:noFill/>
+          </a:ln>
+          <a:effectLst/>
+        </p:spPr>
+        <p:style>
+          <a:lnRef idx="1">
+            <a:schemeClr val="accent1"/>
+          </a:lnRef>
+          <a:fillRef idx="3">
+            <a:schemeClr val="accent1"/>
+          </a:fillRef>
+          <a:effectRef idx="2">
+            <a:schemeClr val="accent1"/>
+          </a:effectRef>
+          <a:fontRef idx="minor">
+            <a:schemeClr val="lt1"/>
+          </a:fontRef>
+        </p:style>
+        <p:txBody>
+          <a:bodyPr rtlCol="0" anchor="ctr"/>
+          <a:lstStyle/>
+          <a:p>
+            <a:pPr algn="ctr"/>
+            <a:endParaRPr/>
+          </a:p>
+        </p:txBody>
+      </p:sp>
+      <p:sp>
+        <p:nvSpPr>
+          <p:cNvPr id="8" name="TextBox 7"/>
+          <p:cNvSpPr txBox="1"/>
+          <p:nvPr/>
+        </p:nvSpPr>
+        <p:spPr>
+          <a:xfrm>
+            <a:off x="768096" y="2029968"/>
+            <a:ext cx="10424160" cy="320040"/>
+          </a:xfrm>
+          <a:prstGeom prst="rect">
+            <a:avLst/>
+          </a:prstGeom>
+          <a:noFill/>
+        </p:spPr>
+        <p:txBody>
+          <a:bodyPr wrap="square" lIns="0" tIns="0" rIns="0" bIns="0" anchor="t">
+            <a:spAutoFit/>
+          </a:bodyPr>
+          <a:lstStyle/>
+          <a:p>
+            <a:pPr algn="l">
+              <a:lnSpc>
+                <a:spcPct val="115000"/>
+              </a:lnSpc>
+            </a:pPr>
+            <a:r>
+              <a:rPr sz="1700" b="1">
+                <a:solidFill>
+                  <a:srgbClr val="0F172A"/>
+                </a:solidFill>
+                <a:latin typeface="Calibri"/>
+              </a:rPr>
+              <a:t>The three paradigms disagree about the evidence</a:t>
+            </a:r>
+          </a:p>
+        </p:txBody>
+      </p:sp>
+      <p:sp>
+        <p:nvSpPr>
+          <p:cNvPr id="9" name="TextBox 8"/>
+          <p:cNvSpPr txBox="1"/>
+          <p:nvPr/>
+        </p:nvSpPr>
+        <p:spPr>
+          <a:xfrm>
+            <a:off x="768096" y="2395728"/>
+            <a:ext cx="10241280" cy="457200"/>
+          </a:xfrm>
+          <a:prstGeom prst="rect">
+            <a:avLst/>
+          </a:prstGeom>
+          <a:noFill/>
+        </p:spPr>
+        <p:txBody>
+          <a:bodyPr wrap="square" lIns="0" tIns="0" rIns="0" bIns="0" anchor="t">
+            <a:spAutoFit/>
+          </a:bodyPr>
+          <a:lstStyle/>
+          <a:p>
+            <a:pPr algn="l">
+              <a:lnSpc>
+                <a:spcPct val="130000"/>
+              </a:lnSpc>
+            </a:pPr>
+            <a:r>
+              <a:rPr sz="1300" b="0">
+                <a:solidFill>
+                  <a:srgbClr val="64748B"/>
+                </a:solidFill>
+                <a:latin typeface="Calibri"/>
+              </a:rPr>
+              <a:t>On the same question they return different nodes, which is the effect the benchmark measures.</a:t>
+            </a:r>
+          </a:p>
+        </p:txBody>
+      </p:sp>
+      <p:sp>
+        <p:nvSpPr>
+          <p:cNvPr id="10" name="Rectangle 9"/>
+          <p:cNvSpPr/>
+          <p:nvPr/>
+        </p:nvSpPr>
+        <p:spPr>
+          <a:xfrm>
+            <a:off x="566928" y="3081528"/>
+            <a:ext cx="50800" cy="804672"/>
+          </a:xfrm>
+          <a:prstGeom prst="rect">
+            <a:avLst/>
+          </a:prstGeom>
+          <a:solidFill>
+            <a:srgbClr val="10B981"/>
+          </a:solidFill>
+          <a:ln>
+            <a:noFill/>
+          </a:ln>
+          <a:effectLst/>
+        </p:spPr>
+        <p:style>
+          <a:lnRef idx="1">
+            <a:schemeClr val="accent1"/>
+          </a:lnRef>
+          <a:fillRef idx="3">
+            <a:schemeClr val="accent1"/>
+          </a:fillRef>
+          <a:effectRef idx="2">
+            <a:schemeClr val="accent1"/>
+          </a:effectRef>
+          <a:fontRef idx="minor">
+            <a:schemeClr val="lt1"/>
+          </a:fontRef>
+        </p:style>
+        <p:txBody>
+          <a:bodyPr rtlCol="0" anchor="ctr"/>
+          <a:lstStyle/>
+          <a:p>
+            <a:pPr algn="ctr"/>
+            <a:endParaRPr/>
+          </a:p>
+        </p:txBody>
+      </p:sp>
+      <p:sp>
+        <p:nvSpPr>
+          <p:cNvPr id="11" name="TextBox 10"/>
+          <p:cNvSpPr txBox="1"/>
+          <p:nvPr/>
+        </p:nvSpPr>
+        <p:spPr>
+          <a:xfrm>
+            <a:off x="768096" y="3081528"/>
+            <a:ext cx="10424160" cy="320040"/>
+          </a:xfrm>
+          <a:prstGeom prst="rect">
+            <a:avLst/>
+          </a:prstGeom>
+          <a:noFill/>
+        </p:spPr>
+        <p:txBody>
+          <a:bodyPr wrap="square" lIns="0" tIns="0" rIns="0" bIns="0" anchor="t">
+            <a:spAutoFit/>
+          </a:bodyPr>
+          <a:lstStyle/>
+          <a:p>
+            <a:pPr algn="l">
+              <a:lnSpc>
+                <a:spcPct val="115000"/>
+              </a:lnSpc>
+            </a:pPr>
+            <a:r>
+              <a:rPr sz="1700" b="1">
+                <a:solidFill>
+                  <a:srgbClr val="0F172A"/>
+                </a:solidFill>
+                <a:latin typeface="Calibri"/>
+              </a:rPr>
+              <a:t>Cost separates them as sharply as accuracy might</a:t>
+            </a:r>
+          </a:p>
+        </p:txBody>
+      </p:sp>
+      <p:sp>
+        <p:nvSpPr>
+          <p:cNvPr id="12" name="TextBox 11"/>
+          <p:cNvSpPr txBox="1"/>
+          <p:nvPr/>
+        </p:nvSpPr>
+        <p:spPr>
+          <a:xfrm>
+            <a:off x="768096" y="3447288"/>
+            <a:ext cx="10241280" cy="457200"/>
+          </a:xfrm>
+          <a:prstGeom prst="rect">
+            <a:avLst/>
+          </a:prstGeom>
+          <a:noFill/>
+        </p:spPr>
+        <p:txBody>
+          <a:bodyPr wrap="square" lIns="0" tIns="0" rIns="0" bIns="0" anchor="t">
+            <a:spAutoFit/>
+          </a:bodyPr>
+          <a:lstStyle/>
+          <a:p>
+            <a:pPr algn="l">
+              <a:lnSpc>
+                <a:spcPct val="130000"/>
+              </a:lnSpc>
+            </a:pPr>
+            <a:r>
+              <a:rPr sz="1300" b="0">
+                <a:solidFill>
+                  <a:srgbClr val="64748B"/>
+                </a:solidFill>
+                <a:latin typeface="Calibri"/>
+              </a:rPr>
+              <a:t>BM25 retrieves with no model at all, while the vector arm pays for a cross-encoder on every query.</a:t>
+            </a:r>
+          </a:p>
+        </p:txBody>
+      </p:sp>
+      <p:sp>
+        <p:nvSpPr>
+          <p:cNvPr id="13" name="Rectangle 12"/>
+          <p:cNvSpPr/>
+          <p:nvPr/>
+        </p:nvSpPr>
+        <p:spPr>
+          <a:xfrm>
+            <a:off x="566928" y="4133088"/>
+            <a:ext cx="50800" cy="804672"/>
+          </a:xfrm>
+          <a:prstGeom prst="rect">
+            <a:avLst/>
+          </a:prstGeom>
+          <a:solidFill>
+            <a:srgbClr val="8B5CF6"/>
+          </a:solidFill>
+          <a:ln>
+            <a:noFill/>
+          </a:ln>
+          <a:effectLst/>
+        </p:spPr>
+        <p:style>
+          <a:lnRef idx="1">
+            <a:schemeClr val="accent1"/>
+          </a:lnRef>
+          <a:fillRef idx="3">
+            <a:schemeClr val="accent1"/>
+          </a:fillRef>
+          <a:effectRef idx="2">
+            <a:schemeClr val="accent1"/>
+          </a:effectRef>
+          <a:fontRef idx="minor">
+            <a:schemeClr val="lt1"/>
+          </a:fontRef>
+        </p:style>
+        <p:txBody>
+          <a:bodyPr rtlCol="0" anchor="ctr"/>
+          <a:lstStyle/>
+          <a:p>
+            <a:pPr algn="ctr"/>
+            <a:endParaRPr/>
+          </a:p>
+        </p:txBody>
+      </p:sp>
+      <p:sp>
+        <p:nvSpPr>
+          <p:cNvPr id="14" name="TextBox 13"/>
+          <p:cNvSpPr txBox="1"/>
+          <p:nvPr/>
+        </p:nvSpPr>
+        <p:spPr>
+          <a:xfrm>
+            <a:off x="768096" y="4133088"/>
+            <a:ext cx="10424160" cy="320040"/>
+          </a:xfrm>
+          <a:prstGeom prst="rect">
+            <a:avLst/>
+          </a:prstGeom>
+          <a:noFill/>
+        </p:spPr>
+        <p:txBody>
+          <a:bodyPr wrap="square" lIns="0" tIns="0" rIns="0" bIns="0" anchor="t">
+            <a:spAutoFit/>
+          </a:bodyPr>
+          <a:lstStyle/>
+          <a:p>
+            <a:pPr algn="l">
+              <a:lnSpc>
+                <a:spcPct val="115000"/>
+              </a:lnSpc>
+            </a:pPr>
+            <a:r>
+              <a:rPr sz="1700" b="1">
+                <a:solidFill>
+                  <a:srgbClr val="0F172A"/>
+                </a:solidFill>
+                <a:latin typeface="Calibri"/>
+              </a:rPr>
+              <a:t>Free-tier limits shaped the architecture</a:t>
+            </a:r>
+          </a:p>
+        </p:txBody>
+      </p:sp>
+      <p:sp>
+        <p:nvSpPr>
+          <p:cNvPr id="15" name="TextBox 14"/>
+          <p:cNvSpPr txBox="1"/>
+          <p:nvPr/>
+        </p:nvSpPr>
+        <p:spPr>
+          <a:xfrm>
+            <a:off x="768096" y="4498848"/>
+            <a:ext cx="10241280" cy="457200"/>
+          </a:xfrm>
+          <a:prstGeom prst="rect">
+            <a:avLst/>
+          </a:prstGeom>
+          <a:noFill/>
+        </p:spPr>
+        <p:txBody>
+          <a:bodyPr wrap="square" lIns="0" tIns="0" rIns="0" bIns="0" anchor="t">
+            <a:spAutoFit/>
+          </a:bodyPr>
+          <a:lstStyle/>
+          <a:p>
+            <a:pPr algn="l">
+              <a:lnSpc>
+                <a:spcPct val="130000"/>
+              </a:lnSpc>
+            </a:pPr>
+            <a:r>
+              <a:rPr sz="1300" b="0">
+                <a:solidFill>
+                  <a:srgbClr val="64748B"/>
+                </a:solidFill>
+                <a:latin typeface="Calibri"/>
+              </a:rPr>
+              <a:t>The free quota runs out part-way through a run, which forced three providers and a resumable key.</a:t>
+            </a:r>
+          </a:p>
+        </p:txBody>
+      </p:sp>
+      <p:sp>
+        <p:nvSpPr>
+          <p:cNvPr id="16" name="TextBox 15"/>
+          <p:cNvSpPr txBox="1"/>
+          <p:nvPr/>
+        </p:nvSpPr>
+        <p:spPr>
+          <a:xfrm>
+            <a:off x="10527487" y="6382512"/>
+            <a:ext cx="1097280" cy="274320"/>
+          </a:xfrm>
+          <a:prstGeom prst="rect">
+            <a:avLst/>
+          </a:prstGeom>
+          <a:noFill/>
+        </p:spPr>
+        <p:txBody>
+          <a:bodyPr wrap="square" lIns="0" tIns="0" rIns="0" bIns="0" anchor="t">
+            <a:spAutoFit/>
+          </a:bodyPr>
+          <a:lstStyle/>
+          <a:p>
+            <a:pPr algn="r">
+              <a:lnSpc>
+                <a:spcPct val="115000"/>
+              </a:lnSpc>
+            </a:pPr>
+            <a:r>
+              <a:rPr sz="1000" b="0">
+                <a:solidFill>
+                  <a:srgbClr val="64748B"/>
+                </a:solidFill>
+                <a:latin typeface="Consolas"/>
+              </a:rPr>
+              <a:t>10</a:t>
+            </a:r>
+          </a:p>
+        </p:txBody>
+      </p:sp>
+    </p:spTree>
+  </p:cSld>
+  <p:clrMapOvr>
+    <a:masterClrMapping/>
+  </p:clrMapOvr>
+</p:sld>
+</file>
+
+<file path=ppt/slides/slide11.xml><?xml version="1.0" encoding="utf-8"?>
+<p:sld xmlns:a="http://schemas.openxmlformats.org/drawingml/2006/main" xmlns:r="http://schemas.openxmlformats.org/officeDocument/2006/relationships" xmlns:p="http://schemas.openxmlformats.org/presentationml/2006/main">
+  <p:cSld>
+    <p:spTree>
+      <p:nvGrpSpPr>
+        <p:cNvPr id="1" name=""/>
+        <p:cNvGrpSpPr/>
+        <p:nvPr/>
+      </p:nvGrpSpPr>
+      <p:grpSpPr>
+        <a:xfrm>
+          <a:off x="0" y="0"/>
+          <a:ext cx="0" cy="0"/>
+          <a:chOff x="0" y="0"/>
+          <a:chExt cx="0" cy="0"/>
+        </a:xfrm>
+      </p:grpSpPr>
+      <p:sp>
+        <p:nvSpPr>
+          <p:cNvPr id="2" name="Rectangle 1"/>
+          <p:cNvSpPr/>
+          <p:nvPr/>
+        </p:nvSpPr>
+        <p:spPr>
+          <a:xfrm>
+            <a:off x="0" y="0"/>
+            <a:ext cx="12191695" cy="6858000"/>
+          </a:xfrm>
+          <a:prstGeom prst="rect">
+            <a:avLst/>
+          </a:prstGeom>
+          <a:solidFill>
+            <a:srgbClr val="FFFFFF"/>
+          </a:solidFill>
+          <a:ln>
+            <a:noFill/>
+          </a:ln>
+          <a:effectLst/>
+        </p:spPr>
+        <p:style>
+          <a:lnRef idx="1">
+            <a:schemeClr val="accent1"/>
+          </a:lnRef>
+          <a:fillRef idx="3">
+            <a:schemeClr val="accent1"/>
+          </a:fillRef>
+          <a:effectRef idx="2">
+            <a:schemeClr val="accent1"/>
+          </a:effectRef>
+          <a:fontRef idx="minor">
+            <a:schemeClr val="lt1"/>
+          </a:fontRef>
+        </p:style>
+        <p:txBody>
+          <a:bodyPr rtlCol="0" anchor="ctr"/>
+          <a:lstStyle/>
+          <a:p>
+            <a:pPr algn="ctr"/>
+            <a:endParaRPr/>
           </a:p>
         </p:txBody>
       </p:sp>
@@ -4673,6 +5190,7 @@
           <a:lstStyle/>
           <a:p>
             <a:pPr algn="ctr"/>
+            <a:endParaRPr/>
           </a:p>
         </p:txBody>
       </p:sp>
@@ -4693,7 +5211,7 @@
           <a:noFill/>
         </p:spPr>
         <p:txBody>
-          <a:bodyPr wrap="square" anchor="t" lIns="0" rIns="0" tIns="0" bIns="0">
+          <a:bodyPr wrap="square" lIns="0" tIns="0" rIns="0" bIns="0" anchor="t">
             <a:spAutoFit/>
           </a:bodyPr>
           <a:lstStyle/>
@@ -4732,7 +5250,7 @@
           <a:noFill/>
         </p:spPr>
         <p:txBody>
-          <a:bodyPr wrap="square" anchor="t" lIns="0" rIns="0" tIns="0" bIns="0">
+          <a:bodyPr wrap="square" lIns="0" tIns="0" rIns="0" bIns="0" anchor="t">
             <a:spAutoFit/>
           </a:bodyPr>
           <a:lstStyle/>
@@ -4771,7 +5289,7 @@
           <a:noFill/>
         </p:spPr>
         <p:txBody>
-          <a:bodyPr wrap="square" anchor="t" lIns="0" rIns="0" tIns="0" bIns="0">
+          <a:bodyPr wrap="square" lIns="0" tIns="0" rIns="0" bIns="0" anchor="t">
             <a:spAutoFit/>
           </a:bodyPr>
           <a:lstStyle/>
@@ -4810,7 +5328,7 @@
           <a:noFill/>
         </p:spPr>
         <p:txBody>
-          <a:bodyPr wrap="square" anchor="t" lIns="0" rIns="0" tIns="0" bIns="0">
+          <a:bodyPr wrap="square" lIns="0" tIns="0" rIns="0" bIns="0" anchor="t">
             <a:spAutoFit/>
           </a:bodyPr>
           <a:lstStyle/>
@@ -4849,7 +5367,7 @@
           <a:noFill/>
         </p:spPr>
         <p:txBody>
-          <a:bodyPr wrap="square" anchor="t" lIns="0" rIns="0" tIns="0" bIns="0">
+          <a:bodyPr wrap="square" lIns="0" tIns="0" rIns="0" bIns="0" anchor="t">
             <a:spAutoFit/>
           </a:bodyPr>
           <a:lstStyle/>
@@ -4888,7 +5406,7 @@
           <a:noFill/>
         </p:spPr>
         <p:txBody>
-          <a:bodyPr wrap="square" anchor="t" lIns="0" rIns="0" tIns="0" bIns="0">
+          <a:bodyPr wrap="square" lIns="0" tIns="0" rIns="0" bIns="0" anchor="t">
             <a:spAutoFit/>
           </a:bodyPr>
           <a:lstStyle/>
@@ -4927,7 +5445,7 @@
           <a:noFill/>
         </p:spPr>
         <p:txBody>
-          <a:bodyPr wrap="square" anchor="t" lIns="0" rIns="0" tIns="0" bIns="0">
+          <a:bodyPr wrap="square" lIns="0" tIns="0" rIns="0" bIns="0" anchor="t">
             <a:spAutoFit/>
           </a:bodyPr>
           <a:lstStyle/>
@@ -4966,7 +5484,7 @@
           <a:noFill/>
         </p:spPr>
         <p:txBody>
-          <a:bodyPr wrap="square" anchor="t" lIns="0" rIns="0" tIns="0" bIns="0">
+          <a:bodyPr wrap="square" lIns="0" tIns="0" rIns="0" bIns="0" anchor="t">
             <a:spAutoFit/>
           </a:bodyPr>
           <a:lstStyle/>
@@ -5005,7 +5523,7 @@
           <a:noFill/>
         </p:spPr>
         <p:txBody>
-          <a:bodyPr wrap="square" anchor="t" lIns="0" rIns="0" tIns="0" bIns="0">
+          <a:bodyPr wrap="square" lIns="0" tIns="0" rIns="0" bIns="0" anchor="t">
             <a:spAutoFit/>
           </a:bodyPr>
           <a:lstStyle/>
@@ -5044,7 +5562,7 @@
           <a:noFill/>
         </p:spPr>
         <p:txBody>
-          <a:bodyPr wrap="square" anchor="t" lIns="0" rIns="0" tIns="0" bIns="0">
+          <a:bodyPr wrap="square" lIns="0" tIns="0" rIns="0" bIns="0" anchor="t">
             <a:spAutoFit/>
           </a:bodyPr>
           <a:lstStyle/>
@@ -5083,7 +5601,7 @@
           <a:noFill/>
         </p:spPr>
         <p:txBody>
-          <a:bodyPr wrap="square" anchor="t" lIns="0" rIns="0" tIns="0" bIns="0">
+          <a:bodyPr wrap="square" lIns="0" tIns="0" rIns="0" bIns="0" anchor="t">
             <a:spAutoFit/>
           </a:bodyPr>
           <a:lstStyle/>
@@ -5122,7 +5640,7 @@
           <a:noFill/>
         </p:spPr>
         <p:txBody>
-          <a:bodyPr wrap="square" anchor="t" lIns="0" rIns="0" tIns="0" bIns="0">
+          <a:bodyPr wrap="square" lIns="0" tIns="0" rIns="0" bIns="0" anchor="t">
             <a:spAutoFit/>
           </a:bodyPr>
           <a:lstStyle/>
@@ -5161,7 +5679,7 @@
           <a:noFill/>
         </p:spPr>
         <p:txBody>
-          <a:bodyPr wrap="square" anchor="t" lIns="0" rIns="0" tIns="0" bIns="0">
+          <a:bodyPr wrap="square" lIns="0" tIns="0" rIns="0" bIns="0" anchor="t">
             <a:spAutoFit/>
           </a:bodyPr>
           <a:lstStyle/>
@@ -5200,7 +5718,7 @@
           <a:noFill/>
         </p:spPr>
         <p:txBody>
-          <a:bodyPr wrap="square" anchor="t" lIns="0" rIns="0" tIns="0" bIns="0">
+          <a:bodyPr wrap="square" lIns="0" tIns="0" rIns="0" bIns="0" anchor="t">
             <a:spAutoFit/>
           </a:bodyPr>
           <a:lstStyle/>
@@ -5239,7 +5757,7 @@
           <a:noFill/>
         </p:spPr>
         <p:txBody>
-          <a:bodyPr wrap="square" anchor="t" lIns="0" rIns="0" tIns="0" bIns="0">
+          <a:bodyPr wrap="square" lIns="0" tIns="0" rIns="0" bIns="0" anchor="t">
             <a:spAutoFit/>
           </a:bodyPr>
           <a:lstStyle/>
@@ -5278,7 +5796,7 @@
           <a:noFill/>
         </p:spPr>
         <p:txBody>
-          <a:bodyPr wrap="square" anchor="t" lIns="0" rIns="0" tIns="0" bIns="0">
+          <a:bodyPr wrap="square" lIns="0" tIns="0" rIns="0" bIns="0" anchor="t">
             <a:spAutoFit/>
           </a:bodyPr>
           <a:lstStyle/>
@@ -5317,7 +5835,7 @@
           <a:noFill/>
         </p:spPr>
         <p:txBody>
-          <a:bodyPr wrap="square" anchor="t" lIns="0" rIns="0" tIns="0" bIns="0">
+          <a:bodyPr wrap="square" lIns="0" tIns="0" rIns="0" bIns="0" anchor="t">
             <a:spAutoFit/>
           </a:bodyPr>
           <a:lstStyle/>
@@ -5380,6 +5898,7 @@
           <a:lstStyle/>
           <a:p>
             <a:pPr algn="ctr"/>
+            <a:endParaRPr/>
           </a:p>
         </p:txBody>
       </p:sp>
@@ -5400,7 +5919,7 @@
           <a:noFill/>
         </p:spPr>
         <p:txBody>
-          <a:bodyPr wrap="square" anchor="t" lIns="0" rIns="0" tIns="0" bIns="0">
+          <a:bodyPr wrap="square" lIns="0" tIns="0" rIns="0" bIns="0" anchor="t">
             <a:spAutoFit/>
           </a:bodyPr>
           <a:lstStyle/>
@@ -5439,7 +5958,7 @@
           <a:noFill/>
         </p:spPr>
         <p:txBody>
-          <a:bodyPr wrap="square" anchor="t" lIns="0" rIns="0" tIns="0" bIns="0">
+          <a:bodyPr wrap="square" lIns="0" tIns="0" rIns="0" bIns="0" anchor="t">
             <a:spAutoFit/>
           </a:bodyPr>
           <a:lstStyle/>
@@ -5456,7 +5975,7 @@
                 </a:solidFill>
                 <a:latin typeface="Consolas"/>
               </a:rPr>
-              <a:t>10</a:t>
+              <a:t>11</a:t>
             </a:r>
           </a:p>
         </p:txBody>
@@ -5470,7 +5989,7 @@
 </file>
 
 <file path=ppt/slides/slide2.xml><?xml version="1.0" encoding="utf-8"?>
-<p:sld xmlns:a="http://schemas.openxmlformats.org/drawingml/2006/main" xmlns:p="http://schemas.openxmlformats.org/presentationml/2006/main" xmlns:r="http://schemas.openxmlformats.org/officeDocument/2006/relationships">
+<p:sld xmlns:a="http://schemas.openxmlformats.org/drawingml/2006/main" xmlns:r="http://schemas.openxmlformats.org/officeDocument/2006/relationships" xmlns:p="http://schemas.openxmlformats.org/presentationml/2006/main">
   <p:cSld>
     <p:spTree>
       <p:nvGrpSpPr>
@@ -5478,7 +5997,14 @@
         <p:cNvGrpSpPr/>
         <p:nvPr/>
       </p:nvGrpSpPr>
-      <p:grpSpPr/>
+      <p:grpSpPr>
+        <a:xfrm>
+          <a:off x="0" y="0"/>
+          <a:ext cx="0" cy="0"/>
+          <a:chOff x="0" y="0"/>
+          <a:chExt cx="0" cy="0"/>
+        </a:xfrm>
+      </p:grpSpPr>
       <p:sp>
         <p:nvSpPr>
           <p:cNvPr id="2" name="Rectangle 1"/>
@@ -5520,6 +6046,7 @@
           <a:lstStyle/>
           <a:p>
             <a:pPr algn="ctr"/>
+            <a:endParaRPr/>
           </a:p>
         </p:txBody>
       </p:sp>
@@ -5564,6 +6091,7 @@
           <a:lstStyle/>
           <a:p>
             <a:pPr algn="ctr"/>
+            <a:endParaRPr/>
           </a:p>
         </p:txBody>
       </p:sp>
@@ -5584,7 +6112,7 @@
           <a:noFill/>
         </p:spPr>
         <p:txBody>
-          <a:bodyPr wrap="square" anchor="t" lIns="0" rIns="0" tIns="0" bIns="0">
+          <a:bodyPr wrap="square" lIns="0" tIns="0" rIns="0" bIns="0" anchor="t">
             <a:spAutoFit/>
           </a:bodyPr>
           <a:lstStyle/>
@@ -5623,7 +6151,7 @@
           <a:noFill/>
         </p:spPr>
         <p:txBody>
-          <a:bodyPr wrap="square" anchor="t" lIns="0" rIns="0" tIns="0" bIns="0">
+          <a:bodyPr wrap="square" lIns="0" tIns="0" rIns="0" bIns="0" anchor="t">
             <a:spAutoFit/>
           </a:bodyPr>
           <a:lstStyle/>
@@ -5662,7 +6190,7 @@
           <a:noFill/>
         </p:spPr>
         <p:txBody>
-          <a:bodyPr wrap="square" anchor="t" lIns="0" rIns="0" tIns="0" bIns="0">
+          <a:bodyPr wrap="square" lIns="0" tIns="0" rIns="0" bIns="0" anchor="t">
             <a:spAutoFit/>
           </a:bodyPr>
           <a:lstStyle/>
@@ -5725,6 +6253,7 @@
           <a:lstStyle/>
           <a:p>
             <a:pPr algn="ctr"/>
+            <a:endParaRPr/>
           </a:p>
         </p:txBody>
       </p:sp>
@@ -5745,7 +6274,7 @@
           <a:noFill/>
         </p:spPr>
         <p:txBody>
-          <a:bodyPr wrap="square" anchor="t" lIns="0" rIns="0" tIns="0" bIns="0">
+          <a:bodyPr wrap="square" lIns="0" tIns="0" rIns="0" bIns="0" anchor="t">
             <a:spAutoFit/>
           </a:bodyPr>
           <a:lstStyle/>
@@ -5784,7 +6313,7 @@
           <a:noFill/>
         </p:spPr>
         <p:txBody>
-          <a:bodyPr wrap="square" anchor="t" lIns="0" rIns="0" tIns="0" bIns="0">
+          <a:bodyPr wrap="square" lIns="0" tIns="0" rIns="0" bIns="0" anchor="t">
             <a:spAutoFit/>
           </a:bodyPr>
           <a:lstStyle/>
@@ -5847,6 +6376,7 @@
           <a:lstStyle/>
           <a:p>
             <a:pPr algn="ctr"/>
+            <a:endParaRPr/>
           </a:p>
         </p:txBody>
       </p:sp>
@@ -5867,7 +6397,7 @@
           <a:noFill/>
         </p:spPr>
         <p:txBody>
-          <a:bodyPr wrap="square" anchor="t" lIns="0" rIns="0" tIns="0" bIns="0">
+          <a:bodyPr wrap="square" lIns="0" tIns="0" rIns="0" bIns="0" anchor="t">
             <a:spAutoFit/>
           </a:bodyPr>
           <a:lstStyle/>
@@ -5906,7 +6436,7 @@
           <a:noFill/>
         </p:spPr>
         <p:txBody>
-          <a:bodyPr wrap="square" anchor="t" lIns="0" rIns="0" tIns="0" bIns="0">
+          <a:bodyPr wrap="square" lIns="0" tIns="0" rIns="0" bIns="0" anchor="t">
             <a:spAutoFit/>
           </a:bodyPr>
           <a:lstStyle/>
@@ -5969,6 +6499,7 @@
           <a:lstStyle/>
           <a:p>
             <a:pPr algn="ctr"/>
+            <a:endParaRPr/>
           </a:p>
         </p:txBody>
       </p:sp>
@@ -5989,7 +6520,7 @@
           <a:noFill/>
         </p:spPr>
         <p:txBody>
-          <a:bodyPr wrap="square" anchor="t" lIns="0" rIns="0" tIns="0" bIns="0">
+          <a:bodyPr wrap="square" lIns="0" tIns="0" rIns="0" bIns="0" anchor="t">
             <a:spAutoFit/>
           </a:bodyPr>
           <a:lstStyle/>
@@ -6028,7 +6559,7 @@
           <a:noFill/>
         </p:spPr>
         <p:txBody>
-          <a:bodyPr wrap="square" anchor="t" lIns="0" rIns="0" tIns="0" bIns="0">
+          <a:bodyPr wrap="square" lIns="0" tIns="0" rIns="0" bIns="0" anchor="t">
             <a:spAutoFit/>
           </a:bodyPr>
           <a:lstStyle/>
@@ -6091,6 +6622,7 @@
           <a:lstStyle/>
           <a:p>
             <a:pPr algn="ctr"/>
+            <a:endParaRPr/>
           </a:p>
         </p:txBody>
       </p:sp>
@@ -6111,7 +6643,7 @@
           <a:noFill/>
         </p:spPr>
         <p:txBody>
-          <a:bodyPr wrap="square" anchor="t" lIns="0" rIns="0" tIns="0" bIns="0">
+          <a:bodyPr wrap="square" lIns="0" tIns="0" rIns="0" bIns="0" anchor="t">
             <a:spAutoFit/>
           </a:bodyPr>
           <a:lstStyle/>
@@ -6150,7 +6682,7 @@
           <a:noFill/>
         </p:spPr>
         <p:txBody>
-          <a:bodyPr wrap="square" anchor="t" lIns="0" rIns="0" tIns="0" bIns="0">
+          <a:bodyPr wrap="square" lIns="0" tIns="0" rIns="0" bIns="0" anchor="t">
             <a:spAutoFit/>
           </a:bodyPr>
           <a:lstStyle/>
@@ -6213,6 +6745,7 @@
           <a:lstStyle/>
           <a:p>
             <a:pPr algn="ctr"/>
+            <a:endParaRPr/>
           </a:p>
         </p:txBody>
       </p:sp>
@@ -6233,7 +6766,7 @@
           <a:noFill/>
         </p:spPr>
         <p:txBody>
-          <a:bodyPr wrap="square" anchor="t" lIns="0" rIns="0" tIns="0" bIns="0">
+          <a:bodyPr wrap="square" lIns="0" tIns="0" rIns="0" bIns="0" anchor="t">
             <a:spAutoFit/>
           </a:bodyPr>
           <a:lstStyle/>
@@ -6272,7 +6805,7 @@
           <a:noFill/>
         </p:spPr>
         <p:txBody>
-          <a:bodyPr wrap="square" anchor="t" lIns="0" rIns="0" tIns="0" bIns="0">
+          <a:bodyPr wrap="square" lIns="0" tIns="0" rIns="0" bIns="0" anchor="t">
             <a:spAutoFit/>
           </a:bodyPr>
           <a:lstStyle/>
@@ -6335,6 +6868,7 @@
           <a:lstStyle/>
           <a:p>
             <a:pPr algn="ctr"/>
+            <a:endParaRPr/>
           </a:p>
         </p:txBody>
       </p:sp>
@@ -6355,7 +6889,7 @@
           <a:noFill/>
         </p:spPr>
         <p:txBody>
-          <a:bodyPr wrap="square" anchor="t" lIns="0" rIns="0" tIns="0" bIns="0">
+          <a:bodyPr wrap="square" lIns="0" tIns="0" rIns="0" bIns="0" anchor="t">
             <a:spAutoFit/>
           </a:bodyPr>
           <a:lstStyle/>
@@ -6394,7 +6928,7 @@
           <a:noFill/>
         </p:spPr>
         <p:txBody>
-          <a:bodyPr wrap="square" anchor="t" lIns="0" rIns="0" tIns="0" bIns="0">
+          <a:bodyPr wrap="square" lIns="0" tIns="0" rIns="0" bIns="0" anchor="t">
             <a:spAutoFit/>
           </a:bodyPr>
           <a:lstStyle/>
@@ -6457,6 +6991,7 @@
           <a:lstStyle/>
           <a:p>
             <a:pPr algn="ctr"/>
+            <a:endParaRPr/>
           </a:p>
         </p:txBody>
       </p:sp>
@@ -6477,7 +7012,7 @@
           <a:noFill/>
         </p:spPr>
         <p:txBody>
-          <a:bodyPr wrap="square" anchor="t" lIns="0" rIns="0" tIns="0" bIns="0">
+          <a:bodyPr wrap="square" lIns="0" tIns="0" rIns="0" bIns="0" anchor="t">
             <a:spAutoFit/>
           </a:bodyPr>
           <a:lstStyle/>
@@ -6516,7 +7051,7 @@
           <a:noFill/>
         </p:spPr>
         <p:txBody>
-          <a:bodyPr wrap="square" anchor="t" lIns="0" rIns="0" tIns="0" bIns="0">
+          <a:bodyPr wrap="square" lIns="0" tIns="0" rIns="0" bIns="0" anchor="t">
             <a:spAutoFit/>
           </a:bodyPr>
           <a:lstStyle/>
@@ -6555,7 +7090,7 @@
           <a:noFill/>
         </p:spPr>
         <p:txBody>
-          <a:bodyPr wrap="square" anchor="t" lIns="0" rIns="0" tIns="0" bIns="0">
+          <a:bodyPr wrap="square" lIns="0" tIns="0" rIns="0" bIns="0" anchor="t">
             <a:spAutoFit/>
           </a:bodyPr>
           <a:lstStyle/>
@@ -6586,7 +7121,7 @@
 </file>
 
 <file path=ppt/slides/slide3.xml><?xml version="1.0" encoding="utf-8"?>
-<p:sld xmlns:a="http://schemas.openxmlformats.org/drawingml/2006/main" xmlns:p="http://schemas.openxmlformats.org/presentationml/2006/main" xmlns:r="http://schemas.openxmlformats.org/officeDocument/2006/relationships">
+<p:sld xmlns:a="http://schemas.openxmlformats.org/drawingml/2006/main" xmlns:r="http://schemas.openxmlformats.org/officeDocument/2006/relationships" xmlns:p="http://schemas.openxmlformats.org/presentationml/2006/main">
   <p:cSld>
     <p:spTree>
       <p:nvGrpSpPr>
@@ -6594,7 +7129,14 @@
         <p:cNvGrpSpPr/>
         <p:nvPr/>
       </p:nvGrpSpPr>
-      <p:grpSpPr/>
+      <p:grpSpPr>
+        <a:xfrm>
+          <a:off x="0" y="0"/>
+          <a:ext cx="0" cy="0"/>
+          <a:chOff x="0" y="0"/>
+          <a:chExt cx="0" cy="0"/>
+        </a:xfrm>
+      </p:grpSpPr>
       <p:sp>
         <p:nvSpPr>
           <p:cNvPr id="2" name="Rectangle 1"/>
@@ -6636,6 +7178,7 @@
           <a:lstStyle/>
           <a:p>
             <a:pPr algn="ctr"/>
+            <a:endParaRPr/>
           </a:p>
         </p:txBody>
       </p:sp>
@@ -6680,6 +7223,7 @@
           <a:lstStyle/>
           <a:p>
             <a:pPr algn="ctr"/>
+            <a:endParaRPr/>
           </a:p>
         </p:txBody>
       </p:sp>
@@ -6700,7 +7244,7 @@
           <a:noFill/>
         </p:spPr>
         <p:txBody>
-          <a:bodyPr wrap="square" anchor="t" lIns="0" rIns="0" tIns="0" bIns="0">
+          <a:bodyPr wrap="square" lIns="0" tIns="0" rIns="0" bIns="0" anchor="t">
             <a:spAutoFit/>
           </a:bodyPr>
           <a:lstStyle/>
@@ -6739,7 +7283,7 @@
           <a:noFill/>
         </p:spPr>
         <p:txBody>
-          <a:bodyPr wrap="square" anchor="t" lIns="0" rIns="0" tIns="0" bIns="0">
+          <a:bodyPr wrap="square" lIns="0" tIns="0" rIns="0" bIns="0" anchor="t">
             <a:spAutoFit/>
           </a:bodyPr>
           <a:lstStyle/>
@@ -6770,15 +7314,15 @@
         <p:spPr>
           <a:xfrm>
             <a:off x="566928" y="1572768"/>
-            <a:ext cx="9509760" cy="548640"/>
-          </a:xfrm>
-          <a:prstGeom prst="rect">
-            <a:avLst/>
-          </a:prstGeom>
-          <a:noFill/>
-        </p:spPr>
-        <p:txBody>
-          <a:bodyPr wrap="square" anchor="t" lIns="0" rIns="0" tIns="0" bIns="0">
+            <a:ext cx="9509760" cy="249877"/>
+          </a:xfrm>
+          <a:prstGeom prst="rect">
+            <a:avLst/>
+          </a:prstGeom>
+          <a:noFill/>
+        </p:spPr>
+        <p:txBody>
+          <a:bodyPr wrap="square" lIns="0" tIns="0" rIns="0" bIns="0" anchor="t">
             <a:spAutoFit/>
           </a:bodyPr>
           <a:lstStyle/>
@@ -6789,14 +7333,20 @@
               </a:lnSpc>
             </a:pPr>
             <a:r>
-              <a:rPr sz="1500" b="0">
+              <a:rPr lang="en-US" sz="1500">
                 <a:solidFill>
                   <a:srgbClr val="64748B"/>
                 </a:solidFill>
                 <a:latin typeface="Calibri"/>
               </a:rPr>
-              <a:t>The question stays open. No number in this deck answers it.</a:t>
-            </a:r>
+              <a:t>Pipelines, benchmark, evidence and metrics</a:t>
+            </a:r>
+            <a:endParaRPr sz="1500" b="0">
+              <a:solidFill>
+                <a:srgbClr val="64748B"/>
+              </a:solidFill>
+              <a:latin typeface="Calibri"/>
+            </a:endParaRPr>
           </a:p>
         </p:txBody>
       </p:sp>
@@ -6817,7 +7367,7 @@
           <a:noFill/>
         </p:spPr>
         <p:txBody>
-          <a:bodyPr wrap="square" anchor="t" lIns="0" rIns="0" tIns="0" bIns="0">
+          <a:bodyPr wrap="square" lIns="0" tIns="0" rIns="0" bIns="0" anchor="t">
             <a:spAutoFit/>
           </a:bodyPr>
           <a:lstStyle/>
@@ -6856,7 +7406,7 @@
           <a:noFill/>
         </p:spPr>
         <p:txBody>
-          <a:bodyPr wrap="square" anchor="t" lIns="0" rIns="0" tIns="0" bIns="0">
+          <a:bodyPr wrap="square" lIns="0" tIns="0" rIns="0" bIns="0" anchor="t">
             <a:spAutoFit/>
           </a:bodyPr>
           <a:lstStyle/>
@@ -6895,7 +7445,7 @@
           <a:noFill/>
         </p:spPr>
         <p:txBody>
-          <a:bodyPr wrap="square" anchor="t" lIns="0" rIns="0" tIns="0" bIns="0">
+          <a:bodyPr wrap="square" lIns="0" tIns="0" rIns="0" bIns="0" anchor="t">
             <a:spAutoFit/>
           </a:bodyPr>
           <a:lstStyle/>
@@ -6934,7 +7484,7 @@
           <a:noFill/>
         </p:spPr>
         <p:txBody>
-          <a:bodyPr wrap="square" anchor="t" lIns="0" rIns="0" tIns="0" bIns="0">
+          <a:bodyPr wrap="square" lIns="0" tIns="0" rIns="0" bIns="0" anchor="t">
             <a:spAutoFit/>
           </a:bodyPr>
           <a:lstStyle/>
@@ -6973,7 +7523,7 @@
           <a:noFill/>
         </p:spPr>
         <p:txBody>
-          <a:bodyPr wrap="square" anchor="t" lIns="0" rIns="0" tIns="0" bIns="0">
+          <a:bodyPr wrap="square" lIns="0" tIns="0" rIns="0" bIns="0" anchor="t">
             <a:spAutoFit/>
           </a:bodyPr>
           <a:lstStyle/>
@@ -7012,7 +7562,7 @@
           <a:noFill/>
         </p:spPr>
         <p:txBody>
-          <a:bodyPr wrap="square" anchor="t" lIns="0" rIns="0" tIns="0" bIns="0">
+          <a:bodyPr wrap="square" lIns="0" tIns="0" rIns="0" bIns="0" anchor="t">
             <a:spAutoFit/>
           </a:bodyPr>
           <a:lstStyle/>
@@ -7051,7 +7601,7 @@
           <a:noFill/>
         </p:spPr>
         <p:txBody>
-          <a:bodyPr wrap="square" anchor="t" lIns="0" rIns="0" tIns="0" bIns="0">
+          <a:bodyPr wrap="square" lIns="0" tIns="0" rIns="0" bIns="0" anchor="t">
             <a:spAutoFit/>
           </a:bodyPr>
           <a:lstStyle/>
@@ -7090,7 +7640,7 @@
           <a:noFill/>
         </p:spPr>
         <p:txBody>
-          <a:bodyPr wrap="square" anchor="t" lIns="0" rIns="0" tIns="0" bIns="0">
+          <a:bodyPr wrap="square" lIns="0" tIns="0" rIns="0" bIns="0" anchor="t">
             <a:spAutoFit/>
           </a:bodyPr>
           <a:lstStyle/>
@@ -7129,7 +7679,7 @@
           <a:noFill/>
         </p:spPr>
         <p:txBody>
-          <a:bodyPr wrap="square" anchor="t" lIns="0" rIns="0" tIns="0" bIns="0">
+          <a:bodyPr wrap="square" lIns="0" tIns="0" rIns="0" bIns="0" anchor="t">
             <a:spAutoFit/>
           </a:bodyPr>
           <a:lstStyle/>
@@ -7168,7 +7718,7 @@
           <a:noFill/>
         </p:spPr>
         <p:txBody>
-          <a:bodyPr wrap="square" anchor="t" lIns="0" rIns="0" tIns="0" bIns="0">
+          <a:bodyPr wrap="square" lIns="0" tIns="0" rIns="0" bIns="0" anchor="t">
             <a:spAutoFit/>
           </a:bodyPr>
           <a:lstStyle/>
@@ -7187,6 +7737,56 @@
               </a:rPr>
               <a:t>3</a:t>
             </a:r>
+          </a:p>
+        </p:txBody>
+      </p:sp>
+      <p:sp>
+        <p:nvSpPr>
+          <p:cNvPr id="17" name="TextBox 16">
+            <a:extLst>
+              <a:ext uri="{FF2B5EF4-FFF2-40B4-BE49-F238E27FC236}">
+                <a16:creationId xmlns:a16="http://schemas.microsoft.com/office/drawing/2014/main" id="{161A257E-200C-D41A-0C40-09742E8B35EA}"/>
+              </a:ext>
+            </a:extLst>
+          </p:cNvPr>
+          <p:cNvSpPr txBox="1"/>
+          <p:nvPr/>
+        </p:nvSpPr>
+        <p:spPr>
+          <a:xfrm>
+            <a:off x="566928" y="6059483"/>
+            <a:ext cx="9509760" cy="249877"/>
+          </a:xfrm>
+          <a:prstGeom prst="rect">
+            <a:avLst/>
+          </a:prstGeom>
+          <a:noFill/>
+        </p:spPr>
+        <p:txBody>
+          <a:bodyPr wrap="square" lIns="0" tIns="0" rIns="0" bIns="0" anchor="t">
+            <a:spAutoFit/>
+          </a:bodyPr>
+          <a:lstStyle/>
+          <a:p>
+            <a:pPr>
+              <a:lnSpc>
+                <a:spcPct val="115000"/>
+              </a:lnSpc>
+            </a:pPr>
+            <a:r>
+              <a:rPr lang="en-GB" sz="1500">
+                <a:solidFill>
+                  <a:srgbClr val="EF4443"/>
+                </a:solidFill>
+              </a:rPr>
+              <a:t>The question is still open. No figures in this presentation answers it*</a:t>
+            </a:r>
+            <a:endParaRPr sz="1500" b="0">
+              <a:solidFill>
+                <a:srgbClr val="EF4443"/>
+              </a:solidFill>
+              <a:latin typeface="Calibri"/>
+            </a:endParaRPr>
           </a:p>
         </p:txBody>
       </p:sp>
@@ -7199,7 +7799,7 @@
 </file>
 
 <file path=ppt/slides/slide4.xml><?xml version="1.0" encoding="utf-8"?>
-<p:sld xmlns:a="http://schemas.openxmlformats.org/drawingml/2006/main" xmlns:p="http://schemas.openxmlformats.org/presentationml/2006/main" xmlns:r="http://schemas.openxmlformats.org/officeDocument/2006/relationships">
+<p:sld xmlns:a="http://schemas.openxmlformats.org/drawingml/2006/main" xmlns:r="http://schemas.openxmlformats.org/officeDocument/2006/relationships" xmlns:p="http://schemas.openxmlformats.org/presentationml/2006/main">
   <p:cSld>
     <p:spTree>
       <p:nvGrpSpPr>
@@ -7207,7 +7807,14 @@
         <p:cNvGrpSpPr/>
         <p:nvPr/>
       </p:nvGrpSpPr>
-      <p:grpSpPr/>
+      <p:grpSpPr>
+        <a:xfrm>
+          <a:off x="0" y="0"/>
+          <a:ext cx="0" cy="0"/>
+          <a:chOff x="0" y="0"/>
+          <a:chExt cx="0" cy="0"/>
+        </a:xfrm>
+      </p:grpSpPr>
       <p:sp>
         <p:nvSpPr>
           <p:cNvPr id="2" name="Rectangle 1"/>
@@ -7249,6 +7856,7 @@
           <a:lstStyle/>
           <a:p>
             <a:pPr algn="ctr"/>
+            <a:endParaRPr/>
           </a:p>
         </p:txBody>
       </p:sp>
@@ -7293,6 +7901,7 @@
           <a:lstStyle/>
           <a:p>
             <a:pPr algn="ctr"/>
+            <a:endParaRPr/>
           </a:p>
         </p:txBody>
       </p:sp>
@@ -7313,7 +7922,7 @@
           <a:noFill/>
         </p:spPr>
         <p:txBody>
-          <a:bodyPr wrap="square" anchor="t" lIns="0" rIns="0" tIns="0" bIns="0">
+          <a:bodyPr wrap="square" lIns="0" tIns="0" rIns="0" bIns="0" anchor="t">
             <a:spAutoFit/>
           </a:bodyPr>
           <a:lstStyle/>
@@ -7352,7 +7961,7 @@
           <a:noFill/>
         </p:spPr>
         <p:txBody>
-          <a:bodyPr wrap="square" anchor="t" lIns="0" rIns="0" tIns="0" bIns="0">
+          <a:bodyPr wrap="square" lIns="0" tIns="0" rIns="0" bIns="0" anchor="t">
             <a:spAutoFit/>
           </a:bodyPr>
           <a:lstStyle/>
@@ -7383,7 +7992,7 @@
           <p:nvPr/>
         </p:nvPicPr>
         <p:blipFill>
-          <a:blip r:embed="rId2"/>
+          <a:blip r:embed="rId3"/>
           <a:stretch>
             <a:fillRect/>
           </a:stretch>
@@ -7415,7 +8024,7 @@
           <a:noFill/>
         </p:spPr>
         <p:txBody>
-          <a:bodyPr wrap="square" anchor="t" lIns="0" rIns="0" tIns="0" bIns="0">
+          <a:bodyPr wrap="square" lIns="0" tIns="0" rIns="0" bIns="0" anchor="t">
             <a:spAutoFit/>
           </a:bodyPr>
           <a:lstStyle/>
@@ -7446,7 +8055,7 @@
 </file>
 
 <file path=ppt/slides/slide5.xml><?xml version="1.0" encoding="utf-8"?>
-<p:sld xmlns:a="http://schemas.openxmlformats.org/drawingml/2006/main" xmlns:p="http://schemas.openxmlformats.org/presentationml/2006/main" xmlns:r="http://schemas.openxmlformats.org/officeDocument/2006/relationships">
+<p:sld xmlns:a="http://schemas.openxmlformats.org/drawingml/2006/main" xmlns:r="http://schemas.openxmlformats.org/officeDocument/2006/relationships" xmlns:p="http://schemas.openxmlformats.org/presentationml/2006/main">
   <p:cSld>
     <p:spTree>
       <p:nvGrpSpPr>
@@ -7454,7 +8063,14 @@
         <p:cNvGrpSpPr/>
         <p:nvPr/>
       </p:nvGrpSpPr>
-      <p:grpSpPr/>
+      <p:grpSpPr>
+        <a:xfrm>
+          <a:off x="0" y="0"/>
+          <a:ext cx="0" cy="0"/>
+          <a:chOff x="0" y="0"/>
+          <a:chExt cx="0" cy="0"/>
+        </a:xfrm>
+      </p:grpSpPr>
       <p:sp>
         <p:nvSpPr>
           <p:cNvPr id="2" name="Rectangle 1"/>
@@ -7496,6 +8112,7 @@
           <a:lstStyle/>
           <a:p>
             <a:pPr algn="ctr"/>
+            <a:endParaRPr/>
           </a:p>
         </p:txBody>
       </p:sp>
@@ -7540,6 +8157,7 @@
           <a:lstStyle/>
           <a:p>
             <a:pPr algn="ctr"/>
+            <a:endParaRPr/>
           </a:p>
         </p:txBody>
       </p:sp>
@@ -7560,7 +8178,7 @@
           <a:noFill/>
         </p:spPr>
         <p:txBody>
-          <a:bodyPr wrap="square" anchor="t" lIns="0" rIns="0" tIns="0" bIns="0">
+          <a:bodyPr wrap="square" lIns="0" tIns="0" rIns="0" bIns="0" anchor="t">
             <a:spAutoFit/>
           </a:bodyPr>
           <a:lstStyle/>
@@ -7599,7 +8217,7 @@
           <a:noFill/>
         </p:spPr>
         <p:txBody>
-          <a:bodyPr wrap="square" anchor="t" lIns="0" rIns="0" tIns="0" bIns="0">
+          <a:bodyPr wrap="square" lIns="0" tIns="0" rIns="0" bIns="0" anchor="t">
             <a:spAutoFit/>
           </a:bodyPr>
           <a:lstStyle/>
@@ -7630,7 +8248,7 @@
           <p:nvPr/>
         </p:nvPicPr>
         <p:blipFill>
-          <a:blip r:embed="rId2"/>
+          <a:blip r:embed="rId3"/>
           <a:stretch>
             <a:fillRect/>
           </a:stretch>
@@ -7662,7 +8280,7 @@
           <a:noFill/>
         </p:spPr>
         <p:txBody>
-          <a:bodyPr wrap="square" anchor="t" lIns="0" rIns="0" tIns="0" bIns="0">
+          <a:bodyPr wrap="square" lIns="0" tIns="0" rIns="0" bIns="0" anchor="t">
             <a:spAutoFit/>
           </a:bodyPr>
           <a:lstStyle/>
@@ -7693,7 +8311,7 @@
 </file>
 
 <file path=ppt/slides/slide6.xml><?xml version="1.0" encoding="utf-8"?>
-<p:sld xmlns:a="http://schemas.openxmlformats.org/drawingml/2006/main" xmlns:p="http://schemas.openxmlformats.org/presentationml/2006/main" xmlns:r="http://schemas.openxmlformats.org/officeDocument/2006/relationships">
+<p:sld xmlns:a="http://schemas.openxmlformats.org/drawingml/2006/main" xmlns:r="http://schemas.openxmlformats.org/officeDocument/2006/relationships" xmlns:p="http://schemas.openxmlformats.org/presentationml/2006/main">
   <p:cSld>
     <p:spTree>
       <p:nvGrpSpPr>
@@ -7701,7 +8319,14 @@
         <p:cNvGrpSpPr/>
         <p:nvPr/>
       </p:nvGrpSpPr>
-      <p:grpSpPr/>
+      <p:grpSpPr>
+        <a:xfrm>
+          <a:off x="0" y="0"/>
+          <a:ext cx="0" cy="0"/>
+          <a:chOff x="0" y="0"/>
+          <a:chExt cx="0" cy="0"/>
+        </a:xfrm>
+      </p:grpSpPr>
       <p:sp>
         <p:nvSpPr>
           <p:cNvPr id="2" name="Rectangle 1"/>
@@ -7743,6 +8368,7 @@
           <a:lstStyle/>
           <a:p>
             <a:pPr algn="ctr"/>
+            <a:endParaRPr/>
           </a:p>
         </p:txBody>
       </p:sp>
@@ -7787,6 +8413,7 @@
           <a:lstStyle/>
           <a:p>
             <a:pPr algn="ctr"/>
+            <a:endParaRPr/>
           </a:p>
         </p:txBody>
       </p:sp>
@@ -7807,7 +8434,7 @@
           <a:noFill/>
         </p:spPr>
         <p:txBody>
-          <a:bodyPr wrap="square" anchor="t" lIns="0" rIns="0" tIns="0" bIns="0">
+          <a:bodyPr wrap="square" lIns="0" tIns="0" rIns="0" bIns="0" anchor="t">
             <a:spAutoFit/>
           </a:bodyPr>
           <a:lstStyle/>
@@ -7846,7 +8473,7 @@
           <a:noFill/>
         </p:spPr>
         <p:txBody>
-          <a:bodyPr wrap="square" anchor="t" lIns="0" rIns="0" tIns="0" bIns="0">
+          <a:bodyPr wrap="square" lIns="0" tIns="0" rIns="0" bIns="0" anchor="t">
             <a:spAutoFit/>
           </a:bodyPr>
           <a:lstStyle/>
@@ -7885,7 +8512,7 @@
           <a:noFill/>
         </p:spPr>
         <p:txBody>
-          <a:bodyPr wrap="square" anchor="t" lIns="0" rIns="0" tIns="0" bIns="0">
+          <a:bodyPr wrap="square" lIns="0" tIns="0" rIns="0" bIns="0" anchor="t">
             <a:spAutoFit/>
           </a:bodyPr>
           <a:lstStyle/>
@@ -7948,6 +8575,7 @@
           <a:lstStyle/>
           <a:p>
             <a:pPr algn="ctr"/>
+            <a:endParaRPr/>
           </a:p>
         </p:txBody>
       </p:sp>
@@ -7968,7 +8596,7 @@
           <a:noFill/>
         </p:spPr>
         <p:txBody>
-          <a:bodyPr wrap="square" anchor="t" lIns="0" rIns="0" tIns="0" bIns="0">
+          <a:bodyPr wrap="square" lIns="0" tIns="0" rIns="0" bIns="0" anchor="t">
             <a:spAutoFit/>
           </a:bodyPr>
           <a:lstStyle/>
@@ -8007,7 +8635,7 @@
           <a:noFill/>
         </p:spPr>
         <p:txBody>
-          <a:bodyPr wrap="square" anchor="t" lIns="0" rIns="0" tIns="0" bIns="0">
+          <a:bodyPr wrap="square" lIns="0" tIns="0" rIns="0" bIns="0" anchor="t">
             <a:spAutoFit/>
           </a:bodyPr>
           <a:lstStyle/>
@@ -8070,6 +8698,7 @@
           <a:lstStyle/>
           <a:p>
             <a:pPr algn="ctr"/>
+            <a:endParaRPr/>
           </a:p>
         </p:txBody>
       </p:sp>
@@ -8090,7 +8719,7 @@
           <a:noFill/>
         </p:spPr>
         <p:txBody>
-          <a:bodyPr wrap="square" anchor="t" lIns="0" rIns="0" tIns="0" bIns="0">
+          <a:bodyPr wrap="square" lIns="0" tIns="0" rIns="0" bIns="0" anchor="t">
             <a:spAutoFit/>
           </a:bodyPr>
           <a:lstStyle/>
@@ -8129,7 +8758,7 @@
           <a:noFill/>
         </p:spPr>
         <p:txBody>
-          <a:bodyPr wrap="square" anchor="t" lIns="0" rIns="0" tIns="0" bIns="0">
+          <a:bodyPr wrap="square" lIns="0" tIns="0" rIns="0" bIns="0" anchor="t">
             <a:spAutoFit/>
           </a:bodyPr>
           <a:lstStyle/>
@@ -8192,6 +8821,7 @@
           <a:lstStyle/>
           <a:p>
             <a:pPr algn="ctr"/>
+            <a:endParaRPr/>
           </a:p>
         </p:txBody>
       </p:sp>
@@ -8212,7 +8842,7 @@
           <a:noFill/>
         </p:spPr>
         <p:txBody>
-          <a:bodyPr wrap="square" anchor="t" lIns="0" rIns="0" tIns="0" bIns="0">
+          <a:bodyPr wrap="square" lIns="0" tIns="0" rIns="0" bIns="0" anchor="t">
             <a:spAutoFit/>
           </a:bodyPr>
           <a:lstStyle/>
@@ -8251,7 +8881,7 @@
           <a:noFill/>
         </p:spPr>
         <p:txBody>
-          <a:bodyPr wrap="square" anchor="t" lIns="0" rIns="0" tIns="0" bIns="0">
+          <a:bodyPr wrap="square" lIns="0" tIns="0" rIns="0" bIns="0" anchor="t">
             <a:spAutoFit/>
           </a:bodyPr>
           <a:lstStyle/>
@@ -8290,7 +8920,7 @@
           <a:noFill/>
         </p:spPr>
         <p:txBody>
-          <a:bodyPr wrap="square" anchor="t" lIns="0" rIns="0" tIns="0" bIns="0">
+          <a:bodyPr wrap="square" lIns="0" tIns="0" rIns="0" bIns="0" anchor="t">
             <a:spAutoFit/>
           </a:bodyPr>
           <a:lstStyle/>
@@ -8329,7 +8959,7 @@
           <a:noFill/>
         </p:spPr>
         <p:txBody>
-          <a:bodyPr wrap="square" anchor="t" lIns="0" rIns="0" tIns="0" bIns="0">
+          <a:bodyPr wrap="square" lIns="0" tIns="0" rIns="0" bIns="0" anchor="t">
             <a:spAutoFit/>
           </a:bodyPr>
           <a:lstStyle/>
@@ -8360,7 +8990,7 @@
 </file>
 
 <file path=ppt/slides/slide7.xml><?xml version="1.0" encoding="utf-8"?>
-<p:sld xmlns:a="http://schemas.openxmlformats.org/drawingml/2006/main" xmlns:p="http://schemas.openxmlformats.org/presentationml/2006/main" xmlns:r="http://schemas.openxmlformats.org/officeDocument/2006/relationships">
+<p:sld xmlns:a="http://schemas.openxmlformats.org/drawingml/2006/main" xmlns:r="http://schemas.openxmlformats.org/officeDocument/2006/relationships" xmlns:p="http://schemas.openxmlformats.org/presentationml/2006/main">
   <p:cSld>
     <p:spTree>
       <p:nvGrpSpPr>
@@ -8368,7 +8998,14 @@
         <p:cNvGrpSpPr/>
         <p:nvPr/>
       </p:nvGrpSpPr>
-      <p:grpSpPr/>
+      <p:grpSpPr>
+        <a:xfrm>
+          <a:off x="0" y="0"/>
+          <a:ext cx="0" cy="0"/>
+          <a:chOff x="0" y="0"/>
+          <a:chExt cx="0" cy="0"/>
+        </a:xfrm>
+      </p:grpSpPr>
       <p:sp>
         <p:nvSpPr>
           <p:cNvPr id="2" name="Rectangle 1"/>
@@ -8410,6 +9047,7 @@
           <a:lstStyle/>
           <a:p>
             <a:pPr algn="ctr"/>
+            <a:endParaRPr/>
           </a:p>
         </p:txBody>
       </p:sp>
@@ -8454,6 +9092,7 @@
           <a:lstStyle/>
           <a:p>
             <a:pPr algn="ctr"/>
+            <a:endParaRPr/>
           </a:p>
         </p:txBody>
       </p:sp>
@@ -8474,7 +9113,7 @@
           <a:noFill/>
         </p:spPr>
         <p:txBody>
-          <a:bodyPr wrap="square" anchor="t" lIns="0" rIns="0" tIns="0" bIns="0">
+          <a:bodyPr wrap="square" lIns="0" tIns="0" rIns="0" bIns="0" anchor="t">
             <a:spAutoFit/>
           </a:bodyPr>
           <a:lstStyle/>
@@ -8513,7 +9152,7 @@
           <a:noFill/>
         </p:spPr>
         <p:txBody>
-          <a:bodyPr wrap="square" anchor="t" lIns="0" rIns="0" tIns="0" bIns="0">
+          <a:bodyPr wrap="square" lIns="0" tIns="0" rIns="0" bIns="0" anchor="t">
             <a:spAutoFit/>
           </a:bodyPr>
           <a:lstStyle/>
@@ -8552,7 +9191,7 @@
           <a:noFill/>
         </p:spPr>
         <p:txBody>
-          <a:bodyPr wrap="square" anchor="t" lIns="0" rIns="0" tIns="0" bIns="0">
+          <a:bodyPr wrap="square" lIns="0" tIns="0" rIns="0" bIns="0" anchor="t">
             <a:spAutoFit/>
           </a:bodyPr>
           <a:lstStyle/>
@@ -8615,6 +9254,7 @@
           <a:lstStyle/>
           <a:p>
             <a:pPr algn="ctr"/>
+            <a:endParaRPr/>
           </a:p>
         </p:txBody>
       </p:sp>
@@ -8635,7 +9275,7 @@
           <a:noFill/>
         </p:spPr>
         <p:txBody>
-          <a:bodyPr wrap="square" anchor="t" lIns="0" rIns="0" tIns="0" bIns="0">
+          <a:bodyPr wrap="square" lIns="0" tIns="0" rIns="0" bIns="0" anchor="t">
             <a:spAutoFit/>
           </a:bodyPr>
           <a:lstStyle/>
@@ -8674,7 +9314,7 @@
           <a:noFill/>
         </p:spPr>
         <p:txBody>
-          <a:bodyPr wrap="square" anchor="t" lIns="0" rIns="0" tIns="0" bIns="0">
+          <a:bodyPr wrap="square" lIns="0" tIns="0" rIns="0" bIns="0" anchor="t">
             <a:spAutoFit/>
           </a:bodyPr>
           <a:lstStyle/>
@@ -8737,6 +9377,7 @@
           <a:lstStyle/>
           <a:p>
             <a:pPr algn="ctr"/>
+            <a:endParaRPr/>
           </a:p>
         </p:txBody>
       </p:sp>
@@ -8757,7 +9398,7 @@
           <a:noFill/>
         </p:spPr>
         <p:txBody>
-          <a:bodyPr wrap="square" anchor="t" lIns="0" rIns="0" tIns="0" bIns="0">
+          <a:bodyPr wrap="square" lIns="0" tIns="0" rIns="0" bIns="0" anchor="t">
             <a:spAutoFit/>
           </a:bodyPr>
           <a:lstStyle/>
@@ -8796,7 +9437,7 @@
           <a:noFill/>
         </p:spPr>
         <p:txBody>
-          <a:bodyPr wrap="square" anchor="t" lIns="0" rIns="0" tIns="0" bIns="0">
+          <a:bodyPr wrap="square" lIns="0" tIns="0" rIns="0" bIns="0" anchor="t">
             <a:spAutoFit/>
           </a:bodyPr>
           <a:lstStyle/>
@@ -8859,6 +9500,7 @@
           <a:lstStyle/>
           <a:p>
             <a:pPr algn="ctr"/>
+            <a:endParaRPr/>
           </a:p>
         </p:txBody>
       </p:sp>
@@ -8879,7 +9521,7 @@
           <a:noFill/>
         </p:spPr>
         <p:txBody>
-          <a:bodyPr wrap="square" anchor="t" lIns="0" rIns="0" tIns="0" bIns="0">
+          <a:bodyPr wrap="square" lIns="0" tIns="0" rIns="0" bIns="0" anchor="t">
             <a:spAutoFit/>
           </a:bodyPr>
           <a:lstStyle/>
@@ -8918,7 +9560,7 @@
           <a:noFill/>
         </p:spPr>
         <p:txBody>
-          <a:bodyPr wrap="square" anchor="t" lIns="0" rIns="0" tIns="0" bIns="0">
+          <a:bodyPr wrap="square" lIns="0" tIns="0" rIns="0" bIns="0" anchor="t">
             <a:spAutoFit/>
           </a:bodyPr>
           <a:lstStyle/>
@@ -8981,6 +9623,7 @@
           <a:lstStyle/>
           <a:p>
             <a:pPr algn="ctr"/>
+            <a:endParaRPr/>
           </a:p>
         </p:txBody>
       </p:sp>
@@ -9001,7 +9644,7 @@
           <a:noFill/>
         </p:spPr>
         <p:txBody>
-          <a:bodyPr wrap="square" anchor="t" lIns="0" rIns="0" tIns="0" bIns="0">
+          <a:bodyPr wrap="square" lIns="0" tIns="0" rIns="0" bIns="0" anchor="t">
             <a:spAutoFit/>
           </a:bodyPr>
           <a:lstStyle/>
@@ -9040,7 +9683,7 @@
           <a:noFill/>
         </p:spPr>
         <p:txBody>
-          <a:bodyPr wrap="square" anchor="t" lIns="0" rIns="0" tIns="0" bIns="0">
+          <a:bodyPr wrap="square" lIns="0" tIns="0" rIns="0" bIns="0" anchor="t">
             <a:spAutoFit/>
           </a:bodyPr>
           <a:lstStyle/>
@@ -9103,6 +9746,7 @@
           <a:lstStyle/>
           <a:p>
             <a:pPr algn="ctr"/>
+            <a:endParaRPr/>
           </a:p>
         </p:txBody>
       </p:sp>
@@ -9123,7 +9767,7 @@
           <a:noFill/>
         </p:spPr>
         <p:txBody>
-          <a:bodyPr wrap="square" anchor="t" lIns="0" rIns="0" tIns="0" bIns="0">
+          <a:bodyPr wrap="square" lIns="0" tIns="0" rIns="0" bIns="0" anchor="t">
             <a:spAutoFit/>
           </a:bodyPr>
           <a:lstStyle/>
@@ -9162,7 +9806,7 @@
           <a:noFill/>
         </p:spPr>
         <p:txBody>
-          <a:bodyPr wrap="square" anchor="t" lIns="0" rIns="0" tIns="0" bIns="0">
+          <a:bodyPr wrap="square" lIns="0" tIns="0" rIns="0" bIns="0" anchor="t">
             <a:spAutoFit/>
           </a:bodyPr>
           <a:lstStyle/>
@@ -9201,7 +9845,7 @@
           <a:noFill/>
         </p:spPr>
         <p:txBody>
-          <a:bodyPr wrap="square" anchor="t" lIns="0" rIns="0" tIns="0" bIns="0">
+          <a:bodyPr wrap="square" lIns="0" tIns="0" rIns="0" bIns="0" anchor="t">
             <a:spAutoFit/>
           </a:bodyPr>
           <a:lstStyle/>
@@ -9240,7 +9884,7 @@
           <a:noFill/>
         </p:spPr>
         <p:txBody>
-          <a:bodyPr wrap="square" anchor="t" lIns="0" rIns="0" tIns="0" bIns="0">
+          <a:bodyPr wrap="square" lIns="0" tIns="0" rIns="0" bIns="0" anchor="t">
             <a:spAutoFit/>
           </a:bodyPr>
           <a:lstStyle/>
@@ -9279,7 +9923,7 @@
           <a:noFill/>
         </p:spPr>
         <p:txBody>
-          <a:bodyPr wrap="square" anchor="t" lIns="0" rIns="0" tIns="0" bIns="0">
+          <a:bodyPr wrap="square" lIns="0" tIns="0" rIns="0" bIns="0" anchor="t">
             <a:spAutoFit/>
           </a:bodyPr>
           <a:lstStyle/>
@@ -9318,7 +9962,7 @@
           <a:noFill/>
         </p:spPr>
         <p:txBody>
-          <a:bodyPr wrap="square" anchor="t" lIns="0" rIns="0" tIns="0" bIns="0">
+          <a:bodyPr wrap="square" lIns="0" tIns="0" rIns="0" bIns="0" anchor="t">
             <a:spAutoFit/>
           </a:bodyPr>
           <a:lstStyle/>
@@ -9381,6 +10025,7 @@
           <a:lstStyle/>
           <a:p>
             <a:pPr algn="ctr"/>
+            <a:endParaRPr/>
           </a:p>
         </p:txBody>
       </p:sp>
@@ -9401,7 +10046,7 @@
           <a:noFill/>
         </p:spPr>
         <p:txBody>
-          <a:bodyPr wrap="square" anchor="t" lIns="0" rIns="0" tIns="0" bIns="0">
+          <a:bodyPr wrap="square" lIns="0" tIns="0" rIns="0" bIns="0" anchor="t">
             <a:spAutoFit/>
           </a:bodyPr>
           <a:lstStyle/>
@@ -9440,7 +10085,7 @@
           <a:noFill/>
         </p:spPr>
         <p:txBody>
-          <a:bodyPr wrap="square" anchor="t" lIns="0" rIns="0" tIns="0" bIns="0">
+          <a:bodyPr wrap="square" lIns="0" tIns="0" rIns="0" bIns="0" anchor="t">
             <a:spAutoFit/>
           </a:bodyPr>
           <a:lstStyle/>
@@ -9471,7 +10116,7 @@
 </file>
 
 <file path=ppt/slides/slide8.xml><?xml version="1.0" encoding="utf-8"?>
-<p:sld xmlns:a="http://schemas.openxmlformats.org/drawingml/2006/main" xmlns:p="http://schemas.openxmlformats.org/presentationml/2006/main" xmlns:r="http://schemas.openxmlformats.org/officeDocument/2006/relationships">
+<p:sld xmlns:a="http://schemas.openxmlformats.org/drawingml/2006/main" xmlns:r="http://schemas.openxmlformats.org/officeDocument/2006/relationships" xmlns:p="http://schemas.openxmlformats.org/presentationml/2006/main">
   <p:cSld>
     <p:spTree>
       <p:nvGrpSpPr>
@@ -9479,7 +10124,14 @@
         <p:cNvGrpSpPr/>
         <p:nvPr/>
       </p:nvGrpSpPr>
-      <p:grpSpPr/>
+      <p:grpSpPr>
+        <a:xfrm>
+          <a:off x="0" y="0"/>
+          <a:ext cx="0" cy="0"/>
+          <a:chOff x="0" y="0"/>
+          <a:chExt cx="0" cy="0"/>
+        </a:xfrm>
+      </p:grpSpPr>
       <p:sp>
         <p:nvSpPr>
           <p:cNvPr id="2" name="Rectangle 1"/>
@@ -9521,6 +10173,7 @@
           <a:lstStyle/>
           <a:p>
             <a:pPr algn="ctr"/>
+            <a:endParaRPr/>
           </a:p>
         </p:txBody>
       </p:sp>
@@ -9565,6 +10218,7 @@
           <a:lstStyle/>
           <a:p>
             <a:pPr algn="ctr"/>
+            <a:endParaRPr/>
           </a:p>
         </p:txBody>
       </p:sp>
@@ -9585,7 +10239,7 @@
           <a:noFill/>
         </p:spPr>
         <p:txBody>
-          <a:bodyPr wrap="square" anchor="t" lIns="0" rIns="0" tIns="0" bIns="0">
+          <a:bodyPr wrap="square" lIns="0" tIns="0" rIns="0" bIns="0" anchor="t">
             <a:spAutoFit/>
           </a:bodyPr>
           <a:lstStyle/>
@@ -9624,7 +10278,7 @@
           <a:noFill/>
         </p:spPr>
         <p:txBody>
-          <a:bodyPr wrap="square" anchor="t" lIns="0" rIns="0" tIns="0" bIns="0">
+          <a:bodyPr wrap="square" lIns="0" tIns="0" rIns="0" bIns="0" anchor="t">
             <a:spAutoFit/>
           </a:bodyPr>
           <a:lstStyle/>
@@ -9663,7 +10317,7 @@
           <a:noFill/>
         </p:spPr>
         <p:txBody>
-          <a:bodyPr wrap="square" anchor="t" lIns="0" rIns="0" tIns="0" bIns="0">
+          <a:bodyPr wrap="square" lIns="0" tIns="0" rIns="0" bIns="0" anchor="t">
             <a:spAutoFit/>
           </a:bodyPr>
           <a:lstStyle/>
@@ -9702,7 +10356,7 @@
           <a:noFill/>
         </p:spPr>
         <p:txBody>
-          <a:bodyPr wrap="square" anchor="t" lIns="0" rIns="0" tIns="0" bIns="0">
+          <a:bodyPr wrap="square" lIns="0" tIns="0" rIns="0" bIns="0" anchor="t">
             <a:spAutoFit/>
           </a:bodyPr>
           <a:lstStyle/>
@@ -9741,7 +10395,7 @@
           <a:noFill/>
         </p:spPr>
         <p:txBody>
-          <a:bodyPr wrap="square" anchor="t" lIns="0" rIns="0" tIns="0" bIns="0">
+          <a:bodyPr wrap="square" lIns="0" tIns="0" rIns="0" bIns="0" anchor="t">
             <a:spAutoFit/>
           </a:bodyPr>
           <a:lstStyle/>
@@ -9780,7 +10434,7 @@
           <a:noFill/>
         </p:spPr>
         <p:txBody>
-          <a:bodyPr wrap="square" anchor="t" lIns="0" rIns="0" tIns="0" bIns="0">
+          <a:bodyPr wrap="square" lIns="0" tIns="0" rIns="0" bIns="0" anchor="t">
             <a:spAutoFit/>
           </a:bodyPr>
           <a:lstStyle/>
@@ -9819,7 +10473,7 @@
           <a:noFill/>
         </p:spPr>
         <p:txBody>
-          <a:bodyPr wrap="square" anchor="t" lIns="0" rIns="0" tIns="0" bIns="0">
+          <a:bodyPr wrap="square" lIns="0" tIns="0" rIns="0" bIns="0" anchor="t">
             <a:spAutoFit/>
           </a:bodyPr>
           <a:lstStyle/>
@@ -9858,7 +10512,7 @@
           <a:noFill/>
         </p:spPr>
         <p:txBody>
-          <a:bodyPr wrap="square" anchor="t" lIns="0" rIns="0" tIns="0" bIns="0">
+          <a:bodyPr wrap="square" lIns="0" tIns="0" rIns="0" bIns="0" anchor="t">
             <a:spAutoFit/>
           </a:bodyPr>
           <a:lstStyle/>
@@ -9897,7 +10551,7 @@
           <a:noFill/>
         </p:spPr>
         <p:txBody>
-          <a:bodyPr wrap="square" anchor="t" lIns="0" rIns="0" tIns="0" bIns="0">
+          <a:bodyPr wrap="square" lIns="0" tIns="0" rIns="0" bIns="0" anchor="t">
             <a:spAutoFit/>
           </a:bodyPr>
           <a:lstStyle/>
@@ -9936,7 +10590,7 @@
           <a:noFill/>
         </p:spPr>
         <p:txBody>
-          <a:bodyPr wrap="square" anchor="t" lIns="0" rIns="0" tIns="0" bIns="0">
+          <a:bodyPr wrap="square" lIns="0" tIns="0" rIns="0" bIns="0" anchor="t">
             <a:spAutoFit/>
           </a:bodyPr>
           <a:lstStyle/>
@@ -9967,7 +10621,7 @@
 </file>
 
 <file path=ppt/slides/slide9.xml><?xml version="1.0" encoding="utf-8"?>
-<p:sld xmlns:a="http://schemas.openxmlformats.org/drawingml/2006/main" xmlns:p="http://schemas.openxmlformats.org/presentationml/2006/main" xmlns:r="http://schemas.openxmlformats.org/officeDocument/2006/relationships">
+<p:sld xmlns:a="http://schemas.openxmlformats.org/drawingml/2006/main" xmlns:r="http://schemas.openxmlformats.org/officeDocument/2006/relationships" xmlns:p="http://schemas.openxmlformats.org/presentationml/2006/main">
   <p:cSld>
     <p:spTree>
       <p:nvGrpSpPr>
@@ -9975,7 +10629,14 @@
         <p:cNvGrpSpPr/>
         <p:nvPr/>
       </p:nvGrpSpPr>
-      <p:grpSpPr/>
+      <p:grpSpPr>
+        <a:xfrm>
+          <a:off x="0" y="0"/>
+          <a:ext cx="0" cy="0"/>
+          <a:chOff x="0" y="0"/>
+          <a:chExt cx="0" cy="0"/>
+        </a:xfrm>
+      </p:grpSpPr>
       <p:sp>
         <p:nvSpPr>
           <p:cNvPr id="2" name="Rectangle 1"/>
@@ -10017,6 +10678,7 @@
           <a:lstStyle/>
           <a:p>
             <a:pPr algn="ctr"/>
+            <a:endParaRPr/>
           </a:p>
         </p:txBody>
       </p:sp>
@@ -10035,7 +10697,7 @@
             <a:avLst/>
           </a:prstGeom>
           <a:solidFill>
-            <a:srgbClr val="06B6D4"/>
+            <a:srgbClr val="F59E0B"/>
           </a:solidFill>
           <a:ln>
             <a:noFill/>
@@ -10061,6 +10723,7 @@
           <a:lstStyle/>
           <a:p>
             <a:pPr algn="ctr"/>
+            <a:endParaRPr/>
           </a:p>
         </p:txBody>
       </p:sp>
@@ -10081,7 +10744,7 @@
           <a:noFill/>
         </p:spPr>
         <p:txBody>
-          <a:bodyPr wrap="square" anchor="t" lIns="0" rIns="0" tIns="0" bIns="0">
+          <a:bodyPr wrap="square" lIns="0" tIns="0" rIns="0" bIns="0" anchor="t">
             <a:spAutoFit/>
           </a:bodyPr>
           <a:lstStyle/>
@@ -10098,7 +10761,7 @@
                 </a:solidFill>
                 <a:latin typeface="Calibri"/>
               </a:rPr>
-              <a:t>CONCLUSIONS</a:t>
+              <a:t>DEMO, MEASURED</a:t>
             </a:r>
           </a:p>
         </p:txBody>
@@ -10120,7 +10783,7 @@
           <a:noFill/>
         </p:spPr>
         <p:txBody>
-          <a:bodyPr wrap="square" anchor="t" lIns="0" rIns="0" tIns="0" bIns="0">
+          <a:bodyPr wrap="square" lIns="0" tIns="0" rIns="0" bIns="0" anchor="t">
             <a:spAutoFit/>
           </a:bodyPr>
           <a:lstStyle/>
@@ -10137,7 +10800,7 @@
                 </a:solidFill>
                 <a:latin typeface="Calibri"/>
               </a:rPr>
-              <a:t>What the work supports so far</a:t>
+              <a:t>Same question, three different sets of evidence</a:t>
             </a:r>
           </a:p>
         </p:txBody>
@@ -10159,7 +10822,7 @@
           <a:noFill/>
         </p:spPr>
         <p:txBody>
-          <a:bodyPr wrap="square" anchor="t" lIns="0" rIns="0" tIns="0" bIns="0">
+          <a:bodyPr wrap="square" lIns="0" tIns="0" rIns="0" bIns="0" anchor="t">
             <a:spAutoFit/>
           </a:bodyPr>
           <a:lstStyle/>
@@ -10176,21 +10839,261 @@
                 </a:solidFill>
                 <a:latin typeface="Calibri"/>
               </a:rPr>
-              <a:t>None of these come from the benchmark. They come from building the system.</a:t>
-            </a:r>
-          </a:p>
-        </p:txBody>
-      </p:sp>
-      <p:sp>
-        <p:nvSpPr>
-          <p:cNvPr id="7" name="Rectangle 6"/>
+              <a:t>MSFT_2023, four questions, one per difficulty quadrant, K = 3. Retrieval only, run locally, zero API calls.</a:t>
+            </a:r>
+          </a:p>
+        </p:txBody>
+      </p:sp>
+      <p:sp>
+        <p:nvSpPr>
+          <p:cNvPr id="7" name="TextBox 6"/>
+          <p:cNvSpPr txBox="1"/>
+          <p:nvPr/>
+        </p:nvSpPr>
+        <p:spPr>
+          <a:xfrm>
+            <a:off x="566928" y="2029968"/>
+            <a:ext cx="2194560" cy="228600"/>
+          </a:xfrm>
+          <a:prstGeom prst="rect">
+            <a:avLst/>
+          </a:prstGeom>
+          <a:noFill/>
+        </p:spPr>
+        <p:txBody>
+          <a:bodyPr wrap="square" lIns="0" tIns="0" rIns="0" bIns="0" anchor="t">
+            <a:spAutoFit/>
+          </a:bodyPr>
+          <a:lstStyle/>
+          <a:p>
+            <a:pPr algn="l">
+              <a:lnSpc>
+                <a:spcPct val="115000"/>
+              </a:lnSpc>
+            </a:pPr>
+            <a:r>
+              <a:rPr sz="1000" b="1">
+                <a:solidFill>
+                  <a:srgbClr val="64748B"/>
+                </a:solidFill>
+                <a:latin typeface="Calibri"/>
+              </a:rPr>
+              <a:t>PIPELINE</a:t>
+            </a:r>
+          </a:p>
+        </p:txBody>
+      </p:sp>
+      <p:sp>
+        <p:nvSpPr>
+          <p:cNvPr id="8" name="TextBox 7"/>
+          <p:cNvSpPr txBox="1"/>
+          <p:nvPr/>
+        </p:nvSpPr>
+        <p:spPr>
+          <a:xfrm>
+            <a:off x="2944368" y="2029968"/>
+            <a:ext cx="822960" cy="228600"/>
+          </a:xfrm>
+          <a:prstGeom prst="rect">
+            <a:avLst/>
+          </a:prstGeom>
+          <a:noFill/>
+        </p:spPr>
+        <p:txBody>
+          <a:bodyPr wrap="square" lIns="0" tIns="0" rIns="0" bIns="0" anchor="t">
+            <a:spAutoFit/>
+          </a:bodyPr>
+          <a:lstStyle/>
+          <a:p>
+            <a:pPr algn="l">
+              <a:lnSpc>
+                <a:spcPct val="115000"/>
+              </a:lnSpc>
+            </a:pPr>
+            <a:r>
+              <a:rPr sz="1000" b="1">
+                <a:solidFill>
+                  <a:srgbClr val="64748B"/>
+                </a:solidFill>
+                <a:latin typeface="Calibri"/>
+              </a:rPr>
+              <a:t>P@3</a:t>
+            </a:r>
+          </a:p>
+        </p:txBody>
+      </p:sp>
+      <p:sp>
+        <p:nvSpPr>
+          <p:cNvPr id="9" name="TextBox 8"/>
+          <p:cNvSpPr txBox="1"/>
+          <p:nvPr/>
+        </p:nvSpPr>
+        <p:spPr>
+          <a:xfrm>
+            <a:off x="3858768" y="2029968"/>
+            <a:ext cx="822960" cy="228600"/>
+          </a:xfrm>
+          <a:prstGeom prst="rect">
+            <a:avLst/>
+          </a:prstGeom>
+          <a:noFill/>
+        </p:spPr>
+        <p:txBody>
+          <a:bodyPr wrap="square" lIns="0" tIns="0" rIns="0" bIns="0" anchor="t">
+            <a:spAutoFit/>
+          </a:bodyPr>
+          <a:lstStyle/>
+          <a:p>
+            <a:pPr algn="l">
+              <a:lnSpc>
+                <a:spcPct val="115000"/>
+              </a:lnSpc>
+            </a:pPr>
+            <a:r>
+              <a:rPr sz="1000" b="1">
+                <a:solidFill>
+                  <a:srgbClr val="64748B"/>
+                </a:solidFill>
+                <a:latin typeface="Calibri"/>
+              </a:rPr>
+              <a:t>R@3</a:t>
+            </a:r>
+          </a:p>
+        </p:txBody>
+      </p:sp>
+      <p:sp>
+        <p:nvSpPr>
+          <p:cNvPr id="10" name="TextBox 9"/>
+          <p:cNvSpPr txBox="1"/>
+          <p:nvPr/>
+        </p:nvSpPr>
+        <p:spPr>
+          <a:xfrm>
+            <a:off x="4773168" y="2029968"/>
+            <a:ext cx="1097280" cy="228600"/>
+          </a:xfrm>
+          <a:prstGeom prst="rect">
+            <a:avLst/>
+          </a:prstGeom>
+          <a:noFill/>
+        </p:spPr>
+        <p:txBody>
+          <a:bodyPr wrap="square" lIns="0" tIns="0" rIns="0" bIns="0" anchor="t">
+            <a:spAutoFit/>
+          </a:bodyPr>
+          <a:lstStyle/>
+          <a:p>
+            <a:pPr algn="l">
+              <a:lnSpc>
+                <a:spcPct val="115000"/>
+              </a:lnSpc>
+            </a:pPr>
+            <a:r>
+              <a:rPr sz="1000" b="1">
+                <a:solidFill>
+                  <a:srgbClr val="64748B"/>
+                </a:solidFill>
+                <a:latin typeface="Calibri"/>
+              </a:rPr>
+              <a:t>LATENCY</a:t>
+            </a:r>
+          </a:p>
+        </p:txBody>
+      </p:sp>
+      <p:sp>
+        <p:nvSpPr>
+          <p:cNvPr id="11" name="TextBox 10"/>
+          <p:cNvSpPr txBox="1"/>
+          <p:nvPr/>
+        </p:nvSpPr>
+        <p:spPr>
+          <a:xfrm>
+            <a:off x="6053328" y="2029968"/>
+            <a:ext cx="5577840" cy="228600"/>
+          </a:xfrm>
+          <a:prstGeom prst="rect">
+            <a:avLst/>
+          </a:prstGeom>
+          <a:noFill/>
+        </p:spPr>
+        <p:txBody>
+          <a:bodyPr wrap="square" lIns="0" tIns="0" rIns="0" bIns="0" anchor="t">
+            <a:spAutoFit/>
+          </a:bodyPr>
+          <a:lstStyle/>
+          <a:p>
+            <a:pPr algn="l">
+              <a:lnSpc>
+                <a:spcPct val="115000"/>
+              </a:lnSpc>
+            </a:pPr>
+            <a:r>
+              <a:rPr sz="1000" b="1">
+                <a:solidFill>
+                  <a:srgbClr val="64748B"/>
+                </a:solidFill>
+                <a:latin typeface="Calibri"/>
+              </a:rPr>
+              <a:t>WHAT THE RUN SHOWED</a:t>
+            </a:r>
+          </a:p>
+        </p:txBody>
+      </p:sp>
+      <p:sp>
+        <p:nvSpPr>
+          <p:cNvPr id="12" name="Rectangle 11"/>
           <p:cNvSpPr/>
           <p:nvPr/>
         </p:nvSpPr>
         <p:spPr>
           <a:xfrm>
-            <a:off x="566928" y="2029968"/>
-            <a:ext cx="50800" cy="804672"/>
+            <a:off x="566928" y="2304288"/>
+            <a:ext cx="11057839" cy="12700"/>
+          </a:xfrm>
+          <a:prstGeom prst="rect">
+            <a:avLst/>
+          </a:prstGeom>
+          <a:solidFill>
+            <a:srgbClr val="E2E8F0"/>
+          </a:solidFill>
+          <a:ln>
+            <a:noFill/>
+          </a:ln>
+          <a:effectLst/>
+        </p:spPr>
+        <p:style>
+          <a:lnRef idx="1">
+            <a:schemeClr val="accent1"/>
+          </a:lnRef>
+          <a:fillRef idx="3">
+            <a:schemeClr val="accent1"/>
+          </a:fillRef>
+          <a:effectRef idx="2">
+            <a:schemeClr val="accent1"/>
+          </a:effectRef>
+          <a:fontRef idx="minor">
+            <a:schemeClr val="lt1"/>
+          </a:fontRef>
+        </p:style>
+        <p:txBody>
+          <a:bodyPr rtlCol="0" anchor="ctr"/>
+          <a:lstStyle/>
+          <a:p>
+            <a:pPr algn="ctr"/>
+            <a:endParaRPr/>
+          </a:p>
+        </p:txBody>
+      </p:sp>
+      <p:sp>
+        <p:nvSpPr>
+          <p:cNvPr id="13" name="Rectangle 12"/>
+          <p:cNvSpPr/>
+          <p:nvPr/>
+        </p:nvSpPr>
+        <p:spPr>
+          <a:xfrm>
+            <a:off x="566928" y="2468880"/>
+            <a:ext cx="38100" cy="274320"/>
           </a:xfrm>
           <a:prstGeom prst="rect">
             <a:avLst/>
@@ -10222,27 +11125,28 @@
           <a:lstStyle/>
           <a:p>
             <a:pPr algn="ctr"/>
-          </a:p>
-        </p:txBody>
-      </p:sp>
-      <p:sp>
-        <p:nvSpPr>
-          <p:cNvPr id="8" name="TextBox 7"/>
-          <p:cNvSpPr txBox="1"/>
-          <p:nvPr/>
-        </p:nvSpPr>
-        <p:spPr>
-          <a:xfrm>
-            <a:off x="768096" y="2029968"/>
-            <a:ext cx="10424160" cy="320040"/>
-          </a:xfrm>
-          <a:prstGeom prst="rect">
-            <a:avLst/>
-          </a:prstGeom>
-          <a:noFill/>
-        </p:spPr>
-        <p:txBody>
-          <a:bodyPr wrap="square" anchor="t" lIns="0" rIns="0" tIns="0" bIns="0">
+            <a:endParaRPr/>
+          </a:p>
+        </p:txBody>
+      </p:sp>
+      <p:sp>
+        <p:nvSpPr>
+          <p:cNvPr id="14" name="TextBox 13"/>
+          <p:cNvSpPr txBox="1"/>
+          <p:nvPr/>
+        </p:nvSpPr>
+        <p:spPr>
+          <a:xfrm>
+            <a:off x="713232" y="2450592"/>
+            <a:ext cx="2103120" cy="274320"/>
+          </a:xfrm>
+          <a:prstGeom prst="rect">
+            <a:avLst/>
+          </a:prstGeom>
+          <a:noFill/>
+        </p:spPr>
+        <p:txBody>
+          <a:bodyPr wrap="square" lIns="0" tIns="0" rIns="0" bIns="0" anchor="t">
             <a:spAutoFit/>
           </a:bodyPr>
           <a:lstStyle/>
@@ -10253,66 +11157,228 @@
               </a:lnSpc>
             </a:pPr>
             <a:r>
-              <a:rPr sz="1700" b="1">
+              <a:rPr sz="1500" b="1">
                 <a:solidFill>
                   <a:srgbClr val="0F172A"/>
                 </a:solidFill>
                 <a:latin typeface="Calibri"/>
               </a:rPr>
-              <a:t>The three paradigms disagree about the evidence</a:t>
-            </a:r>
-          </a:p>
-        </p:txBody>
-      </p:sp>
-      <p:sp>
-        <p:nvSpPr>
-          <p:cNvPr id="9" name="TextBox 8"/>
-          <p:cNvSpPr txBox="1"/>
-          <p:nvPr/>
-        </p:nvSpPr>
-        <p:spPr>
-          <a:xfrm>
-            <a:off x="768096" y="2395728"/>
-            <a:ext cx="10241280" cy="457200"/>
-          </a:xfrm>
-          <a:prstGeom prst="rect">
-            <a:avLst/>
-          </a:prstGeom>
-          <a:noFill/>
-        </p:spPr>
-        <p:txBody>
-          <a:bodyPr wrap="square" anchor="t" lIns="0" rIns="0" tIns="0" bIns="0">
-            <a:spAutoFit/>
-          </a:bodyPr>
-          <a:lstStyle/>
-          <a:p>
-            <a:pPr algn="l">
-              <a:lnSpc>
-                <a:spcPct val="130000"/>
-              </a:lnSpc>
-            </a:pPr>
-            <a:r>
-              <a:rPr sz="1300" b="0">
+              <a:t>P1  semantic</a:t>
+            </a:r>
+          </a:p>
+        </p:txBody>
+      </p:sp>
+      <p:sp>
+        <p:nvSpPr>
+          <p:cNvPr id="15" name="TextBox 14"/>
+          <p:cNvSpPr txBox="1"/>
+          <p:nvPr/>
+        </p:nvSpPr>
+        <p:spPr>
+          <a:xfrm>
+            <a:off x="2944368" y="2450592"/>
+            <a:ext cx="1005840" cy="274320"/>
+          </a:xfrm>
+          <a:prstGeom prst="rect">
+            <a:avLst/>
+          </a:prstGeom>
+          <a:noFill/>
+        </p:spPr>
+        <p:txBody>
+          <a:bodyPr wrap="square" lIns="0" tIns="0" rIns="0" bIns="0" anchor="t">
+            <a:spAutoFit/>
+          </a:bodyPr>
+          <a:lstStyle/>
+          <a:p>
+            <a:pPr algn="l">
+              <a:lnSpc>
+                <a:spcPct val="115000"/>
+              </a:lnSpc>
+            </a:pPr>
+            <a:r>
+              <a:rPr sz="1600" b="1">
+                <a:solidFill>
+                  <a:srgbClr val="0EA5E9"/>
+                </a:solidFill>
+                <a:latin typeface="Consolas"/>
+              </a:rPr>
+              <a:t>0.42</a:t>
+            </a:r>
+          </a:p>
+        </p:txBody>
+      </p:sp>
+      <p:sp>
+        <p:nvSpPr>
+          <p:cNvPr id="16" name="TextBox 15"/>
+          <p:cNvSpPr txBox="1"/>
+          <p:nvPr/>
+        </p:nvSpPr>
+        <p:spPr>
+          <a:xfrm>
+            <a:off x="3858768" y="2450592"/>
+            <a:ext cx="1005840" cy="274320"/>
+          </a:xfrm>
+          <a:prstGeom prst="rect">
+            <a:avLst/>
+          </a:prstGeom>
+          <a:noFill/>
+        </p:spPr>
+        <p:txBody>
+          <a:bodyPr wrap="square" lIns="0" tIns="0" rIns="0" bIns="0" anchor="t">
+            <a:spAutoFit/>
+          </a:bodyPr>
+          <a:lstStyle/>
+          <a:p>
+            <a:pPr algn="l">
+              <a:lnSpc>
+                <a:spcPct val="115000"/>
+              </a:lnSpc>
+            </a:pPr>
+            <a:r>
+              <a:rPr sz="1600" b="1">
+                <a:solidFill>
+                  <a:srgbClr val="0EA5E9"/>
+                </a:solidFill>
+                <a:latin typeface="Consolas"/>
+              </a:rPr>
+              <a:t>0.69</a:t>
+            </a:r>
+          </a:p>
+        </p:txBody>
+      </p:sp>
+      <p:sp>
+        <p:nvSpPr>
+          <p:cNvPr id="17" name="TextBox 16"/>
+          <p:cNvSpPr txBox="1"/>
+          <p:nvPr/>
+        </p:nvSpPr>
+        <p:spPr>
+          <a:xfrm>
+            <a:off x="4773168" y="2450592"/>
+            <a:ext cx="1005840" cy="274320"/>
+          </a:xfrm>
+          <a:prstGeom prst="rect">
+            <a:avLst/>
+          </a:prstGeom>
+          <a:noFill/>
+        </p:spPr>
+        <p:txBody>
+          <a:bodyPr wrap="square" lIns="0" tIns="0" rIns="0" bIns="0" anchor="t">
+            <a:spAutoFit/>
+          </a:bodyPr>
+          <a:lstStyle/>
+          <a:p>
+            <a:pPr algn="l">
+              <a:lnSpc>
+                <a:spcPct val="115000"/>
+              </a:lnSpc>
+            </a:pPr>
+            <a:r>
+              <a:rPr sz="1600" b="1">
+                <a:solidFill>
+                  <a:srgbClr val="0EA5E9"/>
+                </a:solidFill>
+                <a:latin typeface="Consolas"/>
+              </a:rPr>
+              <a:t>5.34s</a:t>
+            </a:r>
+          </a:p>
+        </p:txBody>
+      </p:sp>
+      <p:sp>
+        <p:nvSpPr>
+          <p:cNvPr id="18" name="TextBox 17"/>
+          <p:cNvSpPr txBox="1"/>
+          <p:nvPr/>
+        </p:nvSpPr>
+        <p:spPr>
+          <a:xfrm>
+            <a:off x="6053328" y="2487168"/>
+            <a:ext cx="5577840" cy="274320"/>
+          </a:xfrm>
+          <a:prstGeom prst="rect">
+            <a:avLst/>
+          </a:prstGeom>
+          <a:noFill/>
+        </p:spPr>
+        <p:txBody>
+          <a:bodyPr wrap="square" lIns="0" tIns="0" rIns="0" bIns="0" anchor="t">
+            <a:spAutoFit/>
+          </a:bodyPr>
+          <a:lstStyle/>
+          <a:p>
+            <a:pPr algn="l">
+              <a:lnSpc>
+                <a:spcPct val="115000"/>
+              </a:lnSpc>
+            </a:pPr>
+            <a:r>
+              <a:rPr sz="1250" b="0">
                 <a:solidFill>
                   <a:srgbClr val="64748B"/>
                 </a:solidFill>
                 <a:latin typeface="Calibri"/>
               </a:rPr>
-              <a:t>On the same question they return different nodes, which is the effect the benchmark measures.</a:t>
-            </a:r>
-          </a:p>
-        </p:txBody>
-      </p:sp>
-      <p:sp>
-        <p:nvSpPr>
-          <p:cNvPr id="10" name="Rectangle 9"/>
+              <a:t>Found the evidence every time. The rerank is what costs the five seconds.</a:t>
+            </a:r>
+          </a:p>
+        </p:txBody>
+      </p:sp>
+      <p:sp>
+        <p:nvSpPr>
+          <p:cNvPr id="19" name="Rectangle 18"/>
           <p:cNvSpPr/>
           <p:nvPr/>
         </p:nvSpPr>
         <p:spPr>
           <a:xfrm>
-            <a:off x="566928" y="3081528"/>
-            <a:ext cx="50800" cy="804672"/>
+            <a:off x="566928" y="2871216"/>
+            <a:ext cx="11057839" cy="9525"/>
+          </a:xfrm>
+          <a:prstGeom prst="rect">
+            <a:avLst/>
+          </a:prstGeom>
+          <a:solidFill>
+            <a:srgbClr val="E2E8F0"/>
+          </a:solidFill>
+          <a:ln>
+            <a:noFill/>
+          </a:ln>
+          <a:effectLst/>
+        </p:spPr>
+        <p:style>
+          <a:lnRef idx="1">
+            <a:schemeClr val="accent1"/>
+          </a:lnRef>
+          <a:fillRef idx="3">
+            <a:schemeClr val="accent1"/>
+          </a:fillRef>
+          <a:effectRef idx="2">
+            <a:schemeClr val="accent1"/>
+          </a:effectRef>
+          <a:fontRef idx="minor">
+            <a:schemeClr val="lt1"/>
+          </a:fontRef>
+        </p:style>
+        <p:txBody>
+          <a:bodyPr rtlCol="0" anchor="ctr"/>
+          <a:lstStyle/>
+          <a:p>
+            <a:pPr algn="ctr"/>
+            <a:endParaRPr/>
+          </a:p>
+        </p:txBody>
+      </p:sp>
+      <p:sp>
+        <p:nvSpPr>
+          <p:cNvPr id="20" name="Rectangle 19"/>
+          <p:cNvSpPr/>
+          <p:nvPr/>
+        </p:nvSpPr>
+        <p:spPr>
+          <a:xfrm>
+            <a:off x="566928" y="3054096"/>
+            <a:ext cx="38100" cy="274320"/>
           </a:xfrm>
           <a:prstGeom prst="rect">
             <a:avLst/>
@@ -10344,27 +11410,28 @@
           <a:lstStyle/>
           <a:p>
             <a:pPr algn="ctr"/>
-          </a:p>
-        </p:txBody>
-      </p:sp>
-      <p:sp>
-        <p:nvSpPr>
-          <p:cNvPr id="11" name="TextBox 10"/>
-          <p:cNvSpPr txBox="1"/>
-          <p:nvPr/>
-        </p:nvSpPr>
-        <p:spPr>
-          <a:xfrm>
-            <a:off x="768096" y="3081528"/>
-            <a:ext cx="10424160" cy="320040"/>
-          </a:xfrm>
-          <a:prstGeom prst="rect">
-            <a:avLst/>
-          </a:prstGeom>
-          <a:noFill/>
-        </p:spPr>
-        <p:txBody>
-          <a:bodyPr wrap="square" anchor="t" lIns="0" rIns="0" tIns="0" bIns="0">
+            <a:endParaRPr/>
+          </a:p>
+        </p:txBody>
+      </p:sp>
+      <p:sp>
+        <p:nvSpPr>
+          <p:cNvPr id="21" name="TextBox 20"/>
+          <p:cNvSpPr txBox="1"/>
+          <p:nvPr/>
+        </p:nvSpPr>
+        <p:spPr>
+          <a:xfrm>
+            <a:off x="713232" y="3035808"/>
+            <a:ext cx="2103120" cy="274320"/>
+          </a:xfrm>
+          <a:prstGeom prst="rect">
+            <a:avLst/>
+          </a:prstGeom>
+          <a:noFill/>
+        </p:spPr>
+        <p:txBody>
+          <a:bodyPr wrap="square" lIns="0" tIns="0" rIns="0" bIns="0" anchor="t">
             <a:spAutoFit/>
           </a:bodyPr>
           <a:lstStyle/>
@@ -10375,66 +11442,228 @@
               </a:lnSpc>
             </a:pPr>
             <a:r>
-              <a:rPr sz="1700" b="1">
+              <a:rPr sz="1500" b="1">
                 <a:solidFill>
                   <a:srgbClr val="0F172A"/>
                 </a:solidFill>
                 <a:latin typeface="Calibri"/>
               </a:rPr>
-              <a:t>Cost separates them as sharply as accuracy might</a:t>
-            </a:r>
-          </a:p>
-        </p:txBody>
-      </p:sp>
-      <p:sp>
-        <p:nvSpPr>
-          <p:cNvPr id="12" name="TextBox 11"/>
-          <p:cNvSpPr txBox="1"/>
-          <p:nvPr/>
-        </p:nvSpPr>
-        <p:spPr>
-          <a:xfrm>
-            <a:off x="768096" y="3447288"/>
-            <a:ext cx="10241280" cy="457200"/>
-          </a:xfrm>
-          <a:prstGeom prst="rect">
-            <a:avLst/>
-          </a:prstGeom>
-          <a:noFill/>
-        </p:spPr>
-        <p:txBody>
-          <a:bodyPr wrap="square" anchor="t" lIns="0" rIns="0" tIns="0" bIns="0">
-            <a:spAutoFit/>
-          </a:bodyPr>
-          <a:lstStyle/>
-          <a:p>
-            <a:pPr algn="l">
-              <a:lnSpc>
-                <a:spcPct val="130000"/>
-              </a:lnSpc>
-            </a:pPr>
-            <a:r>
-              <a:rPr sz="1300" b="0">
+              <a:t>P2  statistical</a:t>
+            </a:r>
+          </a:p>
+        </p:txBody>
+      </p:sp>
+      <p:sp>
+        <p:nvSpPr>
+          <p:cNvPr id="22" name="TextBox 21"/>
+          <p:cNvSpPr txBox="1"/>
+          <p:nvPr/>
+        </p:nvSpPr>
+        <p:spPr>
+          <a:xfrm>
+            <a:off x="2944368" y="3035808"/>
+            <a:ext cx="1005840" cy="274320"/>
+          </a:xfrm>
+          <a:prstGeom prst="rect">
+            <a:avLst/>
+          </a:prstGeom>
+          <a:noFill/>
+        </p:spPr>
+        <p:txBody>
+          <a:bodyPr wrap="square" lIns="0" tIns="0" rIns="0" bIns="0" anchor="t">
+            <a:spAutoFit/>
+          </a:bodyPr>
+          <a:lstStyle/>
+          <a:p>
+            <a:pPr algn="l">
+              <a:lnSpc>
+                <a:spcPct val="115000"/>
+              </a:lnSpc>
+            </a:pPr>
+            <a:r>
+              <a:rPr sz="1600" b="1">
+                <a:solidFill>
+                  <a:srgbClr val="10B981"/>
+                </a:solidFill>
+                <a:latin typeface="Consolas"/>
+              </a:rPr>
+              <a:t>0.50</a:t>
+            </a:r>
+          </a:p>
+        </p:txBody>
+      </p:sp>
+      <p:sp>
+        <p:nvSpPr>
+          <p:cNvPr id="23" name="TextBox 22"/>
+          <p:cNvSpPr txBox="1"/>
+          <p:nvPr/>
+        </p:nvSpPr>
+        <p:spPr>
+          <a:xfrm>
+            <a:off x="3858768" y="3035808"/>
+            <a:ext cx="1005840" cy="274320"/>
+          </a:xfrm>
+          <a:prstGeom prst="rect">
+            <a:avLst/>
+          </a:prstGeom>
+          <a:noFill/>
+        </p:spPr>
+        <p:txBody>
+          <a:bodyPr wrap="square" lIns="0" tIns="0" rIns="0" bIns="0" anchor="t">
+            <a:spAutoFit/>
+          </a:bodyPr>
+          <a:lstStyle/>
+          <a:p>
+            <a:pPr algn="l">
+              <a:lnSpc>
+                <a:spcPct val="115000"/>
+              </a:lnSpc>
+            </a:pPr>
+            <a:r>
+              <a:rPr sz="1600" b="1">
+                <a:solidFill>
+                  <a:srgbClr val="10B981"/>
+                </a:solidFill>
+                <a:latin typeface="Consolas"/>
+              </a:rPr>
+              <a:t>0.75</a:t>
+            </a:r>
+          </a:p>
+        </p:txBody>
+      </p:sp>
+      <p:sp>
+        <p:nvSpPr>
+          <p:cNvPr id="24" name="TextBox 23"/>
+          <p:cNvSpPr txBox="1"/>
+          <p:nvPr/>
+        </p:nvSpPr>
+        <p:spPr>
+          <a:xfrm>
+            <a:off x="4773168" y="3035808"/>
+            <a:ext cx="1005840" cy="274320"/>
+          </a:xfrm>
+          <a:prstGeom prst="rect">
+            <a:avLst/>
+          </a:prstGeom>
+          <a:noFill/>
+        </p:spPr>
+        <p:txBody>
+          <a:bodyPr wrap="square" lIns="0" tIns="0" rIns="0" bIns="0" anchor="t">
+            <a:spAutoFit/>
+          </a:bodyPr>
+          <a:lstStyle/>
+          <a:p>
+            <a:pPr algn="l">
+              <a:lnSpc>
+                <a:spcPct val="115000"/>
+              </a:lnSpc>
+            </a:pPr>
+            <a:r>
+              <a:rPr sz="1600" b="1">
+                <a:solidFill>
+                  <a:srgbClr val="10B981"/>
+                </a:solidFill>
+                <a:latin typeface="Consolas"/>
+              </a:rPr>
+              <a:t>0.02s</a:t>
+            </a:r>
+          </a:p>
+        </p:txBody>
+      </p:sp>
+      <p:sp>
+        <p:nvSpPr>
+          <p:cNvPr id="25" name="TextBox 24"/>
+          <p:cNvSpPr txBox="1"/>
+          <p:nvPr/>
+        </p:nvSpPr>
+        <p:spPr>
+          <a:xfrm>
+            <a:off x="6053328" y="3072384"/>
+            <a:ext cx="5577840" cy="274320"/>
+          </a:xfrm>
+          <a:prstGeom prst="rect">
+            <a:avLst/>
+          </a:prstGeom>
+          <a:noFill/>
+        </p:spPr>
+        <p:txBody>
+          <a:bodyPr wrap="square" lIns="0" tIns="0" rIns="0" bIns="0" anchor="t">
+            <a:spAutoFit/>
+          </a:bodyPr>
+          <a:lstStyle/>
+          <a:p>
+            <a:pPr algn="l">
+              <a:lnSpc>
+                <a:spcPct val="115000"/>
+              </a:lnSpc>
+            </a:pPr>
+            <a:r>
+              <a:rPr sz="1250" b="0">
                 <a:solidFill>
                   <a:srgbClr val="64748B"/>
                 </a:solidFill>
                 <a:latin typeface="Calibri"/>
               </a:rPr>
-              <a:t>BM25 retrieves with no model at all, while the vector arm pays for a cross-encoder on every query.</a:t>
-            </a:r>
-          </a:p>
-        </p:txBody>
-      </p:sp>
-      <p:sp>
-        <p:nvSpPr>
-          <p:cNvPr id="13" name="Rectangle 12"/>
+              <a:t>Ahead here. Three of the four answers sit in tables, BM25's home ground.</a:t>
+            </a:r>
+          </a:p>
+        </p:txBody>
+      </p:sp>
+      <p:sp>
+        <p:nvSpPr>
+          <p:cNvPr id="26" name="Rectangle 25"/>
           <p:cNvSpPr/>
           <p:nvPr/>
         </p:nvSpPr>
         <p:spPr>
           <a:xfrm>
-            <a:off x="566928" y="4133088"/>
-            <a:ext cx="50800" cy="804672"/>
+            <a:off x="566928" y="3456432"/>
+            <a:ext cx="11057839" cy="9525"/>
+          </a:xfrm>
+          <a:prstGeom prst="rect">
+            <a:avLst/>
+          </a:prstGeom>
+          <a:solidFill>
+            <a:srgbClr val="E2E8F0"/>
+          </a:solidFill>
+          <a:ln>
+            <a:noFill/>
+          </a:ln>
+          <a:effectLst/>
+        </p:spPr>
+        <p:style>
+          <a:lnRef idx="1">
+            <a:schemeClr val="accent1"/>
+          </a:lnRef>
+          <a:fillRef idx="3">
+            <a:schemeClr val="accent1"/>
+          </a:fillRef>
+          <a:effectRef idx="2">
+            <a:schemeClr val="accent1"/>
+          </a:effectRef>
+          <a:fontRef idx="minor">
+            <a:schemeClr val="lt1"/>
+          </a:fontRef>
+        </p:style>
+        <p:txBody>
+          <a:bodyPr rtlCol="0" anchor="ctr"/>
+          <a:lstStyle/>
+          <a:p>
+            <a:pPr algn="ctr"/>
+            <a:endParaRPr/>
+          </a:p>
+        </p:txBody>
+      </p:sp>
+      <p:sp>
+        <p:nvSpPr>
+          <p:cNvPr id="27" name="Rectangle 26"/>
+          <p:cNvSpPr/>
+          <p:nvPr/>
+        </p:nvSpPr>
+        <p:spPr>
+          <a:xfrm>
+            <a:off x="566928" y="3639312"/>
+            <a:ext cx="38100" cy="274320"/>
           </a:xfrm>
           <a:prstGeom prst="rect">
             <a:avLst/>
@@ -10466,27 +11695,28 @@
           <a:lstStyle/>
           <a:p>
             <a:pPr algn="ctr"/>
-          </a:p>
-        </p:txBody>
-      </p:sp>
-      <p:sp>
-        <p:nvSpPr>
-          <p:cNvPr id="14" name="TextBox 13"/>
-          <p:cNvSpPr txBox="1"/>
-          <p:nvPr/>
-        </p:nvSpPr>
-        <p:spPr>
-          <a:xfrm>
-            <a:off x="768096" y="4133088"/>
-            <a:ext cx="10424160" cy="320040"/>
-          </a:xfrm>
-          <a:prstGeom prst="rect">
-            <a:avLst/>
-          </a:prstGeom>
-          <a:noFill/>
-        </p:spPr>
-        <p:txBody>
-          <a:bodyPr wrap="square" anchor="t" lIns="0" rIns="0" tIns="0" bIns="0">
+            <a:endParaRPr/>
+          </a:p>
+        </p:txBody>
+      </p:sp>
+      <p:sp>
+        <p:nvSpPr>
+          <p:cNvPr id="28" name="TextBox 27"/>
+          <p:cNvSpPr txBox="1"/>
+          <p:nvPr/>
+        </p:nvSpPr>
+        <p:spPr>
+          <a:xfrm>
+            <a:off x="713232" y="3621024"/>
+            <a:ext cx="2103120" cy="274320"/>
+          </a:xfrm>
+          <a:prstGeom prst="rect">
+            <a:avLst/>
+          </a:prstGeom>
+          <a:noFill/>
+        </p:spPr>
+        <p:txBody>
+          <a:bodyPr wrap="square" lIns="0" tIns="0" rIns="0" bIns="0" anchor="t">
             <a:spAutoFit/>
           </a:bodyPr>
           <a:lstStyle/>
@@ -10497,35 +11727,320 @@
               </a:lnSpc>
             </a:pPr>
             <a:r>
-              <a:rPr sz="1700" b="1">
+              <a:rPr sz="1500" b="1">
                 <a:solidFill>
                   <a:srgbClr val="0F172A"/>
                 </a:solidFill>
                 <a:latin typeface="Calibri"/>
               </a:rPr>
-              <a:t>Free-tier limits shaped the architecture</a:t>
-            </a:r>
-          </a:p>
-        </p:txBody>
-      </p:sp>
-      <p:sp>
-        <p:nvSpPr>
-          <p:cNvPr id="15" name="TextBox 14"/>
-          <p:cNvSpPr txBox="1"/>
-          <p:nvPr/>
-        </p:nvSpPr>
-        <p:spPr>
-          <a:xfrm>
-            <a:off x="768096" y="4498848"/>
-            <a:ext cx="10241280" cy="457200"/>
-          </a:xfrm>
-          <a:prstGeom prst="rect">
-            <a:avLst/>
-          </a:prstGeom>
-          <a:noFill/>
-        </p:spPr>
-        <p:txBody>
-          <a:bodyPr wrap="square" anchor="t" lIns="0" rIns="0" tIns="0" bIns="0">
+              <a:t>P3  structural</a:t>
+            </a:r>
+          </a:p>
+        </p:txBody>
+      </p:sp>
+      <p:sp>
+        <p:nvSpPr>
+          <p:cNvPr id="29" name="TextBox 28"/>
+          <p:cNvSpPr txBox="1"/>
+          <p:nvPr/>
+        </p:nvSpPr>
+        <p:spPr>
+          <a:xfrm>
+            <a:off x="2944368" y="3621024"/>
+            <a:ext cx="1005840" cy="274320"/>
+          </a:xfrm>
+          <a:prstGeom prst="rect">
+            <a:avLst/>
+          </a:prstGeom>
+          <a:noFill/>
+        </p:spPr>
+        <p:txBody>
+          <a:bodyPr wrap="square" lIns="0" tIns="0" rIns="0" bIns="0" anchor="t">
+            <a:spAutoFit/>
+          </a:bodyPr>
+          <a:lstStyle/>
+          <a:p>
+            <a:pPr algn="l">
+              <a:lnSpc>
+                <a:spcPct val="115000"/>
+              </a:lnSpc>
+            </a:pPr>
+            <a:r>
+              <a:rPr sz="1600" b="1">
+                <a:solidFill>
+                  <a:srgbClr val="8B5CF6"/>
+                </a:solidFill>
+                <a:latin typeface="Consolas"/>
+              </a:rPr>
+              <a:t>0.00</a:t>
+            </a:r>
+          </a:p>
+        </p:txBody>
+      </p:sp>
+      <p:sp>
+        <p:nvSpPr>
+          <p:cNvPr id="30" name="TextBox 29"/>
+          <p:cNvSpPr txBox="1"/>
+          <p:nvPr/>
+        </p:nvSpPr>
+        <p:spPr>
+          <a:xfrm>
+            <a:off x="3858768" y="3621024"/>
+            <a:ext cx="1005840" cy="274320"/>
+          </a:xfrm>
+          <a:prstGeom prst="rect">
+            <a:avLst/>
+          </a:prstGeom>
+          <a:noFill/>
+        </p:spPr>
+        <p:txBody>
+          <a:bodyPr wrap="square" lIns="0" tIns="0" rIns="0" bIns="0" anchor="t">
+            <a:spAutoFit/>
+          </a:bodyPr>
+          <a:lstStyle/>
+          <a:p>
+            <a:pPr algn="l">
+              <a:lnSpc>
+                <a:spcPct val="115000"/>
+              </a:lnSpc>
+            </a:pPr>
+            <a:r>
+              <a:rPr sz="1600" b="1">
+                <a:solidFill>
+                  <a:srgbClr val="8B5CF6"/>
+                </a:solidFill>
+                <a:latin typeface="Consolas"/>
+              </a:rPr>
+              <a:t>0.00</a:t>
+            </a:r>
+          </a:p>
+        </p:txBody>
+      </p:sp>
+      <p:sp>
+        <p:nvSpPr>
+          <p:cNvPr id="31" name="TextBox 30"/>
+          <p:cNvSpPr txBox="1"/>
+          <p:nvPr/>
+        </p:nvSpPr>
+        <p:spPr>
+          <a:xfrm>
+            <a:off x="4773168" y="3621024"/>
+            <a:ext cx="1005840" cy="274320"/>
+          </a:xfrm>
+          <a:prstGeom prst="rect">
+            <a:avLst/>
+          </a:prstGeom>
+          <a:noFill/>
+        </p:spPr>
+        <p:txBody>
+          <a:bodyPr wrap="square" lIns="0" tIns="0" rIns="0" bIns="0" anchor="t">
+            <a:spAutoFit/>
+          </a:bodyPr>
+          <a:lstStyle/>
+          <a:p>
+            <a:pPr algn="l">
+              <a:lnSpc>
+                <a:spcPct val="115000"/>
+              </a:lnSpc>
+            </a:pPr>
+            <a:r>
+              <a:rPr sz="1600" b="1">
+                <a:solidFill>
+                  <a:srgbClr val="8B5CF6"/>
+                </a:solidFill>
+                <a:latin typeface="Consolas"/>
+              </a:rPr>
+              <a:t>4.24s</a:t>
+            </a:r>
+          </a:p>
+        </p:txBody>
+      </p:sp>
+      <p:sp>
+        <p:nvSpPr>
+          <p:cNvPr id="32" name="TextBox 31"/>
+          <p:cNvSpPr txBox="1"/>
+          <p:nvPr/>
+        </p:nvSpPr>
+        <p:spPr>
+          <a:xfrm>
+            <a:off x="6053328" y="3657600"/>
+            <a:ext cx="5577840" cy="274320"/>
+          </a:xfrm>
+          <a:prstGeom prst="rect">
+            <a:avLst/>
+          </a:prstGeom>
+          <a:noFill/>
+        </p:spPr>
+        <p:txBody>
+          <a:bodyPr wrap="square" lIns="0" tIns="0" rIns="0" bIns="0" anchor="t">
+            <a:spAutoFit/>
+          </a:bodyPr>
+          <a:lstStyle/>
+          <a:p>
+            <a:pPr algn="l">
+              <a:lnSpc>
+                <a:spcPct val="115000"/>
+              </a:lnSpc>
+            </a:pPr>
+            <a:r>
+              <a:rPr sz="1250" b="0">
+                <a:solidFill>
+                  <a:srgbClr val="64748B"/>
+                </a:solidFill>
+                <a:latin typeface="Calibri"/>
+              </a:rPr>
+              <a:t>Returned real nodes, from the wrong section. It commits to a branch at the root.</a:t>
+            </a:r>
+          </a:p>
+        </p:txBody>
+      </p:sp>
+      <p:sp>
+        <p:nvSpPr>
+          <p:cNvPr id="33" name="Rectangle 32"/>
+          <p:cNvSpPr/>
+          <p:nvPr/>
+        </p:nvSpPr>
+        <p:spPr>
+          <a:xfrm>
+            <a:off x="566928" y="4041648"/>
+            <a:ext cx="11057839" cy="9525"/>
+          </a:xfrm>
+          <a:prstGeom prst="rect">
+            <a:avLst/>
+          </a:prstGeom>
+          <a:solidFill>
+            <a:srgbClr val="E2E8F0"/>
+          </a:solidFill>
+          <a:ln>
+            <a:noFill/>
+          </a:ln>
+          <a:effectLst/>
+        </p:spPr>
+        <p:style>
+          <a:lnRef idx="1">
+            <a:schemeClr val="accent1"/>
+          </a:lnRef>
+          <a:fillRef idx="3">
+            <a:schemeClr val="accent1"/>
+          </a:fillRef>
+          <a:effectRef idx="2">
+            <a:schemeClr val="accent1"/>
+          </a:effectRef>
+          <a:fontRef idx="minor">
+            <a:schemeClr val="lt1"/>
+          </a:fontRef>
+        </p:style>
+        <p:txBody>
+          <a:bodyPr rtlCol="0" anchor="ctr"/>
+          <a:lstStyle/>
+          <a:p>
+            <a:pPr algn="ctr"/>
+            <a:endParaRPr/>
+          </a:p>
+        </p:txBody>
+      </p:sp>
+      <p:sp>
+        <p:nvSpPr>
+          <p:cNvPr id="34" name="Rectangle 33"/>
+          <p:cNvSpPr/>
+          <p:nvPr/>
+        </p:nvSpPr>
+        <p:spPr>
+          <a:xfrm>
+            <a:off x="566928" y="4315968"/>
+            <a:ext cx="3442106" cy="38100"/>
+          </a:xfrm>
+          <a:prstGeom prst="rect">
+            <a:avLst/>
+          </a:prstGeom>
+          <a:solidFill>
+            <a:srgbClr val="0EA5E9"/>
+          </a:solidFill>
+          <a:ln>
+            <a:noFill/>
+          </a:ln>
+          <a:effectLst/>
+        </p:spPr>
+        <p:style>
+          <a:lnRef idx="1">
+            <a:schemeClr val="accent1"/>
+          </a:lnRef>
+          <a:fillRef idx="3">
+            <a:schemeClr val="accent1"/>
+          </a:fillRef>
+          <a:effectRef idx="2">
+            <a:schemeClr val="accent1"/>
+          </a:effectRef>
+          <a:fontRef idx="minor">
+            <a:schemeClr val="lt1"/>
+          </a:fontRef>
+        </p:style>
+        <p:txBody>
+          <a:bodyPr rtlCol="0" anchor="ctr"/>
+          <a:lstStyle/>
+          <a:p>
+            <a:pPr algn="ctr"/>
+            <a:endParaRPr/>
+          </a:p>
+        </p:txBody>
+      </p:sp>
+      <p:sp>
+        <p:nvSpPr>
+          <p:cNvPr id="35" name="TextBox 34"/>
+          <p:cNvSpPr txBox="1"/>
+          <p:nvPr/>
+        </p:nvSpPr>
+        <p:spPr>
+          <a:xfrm>
+            <a:off x="566928" y="4480560"/>
+            <a:ext cx="3442106" cy="274320"/>
+          </a:xfrm>
+          <a:prstGeom prst="rect">
+            <a:avLst/>
+          </a:prstGeom>
+          <a:noFill/>
+        </p:spPr>
+        <p:txBody>
+          <a:bodyPr wrap="square" lIns="0" tIns="0" rIns="0" bIns="0" anchor="t">
+            <a:spAutoFit/>
+          </a:bodyPr>
+          <a:lstStyle/>
+          <a:p>
+            <a:pPr algn="l">
+              <a:lnSpc>
+                <a:spcPct val="115000"/>
+              </a:lnSpc>
+            </a:pPr>
+            <a:r>
+              <a:rPr sz="1500" b="1">
+                <a:solidFill>
+                  <a:srgbClr val="0F172A"/>
+                </a:solidFill>
+                <a:latin typeface="Calibri"/>
+              </a:rPr>
+              <a:t>Never all three agreed</a:t>
+            </a:r>
+          </a:p>
+        </p:txBody>
+      </p:sp>
+      <p:sp>
+        <p:nvSpPr>
+          <p:cNvPr id="36" name="TextBox 35"/>
+          <p:cNvSpPr txBox="1"/>
+          <p:nvPr/>
+        </p:nvSpPr>
+        <p:spPr>
+          <a:xfrm>
+            <a:off x="566928" y="4846320"/>
+            <a:ext cx="3442106" cy="731520"/>
+          </a:xfrm>
+          <a:prstGeom prst="rect">
+            <a:avLst/>
+          </a:prstGeom>
+          <a:noFill/>
+        </p:spPr>
+        <p:txBody>
+          <a:bodyPr wrap="square" lIns="0" tIns="0" rIns="0" bIns="0" anchor="t">
             <a:spAutoFit/>
           </a:bodyPr>
           <a:lstStyle/>
@@ -10536,20 +12051,350 @@
               </a:lnSpc>
             </a:pPr>
             <a:r>
-              <a:rPr sz="1300" b="0">
+              <a:rPr sz="1250" b="0">
                 <a:solidFill>
                   <a:srgbClr val="64748B"/>
                 </a:solidFill>
                 <a:latin typeface="Calibri"/>
               </a:rPr>
-              <a:t>The free quota runs out part-way through a run, which forced three providers and a resumable key.</a:t>
-            </a:r>
-          </a:p>
-        </p:txBody>
-      </p:sp>
-      <p:sp>
-        <p:nvSpPr>
-          <p:cNvPr id="16" name="TextBox 15"/>
+              <a:t>Seven or eight distinct nodes came back across nine slots, on every question.</a:t>
+            </a:r>
+          </a:p>
+        </p:txBody>
+      </p:sp>
+      <p:sp>
+        <p:nvSpPr>
+          <p:cNvPr id="37" name="Rectangle 36"/>
+          <p:cNvSpPr/>
+          <p:nvPr/>
+        </p:nvSpPr>
+        <p:spPr>
+          <a:xfrm>
+            <a:off x="4374794" y="4315968"/>
+            <a:ext cx="3442106" cy="38100"/>
+          </a:xfrm>
+          <a:prstGeom prst="rect">
+            <a:avLst/>
+          </a:prstGeom>
+          <a:solidFill>
+            <a:srgbClr val="8B5CF6"/>
+          </a:solidFill>
+          <a:ln>
+            <a:noFill/>
+          </a:ln>
+          <a:effectLst/>
+        </p:spPr>
+        <p:style>
+          <a:lnRef idx="1">
+            <a:schemeClr val="accent1"/>
+          </a:lnRef>
+          <a:fillRef idx="3">
+            <a:schemeClr val="accent1"/>
+          </a:fillRef>
+          <a:effectRef idx="2">
+            <a:schemeClr val="accent1"/>
+          </a:effectRef>
+          <a:fontRef idx="minor">
+            <a:schemeClr val="lt1"/>
+          </a:fontRef>
+        </p:style>
+        <p:txBody>
+          <a:bodyPr rtlCol="0" anchor="ctr"/>
+          <a:lstStyle/>
+          <a:p>
+            <a:pPr algn="ctr"/>
+            <a:endParaRPr/>
+          </a:p>
+        </p:txBody>
+      </p:sp>
+      <p:sp>
+        <p:nvSpPr>
+          <p:cNvPr id="38" name="TextBox 37"/>
+          <p:cNvSpPr txBox="1"/>
+          <p:nvPr/>
+        </p:nvSpPr>
+        <p:spPr>
+          <a:xfrm>
+            <a:off x="4374794" y="4480560"/>
+            <a:ext cx="3442106" cy="274320"/>
+          </a:xfrm>
+          <a:prstGeom prst="rect">
+            <a:avLst/>
+          </a:prstGeom>
+          <a:noFill/>
+        </p:spPr>
+        <p:txBody>
+          <a:bodyPr wrap="square" lIns="0" tIns="0" rIns="0" bIns="0" anchor="t">
+            <a:spAutoFit/>
+          </a:bodyPr>
+          <a:lstStyle/>
+          <a:p>
+            <a:pPr algn="l">
+              <a:lnSpc>
+                <a:spcPct val="115000"/>
+              </a:lnSpc>
+            </a:pPr>
+            <a:r>
+              <a:rPr sz="1500" b="1">
+                <a:solidFill>
+                  <a:srgbClr val="0F172A"/>
+                </a:solidFill>
+                <a:latin typeface="Calibri"/>
+              </a:rPr>
+              <a:t>P3's zero is its architecture</a:t>
+            </a:r>
+          </a:p>
+        </p:txBody>
+      </p:sp>
+      <p:sp>
+        <p:nvSpPr>
+          <p:cNvPr id="39" name="TextBox 38"/>
+          <p:cNvSpPr txBox="1"/>
+          <p:nvPr/>
+        </p:nvSpPr>
+        <p:spPr>
+          <a:xfrm>
+            <a:off x="4374794" y="4846320"/>
+            <a:ext cx="3442106" cy="731520"/>
+          </a:xfrm>
+          <a:prstGeom prst="rect">
+            <a:avLst/>
+          </a:prstGeom>
+          <a:noFill/>
+        </p:spPr>
+        <p:txBody>
+          <a:bodyPr wrap="square" lIns="0" tIns="0" rIns="0" bIns="0" anchor="t">
+            <a:spAutoFit/>
+          </a:bodyPr>
+          <a:lstStyle/>
+          <a:p>
+            <a:pPr algn="l">
+              <a:lnSpc>
+                <a:spcPct val="130000"/>
+              </a:lnSpc>
+            </a:pPr>
+            <a:r>
+              <a:rPr sz="1250" b="0">
+                <a:solidFill>
+                  <a:srgbClr val="64748B"/>
+                </a:solidFill>
+                <a:latin typeface="Calibri"/>
+              </a:rPr>
+              <a:t>It chose the lease tables in Item 8 over the properties table in Item 2. A tree walk cannot reverse.</a:t>
+            </a:r>
+          </a:p>
+        </p:txBody>
+      </p:sp>
+      <p:sp>
+        <p:nvSpPr>
+          <p:cNvPr id="40" name="Rectangle 39"/>
+          <p:cNvSpPr/>
+          <p:nvPr/>
+        </p:nvSpPr>
+        <p:spPr>
+          <a:xfrm>
+            <a:off x="8182660" y="4315968"/>
+            <a:ext cx="3442106" cy="38100"/>
+          </a:xfrm>
+          <a:prstGeom prst="rect">
+            <a:avLst/>
+          </a:prstGeom>
+          <a:solidFill>
+            <a:srgbClr val="F59E0B"/>
+          </a:solidFill>
+          <a:ln>
+            <a:noFill/>
+          </a:ln>
+          <a:effectLst/>
+        </p:spPr>
+        <p:style>
+          <a:lnRef idx="1">
+            <a:schemeClr val="accent1"/>
+          </a:lnRef>
+          <a:fillRef idx="3">
+            <a:schemeClr val="accent1"/>
+          </a:fillRef>
+          <a:effectRef idx="2">
+            <a:schemeClr val="accent1"/>
+          </a:effectRef>
+          <a:fontRef idx="minor">
+            <a:schemeClr val="lt1"/>
+          </a:fontRef>
+        </p:style>
+        <p:txBody>
+          <a:bodyPr rtlCol="0" anchor="ctr"/>
+          <a:lstStyle/>
+          <a:p>
+            <a:pPr algn="ctr"/>
+            <a:endParaRPr/>
+          </a:p>
+        </p:txBody>
+      </p:sp>
+      <p:sp>
+        <p:nvSpPr>
+          <p:cNvPr id="41" name="TextBox 40"/>
+          <p:cNvSpPr txBox="1"/>
+          <p:nvPr/>
+        </p:nvSpPr>
+        <p:spPr>
+          <a:xfrm>
+            <a:off x="8182660" y="4480560"/>
+            <a:ext cx="3442106" cy="274320"/>
+          </a:xfrm>
+          <a:prstGeom prst="rect">
+            <a:avLst/>
+          </a:prstGeom>
+          <a:noFill/>
+        </p:spPr>
+        <p:txBody>
+          <a:bodyPr wrap="square" lIns="0" tIns="0" rIns="0" bIns="0" anchor="t">
+            <a:spAutoFit/>
+          </a:bodyPr>
+          <a:lstStyle/>
+          <a:p>
+            <a:pPr algn="l">
+              <a:lnSpc>
+                <a:spcPct val="115000"/>
+              </a:lnSpc>
+            </a:pPr>
+            <a:r>
+              <a:rPr sz="1500" b="1">
+                <a:solidFill>
+                  <a:srgbClr val="0F172A"/>
+                </a:solidFill>
+                <a:latin typeface="Calibri"/>
+              </a:rPr>
+              <a:t>0.33 was the maximum possible</a:t>
+            </a:r>
+          </a:p>
+        </p:txBody>
+      </p:sp>
+      <p:sp>
+        <p:nvSpPr>
+          <p:cNvPr id="42" name="TextBox 41"/>
+          <p:cNvSpPr txBox="1"/>
+          <p:nvPr/>
+        </p:nvSpPr>
+        <p:spPr>
+          <a:xfrm>
+            <a:off x="8182660" y="4846320"/>
+            <a:ext cx="3442106" cy="731520"/>
+          </a:xfrm>
+          <a:prstGeom prst="rect">
+            <a:avLst/>
+          </a:prstGeom>
+          <a:noFill/>
+        </p:spPr>
+        <p:txBody>
+          <a:bodyPr wrap="square" lIns="0" tIns="0" rIns="0" bIns="0" anchor="t">
+            <a:spAutoFit/>
+          </a:bodyPr>
+          <a:lstStyle/>
+          <a:p>
+            <a:pPr algn="l">
+              <a:lnSpc>
+                <a:spcPct val="130000"/>
+              </a:lnSpc>
+            </a:pPr>
+            <a:r>
+              <a:rPr sz="1250" b="0">
+                <a:solidFill>
+                  <a:srgbClr val="64748B"/>
+                </a:solidFill>
+                <a:latin typeface="Calibri"/>
+              </a:rPr>
+              <a:t>One correct node at K = 3 caps precision at a third. The denominator is K itself.</a:t>
+            </a:r>
+          </a:p>
+        </p:txBody>
+      </p:sp>
+      <p:sp>
+        <p:nvSpPr>
+          <p:cNvPr id="43" name="Rectangle 42"/>
+          <p:cNvSpPr/>
+          <p:nvPr/>
+        </p:nvSpPr>
+        <p:spPr>
+          <a:xfrm>
+            <a:off x="566928" y="5760720"/>
+            <a:ext cx="11057839" cy="38100"/>
+          </a:xfrm>
+          <a:prstGeom prst="rect">
+            <a:avLst/>
+          </a:prstGeom>
+          <a:solidFill>
+            <a:srgbClr val="F59E0B"/>
+          </a:solidFill>
+          <a:ln>
+            <a:noFill/>
+          </a:ln>
+          <a:effectLst/>
+        </p:spPr>
+        <p:style>
+          <a:lnRef idx="1">
+            <a:schemeClr val="accent1"/>
+          </a:lnRef>
+          <a:fillRef idx="3">
+            <a:schemeClr val="accent1"/>
+          </a:fillRef>
+          <a:effectRef idx="2">
+            <a:schemeClr val="accent1"/>
+          </a:effectRef>
+          <a:fontRef idx="minor">
+            <a:schemeClr val="lt1"/>
+          </a:fontRef>
+        </p:style>
+        <p:txBody>
+          <a:bodyPr rtlCol="0" anchor="ctr"/>
+          <a:lstStyle/>
+          <a:p>
+            <a:pPr algn="ctr"/>
+            <a:endParaRPr/>
+          </a:p>
+        </p:txBody>
+      </p:sp>
+      <p:sp>
+        <p:nvSpPr>
+          <p:cNvPr id="44" name="TextBox 43"/>
+          <p:cNvSpPr txBox="1"/>
+          <p:nvPr/>
+        </p:nvSpPr>
+        <p:spPr>
+          <a:xfrm>
+            <a:off x="566928" y="5961888"/>
+            <a:ext cx="10881360" cy="365760"/>
+          </a:xfrm>
+          <a:prstGeom prst="rect">
+            <a:avLst/>
+          </a:prstGeom>
+          <a:noFill/>
+        </p:spPr>
+        <p:txBody>
+          <a:bodyPr wrap="square" lIns="0" tIns="0" rIns="0" bIns="0" anchor="t">
+            <a:spAutoFit/>
+          </a:bodyPr>
+          <a:lstStyle/>
+          <a:p>
+            <a:pPr algn="l">
+              <a:lnSpc>
+                <a:spcPct val="115000"/>
+              </a:lnSpc>
+            </a:pPr>
+            <a:r>
+              <a:rPr sz="1400" b="1">
+                <a:solidFill>
+                  <a:srgbClr val="0F172A"/>
+                </a:solidFill>
+                <a:latin typeface="Calibri"/>
+              </a:rPr>
+              <a:t>Four questions on one filing show the mechanism working. The benchmark proper is 900 runs and it has not started.</a:t>
+            </a:r>
+          </a:p>
+        </p:txBody>
+      </p:sp>
+      <p:sp>
+        <p:nvSpPr>
+          <p:cNvPr id="45" name="TextBox 44"/>
           <p:cNvSpPr txBox="1"/>
           <p:nvPr/>
         </p:nvSpPr>
@@ -10564,7 +12409,7 @@
           <a:noFill/>
         </p:spPr>
         <p:txBody>
-          <a:bodyPr wrap="square" anchor="t" lIns="0" rIns="0" tIns="0" bIns="0">
+          <a:bodyPr wrap="square" lIns="0" tIns="0" rIns="0" bIns="0" anchor="t">
             <a:spAutoFit/>
           </a:bodyPr>
           <a:lstStyle/>
@@ -10925,44 +12770,44 @@
         <a:sysClr val="window" lastClr="FFFFFF"/>
       </a:lt1>
       <a:dk2>
-        <a:srgbClr val="1F497D"/>
+        <a:srgbClr val="0E2841"/>
       </a:dk2>
       <a:lt2>
-        <a:srgbClr val="EEECE1"/>
+        <a:srgbClr val="E8E8E8"/>
       </a:lt2>
       <a:accent1>
-        <a:srgbClr val="4F81BD"/>
+        <a:srgbClr val="156082"/>
       </a:accent1>
       <a:accent2>
-        <a:srgbClr val="C0504D"/>
+        <a:srgbClr val="E97132"/>
       </a:accent2>
       <a:accent3>
-        <a:srgbClr val="9BBB59"/>
+        <a:srgbClr val="196B24"/>
       </a:accent3>
       <a:accent4>
-        <a:srgbClr val="8064A2"/>
+        <a:srgbClr val="0F9ED5"/>
       </a:accent4>
       <a:accent5>
-        <a:srgbClr val="4BACC6"/>
+        <a:srgbClr val="A02B93"/>
       </a:accent5>
       <a:accent6>
-        <a:srgbClr val="F79646"/>
+        <a:srgbClr val="4EA72E"/>
       </a:accent6>
       <a:hlink>
-        <a:srgbClr val="0000FF"/>
+        <a:srgbClr val="467886"/>
       </a:hlink>
       <a:folHlink>
-        <a:srgbClr val="800080"/>
+        <a:srgbClr val="96607D"/>
       </a:folHlink>
     </a:clrScheme>
     <a:fontScheme name="Office">
       <a:majorFont>
-        <a:latin typeface="Calibri"/>
+        <a:latin typeface="Aptos Display" panose="02110004020202020204"/>
         <a:ea typeface=""/>
         <a:cs typeface=""/>
-        <a:font script="Jpan" typeface="ＭＳ Ｐゴシック"/>
+        <a:font script="Jpan" typeface="游ゴシック Light"/>
         <a:font script="Hang" typeface="맑은 고딕"/>
-        <a:font script="Hans" typeface="宋体"/>
+        <a:font script="Hans" typeface="等线 Light"/>
         <a:font script="Hant" typeface="新細明體"/>
         <a:font script="Arab" typeface="Times New Roman"/>
         <a:font script="Hebr" typeface="Times New Roman"/>
@@ -10990,14 +12835,31 @@
         <a:font script="Viet" typeface="Times New Roman"/>
         <a:font script="Uigh" typeface="Microsoft Uighur"/>
         <a:font script="Geor" typeface="Sylfaen"/>
+        <a:font script="Armn" typeface="Arial"/>
+        <a:font script="Bugi" typeface="Leelawadee UI"/>
+        <a:font script="Bopo" typeface="Microsoft JhengHei"/>
+        <a:font script="Java" typeface="Javanese Text"/>
+        <a:font script="Lisu" typeface="Segoe UI"/>
+        <a:font script="Mymr" typeface="Myanmar Text"/>
+        <a:font script="Nkoo" typeface="Ebrima"/>
+        <a:font script="Olck" typeface="Nirmala UI"/>
+        <a:font script="Osma" typeface="Ebrima"/>
+        <a:font script="Phag" typeface="Phagspa"/>
+        <a:font script="Syrn" typeface="Estrangelo Edessa"/>
+        <a:font script="Syrj" typeface="Estrangelo Edessa"/>
+        <a:font script="Syre" typeface="Estrangelo Edessa"/>
+        <a:font script="Sora" typeface="Nirmala UI"/>
+        <a:font script="Tale" typeface="Microsoft Tai Le"/>
+        <a:font script="Talu" typeface="Microsoft New Tai Lue"/>
+        <a:font script="Tfng" typeface="Ebrima"/>
       </a:majorFont>
       <a:minorFont>
-        <a:latin typeface="Calibri"/>
+        <a:latin typeface="Aptos" panose="02110004020202020204"/>
         <a:ea typeface=""/>
         <a:cs typeface=""/>
-        <a:font script="Jpan" typeface="ＭＳ Ｐゴシック"/>
+        <a:font script="Jpan" typeface="游ゴシック"/>
         <a:font script="Hang" typeface="맑은 고딕"/>
-        <a:font script="Hans" typeface="宋体"/>
+        <a:font script="Hans" typeface="等线"/>
         <a:font script="Hant" typeface="新細明體"/>
         <a:font script="Arab" typeface="Arial"/>
         <a:font script="Hebr" typeface="Arial"/>
@@ -11025,6 +12887,23 @@
         <a:font script="Viet" typeface="Arial"/>
         <a:font script="Uigh" typeface="Microsoft Uighur"/>
         <a:font script="Geor" typeface="Sylfaen"/>
+        <a:font script="Armn" typeface="Arial"/>
+        <a:font script="Bugi" typeface="Leelawadee UI"/>
+        <a:font script="Bopo" typeface="Microsoft JhengHei"/>
+        <a:font script="Java" typeface="Javanese Text"/>
+        <a:font script="Lisu" typeface="Segoe UI"/>
+        <a:font script="Mymr" typeface="Myanmar Text"/>
+        <a:font script="Nkoo" typeface="Ebrima"/>
+        <a:font script="Olck" typeface="Nirmala UI"/>
+        <a:font script="Osma" typeface="Ebrima"/>
+        <a:font script="Phag" typeface="Phagspa"/>
+        <a:font script="Syrn" typeface="Estrangelo Edessa"/>
+        <a:font script="Syrj" typeface="Estrangelo Edessa"/>
+        <a:font script="Syre" typeface="Estrangelo Edessa"/>
+        <a:font script="Sora" typeface="Nirmala UI"/>
+        <a:font script="Tale" typeface="Microsoft Tai Le"/>
+        <a:font script="Talu" typeface="Microsoft New Tai Lue"/>
+        <a:font script="Tfng" typeface="Ebrima"/>
       </a:minorFont>
     </a:fontScheme>
     <a:fmtScheme name="Office">
@@ -11036,180 +12915,136 @@
           <a:gsLst>
             <a:gs pos="0">
               <a:schemeClr val="phClr">
-                <a:tint val="50000"/>
-                <a:satMod val="300000"/>
+                <a:lumMod val="110000"/>
+                <a:satMod val="105000"/>
+                <a:tint val="67000"/>
               </a:schemeClr>
             </a:gs>
-            <a:gs pos="35000">
+            <a:gs pos="50000">
               <a:schemeClr val="phClr">
-                <a:tint val="37000"/>
-                <a:satMod val="300000"/>
+                <a:lumMod val="105000"/>
+                <a:satMod val="103000"/>
+                <a:tint val="73000"/>
               </a:schemeClr>
             </a:gs>
             <a:gs pos="100000">
               <a:schemeClr val="phClr">
-                <a:tint val="15000"/>
-                <a:satMod val="350000"/>
+                <a:lumMod val="105000"/>
+                <a:satMod val="109000"/>
+                <a:tint val="81000"/>
               </a:schemeClr>
             </a:gs>
           </a:gsLst>
-          <a:lin ang="16200000" scaled="1"/>
+          <a:lin ang="5400000" scaled="0"/>
         </a:gradFill>
         <a:gradFill rotWithShape="1">
           <a:gsLst>
             <a:gs pos="0">
               <a:schemeClr val="phClr">
-                <a:tint val="100000"/>
+                <a:satMod val="103000"/>
+                <a:lumMod val="102000"/>
+                <a:tint val="94000"/>
+              </a:schemeClr>
+            </a:gs>
+            <a:gs pos="50000">
+              <a:schemeClr val="phClr">
+                <a:satMod val="110000"/>
+                <a:lumMod val="100000"/>
                 <a:shade val="100000"/>
-                <a:satMod val="130000"/>
               </a:schemeClr>
             </a:gs>
             <a:gs pos="100000">
               <a:schemeClr val="phClr">
-                <a:tint val="50000"/>
-                <a:shade val="100000"/>
-                <a:satMod val="350000"/>
+                <a:lumMod val="99000"/>
+                <a:satMod val="120000"/>
+                <a:shade val="78000"/>
               </a:schemeClr>
             </a:gs>
           </a:gsLst>
-          <a:lin ang="16200000" scaled="0"/>
+          <a:lin ang="5400000" scaled="0"/>
         </a:gradFill>
       </a:fillStyleLst>
       <a:lnStyleLst>
-        <a:ln w="9525" cap="flat" cmpd="sng" algn="ctr">
+        <a:ln w="12700" cap="flat" cmpd="sng" algn="ctr">
           <a:solidFill>
-            <a:schemeClr val="phClr">
-              <a:shade val="95000"/>
-              <a:satMod val="105000"/>
-            </a:schemeClr>
+            <a:schemeClr val="phClr"/>
           </a:solidFill>
           <a:prstDash val="solid"/>
+          <a:miter lim="800000"/>
+        </a:ln>
+        <a:ln w="19050" cap="flat" cmpd="sng" algn="ctr">
+          <a:solidFill>
+            <a:schemeClr val="phClr"/>
+          </a:solidFill>
+          <a:prstDash val="solid"/>
+          <a:miter lim="800000"/>
         </a:ln>
         <a:ln w="25400" cap="flat" cmpd="sng" algn="ctr">
           <a:solidFill>
             <a:schemeClr val="phClr"/>
           </a:solidFill>
           <a:prstDash val="solid"/>
-        </a:ln>
-        <a:ln w="38100" cap="flat" cmpd="sng" algn="ctr">
-          <a:solidFill>
-            <a:schemeClr val="phClr"/>
-          </a:solidFill>
-          <a:prstDash val="solid"/>
+          <a:miter lim="800000"/>
         </a:ln>
       </a:lnStyleLst>
       <a:effectStyleLst>
         <a:effectStyle>
+          <a:effectLst/>
+        </a:effectStyle>
+        <a:effectStyle>
+          <a:effectLst/>
+        </a:effectStyle>
+        <a:effectStyle>
           <a:effectLst>
-            <a:outerShdw blurRad="40000" dist="20000" dir="5400000" rotWithShape="0">
+            <a:outerShdw blurRad="57150" dist="19050" dir="5400000" algn="ctr" rotWithShape="0">
               <a:srgbClr val="000000">
-                <a:alpha val="38000"/>
+                <a:alpha val="63000"/>
               </a:srgbClr>
             </a:outerShdw>
           </a:effectLst>
-        </a:effectStyle>
-        <a:effectStyle>
-          <a:effectLst>
-            <a:outerShdw blurRad="40000" dist="23000" dir="5400000" rotWithShape="0">
-              <a:srgbClr val="000000">
-                <a:alpha val="35000"/>
-              </a:srgbClr>
-            </a:outerShdw>
-          </a:effectLst>
-        </a:effectStyle>
-        <a:effectStyle>
-          <a:effectLst>
-            <a:outerShdw blurRad="40000" dist="23000" dir="5400000" rotWithShape="0">
-              <a:srgbClr val="000000">
-                <a:alpha val="35000"/>
-              </a:srgbClr>
-            </a:outerShdw>
-          </a:effectLst>
-          <a:scene3d>
-            <a:camera prst="orthographicFront">
-              <a:rot lat="0" lon="0" rev="0"/>
-            </a:camera>
-            <a:lightRig rig="threePt" dir="t">
-              <a:rot lat="0" lon="0" rev="1200000"/>
-            </a:lightRig>
-          </a:scene3d>
-          <a:sp3d>
-            <a:bevelT w="63500" h="25400"/>
-          </a:sp3d>
         </a:effectStyle>
       </a:effectStyleLst>
       <a:bgFillStyleLst>
         <a:solidFill>
           <a:schemeClr val="phClr"/>
         </a:solidFill>
+        <a:solidFill>
+          <a:schemeClr val="phClr">
+            <a:tint val="95000"/>
+            <a:satMod val="170000"/>
+          </a:schemeClr>
+        </a:solidFill>
         <a:gradFill rotWithShape="1">
           <a:gsLst>
             <a:gs pos="0">
               <a:schemeClr val="phClr">
-                <a:tint val="40000"/>
-                <a:satMod val="350000"/>
+                <a:tint val="93000"/>
+                <a:satMod val="150000"/>
+                <a:shade val="98000"/>
+                <a:lumMod val="102000"/>
               </a:schemeClr>
             </a:gs>
-            <a:gs pos="40000">
+            <a:gs pos="50000">
               <a:schemeClr val="phClr">
-                <a:tint val="45000"/>
-                <a:shade val="99000"/>
-                <a:satMod val="350000"/>
+                <a:tint val="98000"/>
+                <a:satMod val="130000"/>
+                <a:shade val="90000"/>
+                <a:lumMod val="103000"/>
               </a:schemeClr>
             </a:gs>
             <a:gs pos="100000">
               <a:schemeClr val="phClr">
-                <a:shade val="20000"/>
-                <a:satMod val="255000"/>
+                <a:shade val="63000"/>
+                <a:satMod val="120000"/>
               </a:schemeClr>
             </a:gs>
           </a:gsLst>
-          <a:path path="circle">
-            <a:fillToRect l="50000" t="-80000" r="50000" b="180000"/>
-          </a:path>
-        </a:gradFill>
-        <a:gradFill rotWithShape="1">
-          <a:gsLst>
-            <a:gs pos="0">
-              <a:schemeClr val="phClr">
-                <a:tint val="80000"/>
-                <a:satMod val="300000"/>
-              </a:schemeClr>
-            </a:gs>
-            <a:gs pos="100000">
-              <a:schemeClr val="phClr">
-                <a:shade val="30000"/>
-                <a:satMod val="200000"/>
-              </a:schemeClr>
-            </a:gs>
-          </a:gsLst>
-          <a:path path="circle">
-            <a:fillToRect l="50000" t="50000" r="50000" b="50000"/>
-          </a:path>
+          <a:lin ang="5400000" scaled="0"/>
         </a:gradFill>
       </a:bgFillStyleLst>
     </a:fmtScheme>
   </a:themeElements>
   <a:objectDefaults>
-    <a:spDef>
-      <a:spPr/>
-      <a:bodyPr/>
-      <a:lstStyle/>
-      <a:style>
-        <a:lnRef idx="1">
-          <a:schemeClr val="accent1"/>
-        </a:lnRef>
-        <a:fillRef idx="3">
-          <a:schemeClr val="accent1"/>
-        </a:fillRef>
-        <a:effectRef idx="2">
-          <a:schemeClr val="accent1"/>
-        </a:effectRef>
-        <a:fontRef idx="minor">
-          <a:schemeClr val="lt1"/>
-        </a:fontRef>
-      </a:style>
-    </a:spDef>
     <a:lnDef>
       <a:spPr/>
       <a:bodyPr/>
@@ -11231,5 +13066,10 @@
     </a:lnDef>
   </a:objectDefaults>
   <a:extraClrSchemeLst/>
+  <a:extLst>
+    <a:ext uri="{05A4C25C-085E-4340-85A3-A5531E510DB2}">
+      <thm15:themeFamily xmlns:thm15="http://schemas.microsoft.com/office/thememl/2012/main" name="Office Theme" id="{2E142A2C-CD16-42D6-873A-C26D2A0506FA}" vid="{1BDDFF52-6CD6-40A5-AB3C-68EB2F1E4D0A}"/>
+    </a:ext>
+  </a:extLst>
 </a:theme>
 </file>